--- a/dbt/dbt.pptx
+++ b/dbt/dbt.pptx
@@ -104,6 +104,11 @@
       </a:defRPr>
     </a:lvl9pPr>
   </p:defaultTextStyle>
+  <p:extLst>
+    <p:ext uri="{EFAFB233-063F-42B5-8137-9DF3F51BA10A}">
+      <p15:sldGuideLst xmlns:p15="http://schemas.microsoft.com/office/powerpoint/2012/main"/>
+    </p:ext>
+  </p:extLst>
 </p:presentation>
 </file>
 
@@ -256,7 +261,7 @@
           <a:p>
             <a:fld id="{4A5B7192-DAEA-42CD-98BD-293E7644B89D}" type="datetimeFigureOut">
               <a:rPr lang="en-BE" smtClean="0"/>
-              <a:t>29/03/2026</a:t>
+              <a:t>02/04/2026</a:t>
             </a:fld>
             <a:endParaRPr lang="en-BE"/>
           </a:p>
@@ -456,7 +461,7 @@
           <a:p>
             <a:fld id="{4A5B7192-DAEA-42CD-98BD-293E7644B89D}" type="datetimeFigureOut">
               <a:rPr lang="en-BE" smtClean="0"/>
-              <a:t>29/03/2026</a:t>
+              <a:t>02/04/2026</a:t>
             </a:fld>
             <a:endParaRPr lang="en-BE"/>
           </a:p>
@@ -666,7 +671,7 @@
           <a:p>
             <a:fld id="{4A5B7192-DAEA-42CD-98BD-293E7644B89D}" type="datetimeFigureOut">
               <a:rPr lang="en-BE" smtClean="0"/>
-              <a:t>29/03/2026</a:t>
+              <a:t>02/04/2026</a:t>
             </a:fld>
             <a:endParaRPr lang="en-BE"/>
           </a:p>
@@ -866,7 +871,7 @@
           <a:p>
             <a:fld id="{4A5B7192-DAEA-42CD-98BD-293E7644B89D}" type="datetimeFigureOut">
               <a:rPr lang="en-BE" smtClean="0"/>
-              <a:t>29/03/2026</a:t>
+              <a:t>02/04/2026</a:t>
             </a:fld>
             <a:endParaRPr lang="en-BE"/>
           </a:p>
@@ -1142,7 +1147,7 @@
           <a:p>
             <a:fld id="{4A5B7192-DAEA-42CD-98BD-293E7644B89D}" type="datetimeFigureOut">
               <a:rPr lang="en-BE" smtClean="0"/>
-              <a:t>29/03/2026</a:t>
+              <a:t>02/04/2026</a:t>
             </a:fld>
             <a:endParaRPr lang="en-BE"/>
           </a:p>
@@ -1410,7 +1415,7 @@
           <a:p>
             <a:fld id="{4A5B7192-DAEA-42CD-98BD-293E7644B89D}" type="datetimeFigureOut">
               <a:rPr lang="en-BE" smtClean="0"/>
-              <a:t>29/03/2026</a:t>
+              <a:t>02/04/2026</a:t>
             </a:fld>
             <a:endParaRPr lang="en-BE"/>
           </a:p>
@@ -1825,7 +1830,7 @@
           <a:p>
             <a:fld id="{4A5B7192-DAEA-42CD-98BD-293E7644B89D}" type="datetimeFigureOut">
               <a:rPr lang="en-BE" smtClean="0"/>
-              <a:t>29/03/2026</a:t>
+              <a:t>02/04/2026</a:t>
             </a:fld>
             <a:endParaRPr lang="en-BE"/>
           </a:p>
@@ -1967,7 +1972,7 @@
           <a:p>
             <a:fld id="{4A5B7192-DAEA-42CD-98BD-293E7644B89D}" type="datetimeFigureOut">
               <a:rPr lang="en-BE" smtClean="0"/>
-              <a:t>29/03/2026</a:t>
+              <a:t>02/04/2026</a:t>
             </a:fld>
             <a:endParaRPr lang="en-BE"/>
           </a:p>
@@ -2080,7 +2085,7 @@
           <a:p>
             <a:fld id="{4A5B7192-DAEA-42CD-98BD-293E7644B89D}" type="datetimeFigureOut">
               <a:rPr lang="en-BE" smtClean="0"/>
-              <a:t>29/03/2026</a:t>
+              <a:t>02/04/2026</a:t>
             </a:fld>
             <a:endParaRPr lang="en-BE"/>
           </a:p>
@@ -2393,7 +2398,7 @@
           <a:p>
             <a:fld id="{4A5B7192-DAEA-42CD-98BD-293E7644B89D}" type="datetimeFigureOut">
               <a:rPr lang="en-BE" smtClean="0"/>
-              <a:t>29/03/2026</a:t>
+              <a:t>02/04/2026</a:t>
             </a:fld>
             <a:endParaRPr lang="en-BE"/>
           </a:p>
@@ -2682,7 +2687,7 @@
           <a:p>
             <a:fld id="{4A5B7192-DAEA-42CD-98BD-293E7644B89D}" type="datetimeFigureOut">
               <a:rPr lang="en-BE" smtClean="0"/>
-              <a:t>29/03/2026</a:t>
+              <a:t>02/04/2026</a:t>
             </a:fld>
             <a:endParaRPr lang="en-BE"/>
           </a:p>
@@ -2925,7 +2930,7 @@
           <a:p>
             <a:fld id="{4A5B7192-DAEA-42CD-98BD-293E7644B89D}" type="datetimeFigureOut">
               <a:rPr lang="en-BE" smtClean="0"/>
-              <a:t>29/03/2026</a:t>
+              <a:t>02/04/2026</a:t>
             </a:fld>
             <a:endParaRPr lang="en-BE"/>
           </a:p>
@@ -3401,23 +3406,305 @@
           </a:xfrm>
         </p:spPr>
         <p:txBody>
-          <a:bodyPr/>
-          <a:lstStyle/>
-          <a:p>
-            <a:r>
-              <a:rPr lang="en-GB" dirty="0">
+          <a:bodyPr>
+            <a:normAutofit/>
+          </a:bodyPr>
+          <a:lstStyle/>
+          <a:p>
+            <a:pPr algn="l"/>
+            <a:r>
+              <a:rPr lang="en-GB" sz="1400" dirty="0">
                 <a:hlinkClick r:id="rId2"/>
               </a:rPr>
               <a:t>https://www.udemy.com/course/simplifying-data-pipelines-using-dbt/learn/lecture/54953001?start=300#overview</a:t>
             </a:r>
             <a:r>
-              <a:rPr lang="en-GB" dirty="0"/>
+              <a:rPr lang="en-GB" sz="1400" dirty="0"/>
               <a:t> </a:t>
             </a:r>
-            <a:endParaRPr lang="en-BE" dirty="0"/>
-          </a:p>
-        </p:txBody>
-      </p:sp>
+            <a:endParaRPr lang="en-BE" sz="1400" dirty="0"/>
+          </a:p>
+        </p:txBody>
+      </p:sp>
+      <p:sp>
+        <p:nvSpPr>
+          <p:cNvPr id="4" name="TextBox 3">
+            <a:extLst>
+              <a:ext uri="{FF2B5EF4-FFF2-40B4-BE49-F238E27FC236}">
+                <a16:creationId xmlns:a16="http://schemas.microsoft.com/office/drawing/2014/main" id="{30B735E0-6E8F-8192-8228-5ECE2A97507B}"/>
+              </a:ext>
+            </a:extLst>
+          </p:cNvPr>
+          <p:cNvSpPr txBox="1"/>
+          <p:nvPr/>
+        </p:nvSpPr>
+        <p:spPr>
+          <a:xfrm>
+            <a:off x="431798" y="1752600"/>
+            <a:ext cx="10676469" cy="2031325"/>
+          </a:xfrm>
+          <a:prstGeom prst="rect">
+            <a:avLst/>
+          </a:prstGeom>
+          <a:noFill/>
+        </p:spPr>
+        <p:txBody>
+          <a:bodyPr wrap="square" rtlCol="0">
+            <a:spAutoFit/>
+          </a:bodyPr>
+          <a:lstStyle/>
+          <a:p>
+            <a:r>
+              <a:rPr lang="en-GB" sz="1400" dirty="0"/>
+              <a:t>To install </a:t>
+            </a:r>
+            <a:r>
+              <a:rPr lang="en-GB" sz="1400" dirty="0" err="1"/>
+              <a:t>dbt</a:t>
+            </a:r>
+            <a:r>
+              <a:rPr lang="en-GB" sz="1400" dirty="0"/>
+              <a:t> core into your local machine (not </a:t>
+            </a:r>
+            <a:r>
+              <a:rPr lang="en-GB" sz="1400" dirty="0" err="1"/>
+              <a:t>esay</a:t>
+            </a:r>
+            <a:r>
+              <a:rPr lang="en-GB" sz="1400" dirty="0"/>
+              <a:t>) the following steps are needed : </a:t>
+            </a:r>
+          </a:p>
+          <a:p>
+            <a:pPr marL="285750" indent="-285750">
+              <a:buFont typeface="Arial" panose="020B0604020202020204" pitchFamily="34" charset="0"/>
+              <a:buChar char="•"/>
+            </a:pPr>
+            <a:r>
+              <a:rPr lang="en-GB" sz="1400" dirty="0"/>
+              <a:t>Create a folder like this VS code folder/</a:t>
+            </a:r>
+            <a:r>
+              <a:rPr lang="en-GB" sz="1400" dirty="0" err="1"/>
+              <a:t>dbt_project</a:t>
+            </a:r>
+            <a:r>
+              <a:rPr lang="en-GB" sz="1400" dirty="0"/>
+              <a:t>/</a:t>
+            </a:r>
+          </a:p>
+          <a:p>
+            <a:pPr marL="285750" indent="-285750">
+              <a:buFont typeface="Arial" panose="020B0604020202020204" pitchFamily="34" charset="0"/>
+              <a:buChar char="•"/>
+            </a:pPr>
+            <a:r>
+              <a:rPr lang="en-GB" sz="1400" dirty="0"/>
+              <a:t>From VS code open that folder </a:t>
+            </a:r>
+          </a:p>
+          <a:p>
+            <a:pPr marL="285750" indent="-285750">
+              <a:buFont typeface="Arial" panose="020B0604020202020204" pitchFamily="34" charset="0"/>
+              <a:buChar char="•"/>
+            </a:pPr>
+            <a:r>
+              <a:rPr lang="en-GB" sz="1400" dirty="0"/>
+              <a:t>Create a virtual environment like   </a:t>
+            </a:r>
+            <a:r>
+              <a:rPr lang="en-GB" sz="1400" b="1" i="1" dirty="0" err="1">
+                <a:solidFill>
+                  <a:srgbClr val="FF0000"/>
+                </a:solidFill>
+              </a:rPr>
+              <a:t>dbt</a:t>
+            </a:r>
+            <a:r>
+              <a:rPr lang="en-GB" sz="1400" b="1" i="1" dirty="0">
+                <a:solidFill>
+                  <a:srgbClr val="FF0000"/>
+                </a:solidFill>
+              </a:rPr>
+              <a:t>-env </a:t>
+            </a:r>
+          </a:p>
+          <a:p>
+            <a:pPr marL="285750" indent="-285750">
+              <a:buFont typeface="Arial" panose="020B0604020202020204" pitchFamily="34" charset="0"/>
+              <a:buChar char="•"/>
+            </a:pPr>
+            <a:r>
+              <a:rPr lang="en-GB" sz="1400" dirty="0"/>
+              <a:t>Ask the following prompt to </a:t>
+            </a:r>
+            <a:r>
+              <a:rPr lang="en-GB" sz="1400" dirty="0" err="1"/>
+              <a:t>chatgpt</a:t>
+            </a:r>
+            <a:r>
+              <a:rPr lang="en-GB" sz="1400" dirty="0"/>
+              <a:t>  </a:t>
+            </a:r>
+            <a:r>
+              <a:rPr lang="en-GB" sz="1400" dirty="0">
+                <a:highlight>
+                  <a:srgbClr val="FFFF00"/>
+                </a:highlight>
+              </a:rPr>
+              <a:t>“I want to install </a:t>
+            </a:r>
+            <a:r>
+              <a:rPr lang="en-GB" sz="1400" dirty="0" err="1">
+                <a:highlight>
+                  <a:srgbClr val="FFFF00"/>
+                </a:highlight>
+              </a:rPr>
+              <a:t>dbt</a:t>
+            </a:r>
+            <a:r>
+              <a:rPr lang="en-GB" sz="1400" dirty="0">
+                <a:highlight>
+                  <a:srgbClr val="FFFF00"/>
+                </a:highlight>
+              </a:rPr>
+              <a:t> core to my local machine using Vs code and virtual </a:t>
+            </a:r>
+            <a:r>
+              <a:rPr lang="en-GB" sz="1400" dirty="0" err="1">
+                <a:highlight>
+                  <a:srgbClr val="FFFF00"/>
+                </a:highlight>
+              </a:rPr>
+              <a:t>envirment</a:t>
+            </a:r>
+            <a:r>
+              <a:rPr lang="en-GB" sz="1400" dirty="0">
+                <a:highlight>
+                  <a:srgbClr val="FFFF00"/>
+                </a:highlight>
+              </a:rPr>
+              <a:t> , can please </a:t>
+            </a:r>
+            <a:r>
+              <a:rPr lang="en-GB" sz="1400" dirty="0" err="1">
+                <a:highlight>
+                  <a:srgbClr val="FFFF00"/>
+                </a:highlight>
+              </a:rPr>
+              <a:t>gide</a:t>
+            </a:r>
+            <a:r>
+              <a:rPr lang="en-GB" sz="1400" dirty="0">
+                <a:highlight>
+                  <a:srgbClr val="FFFF00"/>
+                </a:highlight>
+              </a:rPr>
+              <a:t> step by step”</a:t>
+            </a:r>
+          </a:p>
+          <a:p>
+            <a:pPr marL="285750" indent="-285750">
+              <a:buFont typeface="Arial" panose="020B0604020202020204" pitchFamily="34" charset="0"/>
+              <a:buChar char="•"/>
+            </a:pPr>
+            <a:endParaRPr lang="en-GB" sz="1400" dirty="0">
+              <a:highlight>
+                <a:srgbClr val="FFFF00"/>
+              </a:highlight>
+            </a:endParaRPr>
+          </a:p>
+          <a:p>
+            <a:r>
+              <a:rPr lang="en-GB" sz="1400" dirty="0"/>
+              <a:t>When installation succeeded you should have the following :</a:t>
+            </a:r>
+          </a:p>
+          <a:p>
+            <a:r>
+              <a:rPr lang="en-GB" sz="1400" dirty="0"/>
+              <a:t>Note : In my case I create a </a:t>
+            </a:r>
+            <a:r>
+              <a:rPr lang="en-GB" sz="1400" dirty="0" err="1"/>
+              <a:t>dbt</a:t>
+            </a:r>
+            <a:r>
+              <a:rPr lang="en-GB" sz="1400" dirty="0"/>
+              <a:t> for a </a:t>
+            </a:r>
+            <a:r>
+              <a:rPr lang="en-GB" sz="1400" b="1" i="1" dirty="0"/>
+              <a:t>Fabric project</a:t>
+            </a:r>
+            <a:r>
+              <a:rPr lang="en-GB" sz="1400" dirty="0"/>
+              <a:t>.</a:t>
+            </a:r>
+            <a:endParaRPr lang="en-BE" sz="1400" dirty="0"/>
+          </a:p>
+        </p:txBody>
+      </p:sp>
+      <p:pic>
+        <p:nvPicPr>
+          <p:cNvPr id="6" name="Picture 5">
+            <a:extLst>
+              <a:ext uri="{FF2B5EF4-FFF2-40B4-BE49-F238E27FC236}">
+                <a16:creationId xmlns:a16="http://schemas.microsoft.com/office/drawing/2014/main" id="{CCB8DC79-5370-3637-8414-9FF328B64C77}"/>
+              </a:ext>
+            </a:extLst>
+          </p:cNvPr>
+          <p:cNvPicPr>
+            <a:picLocks noChangeAspect="1"/>
+          </p:cNvPicPr>
+          <p:nvPr/>
+        </p:nvPicPr>
+        <p:blipFill>
+          <a:blip r:embed="rId3"/>
+          <a:stretch>
+            <a:fillRect/>
+          </a:stretch>
+        </p:blipFill>
+        <p:spPr>
+          <a:xfrm>
+            <a:off x="431798" y="4165555"/>
+            <a:ext cx="5456393" cy="1066892"/>
+          </a:xfrm>
+          <a:prstGeom prst="rect">
+            <a:avLst/>
+          </a:prstGeom>
+        </p:spPr>
+      </p:pic>
+      <p:pic>
+        <p:nvPicPr>
+          <p:cNvPr id="8" name="Picture 7">
+            <a:extLst>
+              <a:ext uri="{FF2B5EF4-FFF2-40B4-BE49-F238E27FC236}">
+                <a16:creationId xmlns:a16="http://schemas.microsoft.com/office/drawing/2014/main" id="{7029D8F6-D241-3C64-2218-984531D8A0F4}"/>
+              </a:ext>
+            </a:extLst>
+          </p:cNvPr>
+          <p:cNvPicPr>
+            <a:picLocks noChangeAspect="1"/>
+          </p:cNvPicPr>
+          <p:nvPr/>
+        </p:nvPicPr>
+        <p:blipFill>
+          <a:blip r:embed="rId4"/>
+          <a:stretch>
+            <a:fillRect/>
+          </a:stretch>
+        </p:blipFill>
+        <p:spPr>
+          <a:xfrm>
+            <a:off x="431798" y="5347737"/>
+            <a:ext cx="2370025" cy="1463167"/>
+          </a:xfrm>
+          <a:prstGeom prst="rect">
+            <a:avLst/>
+          </a:prstGeom>
+        </p:spPr>
+      </p:pic>
     </p:spTree>
     <p:extLst>
       <p:ext uri="{BB962C8B-B14F-4D97-AF65-F5344CB8AC3E}">

--- a/dbt/dbt.pptx
+++ b/dbt/dbt.pptx
@@ -261,7 +261,7 @@
           <a:p>
             <a:fld id="{4A5B7192-DAEA-42CD-98BD-293E7644B89D}" type="datetimeFigureOut">
               <a:rPr lang="en-BE" smtClean="0"/>
-              <a:t>02/04/2026</a:t>
+              <a:t>14/04/2026</a:t>
             </a:fld>
             <a:endParaRPr lang="en-BE"/>
           </a:p>
@@ -461,7 +461,7 @@
           <a:p>
             <a:fld id="{4A5B7192-DAEA-42CD-98BD-293E7644B89D}" type="datetimeFigureOut">
               <a:rPr lang="en-BE" smtClean="0"/>
-              <a:t>02/04/2026</a:t>
+              <a:t>14/04/2026</a:t>
             </a:fld>
             <a:endParaRPr lang="en-BE"/>
           </a:p>
@@ -671,7 +671,7 @@
           <a:p>
             <a:fld id="{4A5B7192-DAEA-42CD-98BD-293E7644B89D}" type="datetimeFigureOut">
               <a:rPr lang="en-BE" smtClean="0"/>
-              <a:t>02/04/2026</a:t>
+              <a:t>14/04/2026</a:t>
             </a:fld>
             <a:endParaRPr lang="en-BE"/>
           </a:p>
@@ -871,7 +871,7 @@
           <a:p>
             <a:fld id="{4A5B7192-DAEA-42CD-98BD-293E7644B89D}" type="datetimeFigureOut">
               <a:rPr lang="en-BE" smtClean="0"/>
-              <a:t>02/04/2026</a:t>
+              <a:t>14/04/2026</a:t>
             </a:fld>
             <a:endParaRPr lang="en-BE"/>
           </a:p>
@@ -1147,7 +1147,7 @@
           <a:p>
             <a:fld id="{4A5B7192-DAEA-42CD-98BD-293E7644B89D}" type="datetimeFigureOut">
               <a:rPr lang="en-BE" smtClean="0"/>
-              <a:t>02/04/2026</a:t>
+              <a:t>14/04/2026</a:t>
             </a:fld>
             <a:endParaRPr lang="en-BE"/>
           </a:p>
@@ -1415,7 +1415,7 @@
           <a:p>
             <a:fld id="{4A5B7192-DAEA-42CD-98BD-293E7644B89D}" type="datetimeFigureOut">
               <a:rPr lang="en-BE" smtClean="0"/>
-              <a:t>02/04/2026</a:t>
+              <a:t>14/04/2026</a:t>
             </a:fld>
             <a:endParaRPr lang="en-BE"/>
           </a:p>
@@ -1830,7 +1830,7 @@
           <a:p>
             <a:fld id="{4A5B7192-DAEA-42CD-98BD-293E7644B89D}" type="datetimeFigureOut">
               <a:rPr lang="en-BE" smtClean="0"/>
-              <a:t>02/04/2026</a:t>
+              <a:t>14/04/2026</a:t>
             </a:fld>
             <a:endParaRPr lang="en-BE"/>
           </a:p>
@@ -1972,7 +1972,7 @@
           <a:p>
             <a:fld id="{4A5B7192-DAEA-42CD-98BD-293E7644B89D}" type="datetimeFigureOut">
               <a:rPr lang="en-BE" smtClean="0"/>
-              <a:t>02/04/2026</a:t>
+              <a:t>14/04/2026</a:t>
             </a:fld>
             <a:endParaRPr lang="en-BE"/>
           </a:p>
@@ -2085,7 +2085,7 @@
           <a:p>
             <a:fld id="{4A5B7192-DAEA-42CD-98BD-293E7644B89D}" type="datetimeFigureOut">
               <a:rPr lang="en-BE" smtClean="0"/>
-              <a:t>02/04/2026</a:t>
+              <a:t>14/04/2026</a:t>
             </a:fld>
             <a:endParaRPr lang="en-BE"/>
           </a:p>
@@ -2398,7 +2398,7 @@
           <a:p>
             <a:fld id="{4A5B7192-DAEA-42CD-98BD-293E7644B89D}" type="datetimeFigureOut">
               <a:rPr lang="en-BE" smtClean="0"/>
-              <a:t>02/04/2026</a:t>
+              <a:t>14/04/2026</a:t>
             </a:fld>
             <a:endParaRPr lang="en-BE"/>
           </a:p>
@@ -2687,7 +2687,7 @@
           <a:p>
             <a:fld id="{4A5B7192-DAEA-42CD-98BD-293E7644B89D}" type="datetimeFigureOut">
               <a:rPr lang="en-BE" smtClean="0"/>
-              <a:t>02/04/2026</a:t>
+              <a:t>14/04/2026</a:t>
             </a:fld>
             <a:endParaRPr lang="en-BE"/>
           </a:p>
@@ -2930,7 +2930,7 @@
           <a:p>
             <a:fld id="{4A5B7192-DAEA-42CD-98BD-293E7644B89D}" type="datetimeFigureOut">
               <a:rPr lang="en-BE" smtClean="0"/>
-              <a:t>02/04/2026</a:t>
+              <a:t>14/04/2026</a:t>
             </a:fld>
             <a:endParaRPr lang="en-BE"/>
           </a:p>
@@ -3699,6 +3699,36 @@
           <a:xfrm>
             <a:off x="431798" y="5347737"/>
             <a:ext cx="2370025" cy="1463167"/>
+          </a:xfrm>
+          <a:prstGeom prst="rect">
+            <a:avLst/>
+          </a:prstGeom>
+        </p:spPr>
+      </p:pic>
+      <p:pic>
+        <p:nvPicPr>
+          <p:cNvPr id="7" name="Picture 6">
+            <a:extLst>
+              <a:ext uri="{FF2B5EF4-FFF2-40B4-BE49-F238E27FC236}">
+                <a16:creationId xmlns:a16="http://schemas.microsoft.com/office/drawing/2014/main" id="{08E0D376-6757-8C3C-D879-DD62098F29D3}"/>
+              </a:ext>
+            </a:extLst>
+          </p:cNvPr>
+          <p:cNvPicPr>
+            <a:picLocks noChangeAspect="1"/>
+          </p:cNvPicPr>
+          <p:nvPr/>
+        </p:nvPicPr>
+        <p:blipFill>
+          <a:blip r:embed="rId5"/>
+          <a:stretch>
+            <a:fillRect/>
+          </a:stretch>
+        </p:blipFill>
+        <p:spPr>
+          <a:xfrm>
+            <a:off x="6547104" y="3419735"/>
+            <a:ext cx="5213098" cy="2125159"/>
           </a:xfrm>
           <a:prstGeom prst="rect">
             <a:avLst/>

--- a/dbt/dbt.pptx
+++ b/dbt/dbt.pptx
@@ -6,6 +6,10 @@
   </p:sldMasterIdLst>
   <p:sldIdLst>
     <p:sldId id="256" r:id="rId2"/>
+    <p:sldId id="257" r:id="rId3"/>
+    <p:sldId id="258" r:id="rId4"/>
+    <p:sldId id="259" r:id="rId5"/>
+    <p:sldId id="260" r:id="rId6"/>
   </p:sldIdLst>
   <p:sldSz cx="12192000" cy="6858000"/>
   <p:notesSz cx="6858000" cy="9144000"/>
@@ -261,7 +265,7 @@
           <a:p>
             <a:fld id="{4A5B7192-DAEA-42CD-98BD-293E7644B89D}" type="datetimeFigureOut">
               <a:rPr lang="en-BE" smtClean="0"/>
-              <a:t>14/04/2026</a:t>
+              <a:t>17/04/2026</a:t>
             </a:fld>
             <a:endParaRPr lang="en-BE"/>
           </a:p>
@@ -461,7 +465,7 @@
           <a:p>
             <a:fld id="{4A5B7192-DAEA-42CD-98BD-293E7644B89D}" type="datetimeFigureOut">
               <a:rPr lang="en-BE" smtClean="0"/>
-              <a:t>14/04/2026</a:t>
+              <a:t>17/04/2026</a:t>
             </a:fld>
             <a:endParaRPr lang="en-BE"/>
           </a:p>
@@ -671,7 +675,7 @@
           <a:p>
             <a:fld id="{4A5B7192-DAEA-42CD-98BD-293E7644B89D}" type="datetimeFigureOut">
               <a:rPr lang="en-BE" smtClean="0"/>
-              <a:t>14/04/2026</a:t>
+              <a:t>17/04/2026</a:t>
             </a:fld>
             <a:endParaRPr lang="en-BE"/>
           </a:p>
@@ -871,7 +875,7 @@
           <a:p>
             <a:fld id="{4A5B7192-DAEA-42CD-98BD-293E7644B89D}" type="datetimeFigureOut">
               <a:rPr lang="en-BE" smtClean="0"/>
-              <a:t>14/04/2026</a:t>
+              <a:t>17/04/2026</a:t>
             </a:fld>
             <a:endParaRPr lang="en-BE"/>
           </a:p>
@@ -1147,7 +1151,7 @@
           <a:p>
             <a:fld id="{4A5B7192-DAEA-42CD-98BD-293E7644B89D}" type="datetimeFigureOut">
               <a:rPr lang="en-BE" smtClean="0"/>
-              <a:t>14/04/2026</a:t>
+              <a:t>17/04/2026</a:t>
             </a:fld>
             <a:endParaRPr lang="en-BE"/>
           </a:p>
@@ -1415,7 +1419,7 @@
           <a:p>
             <a:fld id="{4A5B7192-DAEA-42CD-98BD-293E7644B89D}" type="datetimeFigureOut">
               <a:rPr lang="en-BE" smtClean="0"/>
-              <a:t>14/04/2026</a:t>
+              <a:t>17/04/2026</a:t>
             </a:fld>
             <a:endParaRPr lang="en-BE"/>
           </a:p>
@@ -1830,7 +1834,7 @@
           <a:p>
             <a:fld id="{4A5B7192-DAEA-42CD-98BD-293E7644B89D}" type="datetimeFigureOut">
               <a:rPr lang="en-BE" smtClean="0"/>
-              <a:t>14/04/2026</a:t>
+              <a:t>17/04/2026</a:t>
             </a:fld>
             <a:endParaRPr lang="en-BE"/>
           </a:p>
@@ -1972,7 +1976,7 @@
           <a:p>
             <a:fld id="{4A5B7192-DAEA-42CD-98BD-293E7644B89D}" type="datetimeFigureOut">
               <a:rPr lang="en-BE" smtClean="0"/>
-              <a:t>14/04/2026</a:t>
+              <a:t>17/04/2026</a:t>
             </a:fld>
             <a:endParaRPr lang="en-BE"/>
           </a:p>
@@ -2085,7 +2089,7 @@
           <a:p>
             <a:fld id="{4A5B7192-DAEA-42CD-98BD-293E7644B89D}" type="datetimeFigureOut">
               <a:rPr lang="en-BE" smtClean="0"/>
-              <a:t>14/04/2026</a:t>
+              <a:t>17/04/2026</a:t>
             </a:fld>
             <a:endParaRPr lang="en-BE"/>
           </a:p>
@@ -2398,7 +2402,7 @@
           <a:p>
             <a:fld id="{4A5B7192-DAEA-42CD-98BD-293E7644B89D}" type="datetimeFigureOut">
               <a:rPr lang="en-BE" smtClean="0"/>
-              <a:t>14/04/2026</a:t>
+              <a:t>17/04/2026</a:t>
             </a:fld>
             <a:endParaRPr lang="en-BE"/>
           </a:p>
@@ -2687,7 +2691,7 @@
           <a:p>
             <a:fld id="{4A5B7192-DAEA-42CD-98BD-293E7644B89D}" type="datetimeFigureOut">
               <a:rPr lang="en-BE" smtClean="0"/>
-              <a:t>14/04/2026</a:t>
+              <a:t>17/04/2026</a:t>
             </a:fld>
             <a:endParaRPr lang="en-BE"/>
           </a:p>
@@ -2930,7 +2934,7 @@
           <a:p>
             <a:fld id="{4A5B7192-DAEA-42CD-98BD-293E7644B89D}" type="datetimeFigureOut">
               <a:rPr lang="en-BE" smtClean="0"/>
-              <a:t>14/04/2026</a:t>
+              <a:t>17/04/2026</a:t>
             </a:fld>
             <a:endParaRPr lang="en-BE"/>
           </a:p>
@@ -3739,6 +3743,2684 @@
     <p:extLst>
       <p:ext uri="{BB962C8B-B14F-4D97-AF65-F5344CB8AC3E}">
         <p14:creationId xmlns:p14="http://schemas.microsoft.com/office/powerpoint/2010/main" val="1296687254"/>
+      </p:ext>
+    </p:extLst>
+  </p:cSld>
+  <p:clrMapOvr>
+    <a:masterClrMapping/>
+  </p:clrMapOvr>
+</p:sld>
+</file>
+
+<file path=ppt/slides/slide2.xml><?xml version="1.0" encoding="utf-8"?>
+<p:sld xmlns:a="http://schemas.openxmlformats.org/drawingml/2006/main" xmlns:r="http://schemas.openxmlformats.org/officeDocument/2006/relationships" xmlns:p="http://schemas.openxmlformats.org/presentationml/2006/main">
+  <p:cSld>
+    <p:spTree>
+      <p:nvGrpSpPr>
+        <p:cNvPr id="1" name="">
+          <a:extLst>
+            <a:ext uri="{FF2B5EF4-FFF2-40B4-BE49-F238E27FC236}">
+              <a16:creationId xmlns:a16="http://schemas.microsoft.com/office/drawing/2014/main" id="{42254F67-659A-D992-FA7E-A1BAE0B44AD0}"/>
+            </a:ext>
+          </a:extLst>
+        </p:cNvPr>
+        <p:cNvGrpSpPr/>
+        <p:nvPr/>
+      </p:nvGrpSpPr>
+      <p:grpSpPr>
+        <a:xfrm>
+          <a:off x="0" y="0"/>
+          <a:ext cx="0" cy="0"/>
+          <a:chOff x="0" y="0"/>
+          <a:chExt cx="0" cy="0"/>
+        </a:xfrm>
+      </p:grpSpPr>
+      <p:sp>
+        <p:nvSpPr>
+          <p:cNvPr id="2" name="Title 1">
+            <a:extLst>
+              <a:ext uri="{FF2B5EF4-FFF2-40B4-BE49-F238E27FC236}">
+                <a16:creationId xmlns:a16="http://schemas.microsoft.com/office/drawing/2014/main" id="{1279140C-7301-E28E-D04A-5AA0C29D4D10}"/>
+              </a:ext>
+            </a:extLst>
+          </p:cNvPr>
+          <p:cNvSpPr>
+            <a:spLocks noGrp="1"/>
+          </p:cNvSpPr>
+          <p:nvPr>
+            <p:ph type="ctrTitle"/>
+          </p:nvPr>
+        </p:nvSpPr>
+        <p:spPr>
+          <a:xfrm>
+            <a:off x="1041400" y="112533"/>
+            <a:ext cx="9144000" cy="594043"/>
+          </a:xfrm>
+        </p:spPr>
+        <p:txBody>
+          <a:bodyPr>
+            <a:noAutofit/>
+          </a:bodyPr>
+          <a:lstStyle/>
+          <a:p>
+            <a:r>
+              <a:rPr lang="en-GB" sz="2800" dirty="0" err="1"/>
+              <a:t>Dbt</a:t>
+            </a:r>
+            <a:r>
+              <a:rPr lang="en-GB" sz="2800" dirty="0"/>
+              <a:t>-set up in 6 </a:t>
+            </a:r>
+            <a:r>
+              <a:rPr lang="en-GB" sz="2800" dirty="0" err="1"/>
+              <a:t>setp</a:t>
+            </a:r>
+            <a:endParaRPr lang="en-BE" sz="2800" dirty="0"/>
+          </a:p>
+        </p:txBody>
+      </p:sp>
+      <p:sp>
+        <p:nvSpPr>
+          <p:cNvPr id="4" name="TextBox 3">
+            <a:extLst>
+              <a:ext uri="{FF2B5EF4-FFF2-40B4-BE49-F238E27FC236}">
+                <a16:creationId xmlns:a16="http://schemas.microsoft.com/office/drawing/2014/main" id="{8A327E55-5B76-DF62-FE1C-EC35547AE994}"/>
+              </a:ext>
+            </a:extLst>
+          </p:cNvPr>
+          <p:cNvSpPr txBox="1"/>
+          <p:nvPr/>
+        </p:nvSpPr>
+        <p:spPr>
+          <a:xfrm>
+            <a:off x="228602" y="1280159"/>
+            <a:ext cx="11531600" cy="4639732"/>
+          </a:xfrm>
+          <a:prstGeom prst="rect">
+            <a:avLst/>
+          </a:prstGeom>
+          <a:noFill/>
+        </p:spPr>
+        <p:txBody>
+          <a:bodyPr wrap="square" rtlCol="0">
+            <a:spAutoFit/>
+          </a:bodyPr>
+          <a:lstStyle/>
+          <a:p>
+            <a:r>
+              <a:rPr lang="fr-BE" sz="1050" dirty="0"/>
+              <a:t>A -Important </a:t>
+            </a:r>
+            <a:r>
+              <a:rPr lang="fr-BE" sz="1050" dirty="0" err="1"/>
+              <a:t>steps</a:t>
+            </a:r>
+            <a:r>
+              <a:rPr lang="fr-BE" sz="1050" dirty="0"/>
+              <a:t> (</a:t>
+            </a:r>
+            <a:r>
+              <a:rPr lang="fr-BE" sz="1050" dirty="0" err="1"/>
+              <a:t>write</a:t>
+            </a:r>
+            <a:r>
+              <a:rPr lang="fr-BE" sz="1050" dirty="0"/>
+              <a:t> the </a:t>
+            </a:r>
+            <a:r>
+              <a:rPr lang="fr-BE" sz="1050" dirty="0" err="1"/>
+              <a:t>below</a:t>
+            </a:r>
+            <a:r>
+              <a:rPr lang="fr-BE" sz="1050" dirty="0"/>
+              <a:t> code 1 by 1) : </a:t>
+            </a:r>
+          </a:p>
+          <a:p>
+            <a:pPr marL="342900" indent="-342900">
+              <a:buFont typeface="+mj-lt"/>
+              <a:buAutoNum type="arabicPeriod"/>
+            </a:pPr>
+            <a:r>
+              <a:rPr lang="fr-BE" sz="900" i="1" dirty="0">
+                <a:solidFill>
+                  <a:srgbClr val="00B0F0"/>
+                </a:solidFill>
+              </a:rPr>
+              <a:t>python –version                          #(python version </a:t>
+            </a:r>
+            <a:r>
+              <a:rPr lang="fr-BE" sz="900" i="1" dirty="0" err="1">
+                <a:solidFill>
+                  <a:srgbClr val="00B0F0"/>
+                </a:solidFill>
+              </a:rPr>
+              <a:t>verification</a:t>
+            </a:r>
+            <a:r>
+              <a:rPr lang="fr-BE" sz="900" i="1" dirty="0">
+                <a:solidFill>
+                  <a:srgbClr val="00B0F0"/>
+                </a:solidFill>
+              </a:rPr>
+              <a:t>)</a:t>
+            </a:r>
+          </a:p>
+          <a:p>
+            <a:pPr marL="342900" indent="-342900">
+              <a:buFont typeface="+mj-lt"/>
+              <a:buAutoNum type="arabicPeriod"/>
+            </a:pPr>
+            <a:r>
+              <a:rPr lang="fr-BE" sz="900" i="1" dirty="0" err="1">
+                <a:solidFill>
+                  <a:srgbClr val="00B0F0"/>
+                </a:solidFill>
+              </a:rPr>
+              <a:t>pip</a:t>
+            </a:r>
+            <a:r>
+              <a:rPr lang="fr-BE" sz="900" i="1" dirty="0">
+                <a:solidFill>
+                  <a:srgbClr val="00B0F0"/>
+                </a:solidFill>
+              </a:rPr>
+              <a:t> –version                                  #(pip version </a:t>
+            </a:r>
+            <a:r>
+              <a:rPr lang="fr-BE" sz="900" i="1" dirty="0" err="1">
+                <a:solidFill>
+                  <a:srgbClr val="00B0F0"/>
+                </a:solidFill>
+              </a:rPr>
+              <a:t>verification</a:t>
+            </a:r>
+            <a:r>
+              <a:rPr lang="fr-BE" sz="900" i="1" dirty="0">
+                <a:solidFill>
+                  <a:srgbClr val="00B0F0"/>
+                </a:solidFill>
+              </a:rPr>
+              <a:t>)</a:t>
+            </a:r>
+          </a:p>
+          <a:p>
+            <a:pPr marL="342900" indent="-342900">
+              <a:buFont typeface="+mj-lt"/>
+              <a:buAutoNum type="arabicPeriod"/>
+            </a:pPr>
+            <a:r>
+              <a:rPr lang="fr-BE" sz="900" i="1" dirty="0">
+                <a:solidFill>
+                  <a:srgbClr val="00B0F0"/>
+                </a:solidFill>
+              </a:rPr>
+              <a:t>code .                                               #(code </a:t>
+            </a:r>
+            <a:r>
+              <a:rPr lang="fr-BE" sz="900" i="1" dirty="0" err="1">
+                <a:solidFill>
+                  <a:srgbClr val="00B0F0"/>
+                </a:solidFill>
+              </a:rPr>
+              <a:t>verification</a:t>
+            </a:r>
+            <a:r>
+              <a:rPr lang="fr-BE" sz="900" i="1" dirty="0">
+                <a:solidFill>
+                  <a:srgbClr val="00B0F0"/>
+                </a:solidFill>
+              </a:rPr>
+              <a:t>)</a:t>
+            </a:r>
+          </a:p>
+          <a:p>
+            <a:pPr marL="342900" indent="-342900">
+              <a:buFont typeface="+mj-lt"/>
+              <a:buAutoNum type="arabicPeriod"/>
+            </a:pPr>
+            <a:r>
+              <a:rPr lang="fr-BE" sz="900" i="1" dirty="0">
+                <a:solidFill>
+                  <a:srgbClr val="00B0F0"/>
+                </a:solidFill>
+              </a:rPr>
+              <a:t>python -m </a:t>
+            </a:r>
+            <a:r>
+              <a:rPr lang="fr-BE" sz="900" i="1" dirty="0" err="1">
+                <a:solidFill>
+                  <a:srgbClr val="00B0F0"/>
+                </a:solidFill>
+              </a:rPr>
+              <a:t>venv</a:t>
+            </a:r>
+            <a:r>
+              <a:rPr lang="fr-BE" sz="900" i="1" dirty="0">
+                <a:solidFill>
+                  <a:srgbClr val="00B0F0"/>
+                </a:solidFill>
+              </a:rPr>
+              <a:t> </a:t>
+            </a:r>
+            <a:r>
+              <a:rPr lang="fr-BE" sz="900" i="1" dirty="0" err="1">
+                <a:solidFill>
+                  <a:srgbClr val="00B0F0"/>
+                </a:solidFill>
+              </a:rPr>
+              <a:t>dbt-env</a:t>
+            </a:r>
+            <a:r>
+              <a:rPr lang="fr-BE" sz="900" i="1" dirty="0">
+                <a:solidFill>
+                  <a:srgbClr val="00B0F0"/>
+                </a:solidFill>
+              </a:rPr>
+              <a:t>            #(create </a:t>
+            </a:r>
+            <a:r>
+              <a:rPr lang="fr-BE" sz="900" i="1" dirty="0" err="1">
+                <a:solidFill>
+                  <a:srgbClr val="00B0F0"/>
+                </a:solidFill>
+              </a:rPr>
+              <a:t>virtul</a:t>
+            </a:r>
+            <a:r>
+              <a:rPr lang="fr-BE" sz="900" i="1" dirty="0">
+                <a:solidFill>
+                  <a:srgbClr val="00B0F0"/>
+                </a:solidFill>
+              </a:rPr>
+              <a:t> </a:t>
+            </a:r>
+            <a:r>
+              <a:rPr lang="fr-BE" sz="900" i="1" dirty="0" err="1">
+                <a:solidFill>
+                  <a:srgbClr val="00B0F0"/>
+                </a:solidFill>
+              </a:rPr>
+              <a:t>environment</a:t>
+            </a:r>
+            <a:r>
+              <a:rPr lang="fr-BE" sz="900" i="1" dirty="0">
+                <a:solidFill>
+                  <a:srgbClr val="00B0F0"/>
+                </a:solidFill>
+              </a:rPr>
+              <a:t>  </a:t>
+            </a:r>
+            <a:r>
+              <a:rPr lang="fr-BE" sz="900" i="1" dirty="0" err="1">
+                <a:solidFill>
+                  <a:srgbClr val="00B0F0"/>
+                </a:solidFill>
+              </a:rPr>
+              <a:t>this</a:t>
+            </a:r>
+            <a:r>
+              <a:rPr lang="fr-BE" sz="900" i="1" dirty="0">
+                <a:solidFill>
+                  <a:srgbClr val="00B0F0"/>
+                </a:solidFill>
+              </a:rPr>
+              <a:t> </a:t>
+            </a:r>
+            <a:r>
+              <a:rPr lang="fr-BE" sz="900" i="1" dirty="0" err="1">
+                <a:solidFill>
+                  <a:srgbClr val="00B0F0"/>
+                </a:solidFill>
+              </a:rPr>
+              <a:t>very</a:t>
+            </a:r>
+            <a:r>
+              <a:rPr lang="fr-BE" sz="900" i="1" dirty="0">
+                <a:solidFill>
+                  <a:srgbClr val="00B0F0"/>
+                </a:solidFill>
+              </a:rPr>
+              <a:t> crucial )</a:t>
+            </a:r>
+          </a:p>
+          <a:p>
+            <a:pPr marL="342900" indent="-342900">
+              <a:buFont typeface="+mj-lt"/>
+              <a:buAutoNum type="arabicPeriod"/>
+            </a:pPr>
+            <a:r>
+              <a:rPr lang="fr-BE" sz="900" i="1" dirty="0" err="1">
+                <a:solidFill>
+                  <a:srgbClr val="00B0F0"/>
+                </a:solidFill>
+              </a:rPr>
+              <a:t>pip</a:t>
+            </a:r>
+            <a:r>
+              <a:rPr lang="fr-BE" sz="900" i="1" dirty="0">
+                <a:solidFill>
+                  <a:srgbClr val="00B0F0"/>
+                </a:solidFill>
+              </a:rPr>
+              <a:t> </a:t>
+            </a:r>
+            <a:r>
+              <a:rPr lang="fr-BE" sz="900" i="1" dirty="0" err="1">
+                <a:solidFill>
+                  <a:srgbClr val="00B0F0"/>
+                </a:solidFill>
+              </a:rPr>
+              <a:t>install</a:t>
+            </a:r>
+            <a:r>
+              <a:rPr lang="fr-BE" sz="900" i="1" dirty="0">
+                <a:solidFill>
+                  <a:srgbClr val="00B0F0"/>
+                </a:solidFill>
+              </a:rPr>
+              <a:t> </a:t>
+            </a:r>
+            <a:r>
+              <a:rPr lang="fr-BE" sz="900" i="1" dirty="0" err="1">
+                <a:solidFill>
+                  <a:srgbClr val="00B0F0"/>
+                </a:solidFill>
+              </a:rPr>
+              <a:t>dbt-core</a:t>
+            </a:r>
+            <a:r>
+              <a:rPr lang="fr-BE" sz="900" i="1" dirty="0">
+                <a:solidFill>
+                  <a:srgbClr val="00B0F0"/>
+                </a:solidFill>
+              </a:rPr>
+              <a:t>                      #(install </a:t>
+            </a:r>
+            <a:r>
+              <a:rPr lang="fr-BE" sz="900" i="1" dirty="0" err="1">
+                <a:solidFill>
+                  <a:srgbClr val="00B0F0"/>
+                </a:solidFill>
+              </a:rPr>
+              <a:t>dbt-core</a:t>
+            </a:r>
+            <a:r>
+              <a:rPr lang="fr-BE" sz="900" i="1" dirty="0">
+                <a:solidFill>
+                  <a:srgbClr val="00B0F0"/>
+                </a:solidFill>
+              </a:rPr>
+              <a:t>)</a:t>
+            </a:r>
+          </a:p>
+          <a:p>
+            <a:pPr marL="342900" indent="-342900">
+              <a:buFont typeface="+mj-lt"/>
+              <a:buAutoNum type="arabicPeriod"/>
+            </a:pPr>
+            <a:r>
+              <a:rPr lang="fr-BE" sz="900" i="1" dirty="0" err="1">
+                <a:solidFill>
+                  <a:srgbClr val="00B0F0"/>
+                </a:solidFill>
+              </a:rPr>
+              <a:t>pip</a:t>
+            </a:r>
+            <a:r>
+              <a:rPr lang="fr-BE" sz="900" i="1" dirty="0">
+                <a:solidFill>
+                  <a:srgbClr val="00B0F0"/>
+                </a:solidFill>
+              </a:rPr>
+              <a:t> </a:t>
+            </a:r>
+            <a:r>
+              <a:rPr lang="fr-BE" sz="900" i="1" dirty="0" err="1">
+                <a:solidFill>
+                  <a:srgbClr val="00B0F0"/>
+                </a:solidFill>
+              </a:rPr>
+              <a:t>install</a:t>
+            </a:r>
+            <a:r>
+              <a:rPr lang="fr-BE" sz="900" i="1" dirty="0">
+                <a:solidFill>
+                  <a:srgbClr val="00B0F0"/>
+                </a:solidFill>
+              </a:rPr>
+              <a:t> </a:t>
+            </a:r>
+            <a:r>
+              <a:rPr lang="fr-BE" sz="900" i="1" dirty="0" err="1">
+                <a:solidFill>
+                  <a:srgbClr val="00B0F0"/>
+                </a:solidFill>
+              </a:rPr>
+              <a:t>dbt-fabric</a:t>
+            </a:r>
+            <a:r>
+              <a:rPr lang="fr-BE" sz="900" i="1" dirty="0">
+                <a:solidFill>
+                  <a:srgbClr val="00B0F0"/>
+                </a:solidFill>
+              </a:rPr>
+              <a:t>                    #(install </a:t>
+            </a:r>
+            <a:r>
+              <a:rPr lang="fr-BE" sz="900" i="1" dirty="0" err="1">
+                <a:solidFill>
+                  <a:srgbClr val="00B0F0"/>
+                </a:solidFill>
+              </a:rPr>
+              <a:t>fabric</a:t>
+            </a:r>
+            <a:r>
+              <a:rPr lang="fr-BE" sz="900" i="1" dirty="0">
+                <a:solidFill>
+                  <a:srgbClr val="00B0F0"/>
+                </a:solidFill>
+              </a:rPr>
+              <a:t> </a:t>
+            </a:r>
+            <a:r>
+              <a:rPr lang="fr-BE" sz="900" i="1" dirty="0" err="1">
+                <a:solidFill>
+                  <a:srgbClr val="00B0F0"/>
+                </a:solidFill>
+              </a:rPr>
+              <a:t>plugging</a:t>
+            </a:r>
+            <a:r>
+              <a:rPr lang="fr-BE" sz="900" i="1" dirty="0">
+                <a:solidFill>
+                  <a:srgbClr val="00B0F0"/>
+                </a:solidFill>
+              </a:rPr>
+              <a:t>)</a:t>
+            </a:r>
+          </a:p>
+          <a:p>
+            <a:pPr marL="342900" indent="-342900">
+              <a:buFont typeface="+mj-lt"/>
+              <a:buAutoNum type="arabicPeriod"/>
+            </a:pPr>
+            <a:r>
+              <a:rPr lang="fr-BE" sz="900" i="1" dirty="0" err="1">
+                <a:solidFill>
+                  <a:srgbClr val="00B0F0"/>
+                </a:solidFill>
+              </a:rPr>
+              <a:t>dbt</a:t>
+            </a:r>
+            <a:r>
+              <a:rPr lang="fr-BE" sz="900" i="1" dirty="0">
+                <a:solidFill>
+                  <a:srgbClr val="00B0F0"/>
+                </a:solidFill>
+              </a:rPr>
+              <a:t> –version                                      #(check </a:t>
+            </a:r>
+            <a:r>
+              <a:rPr lang="fr-BE" sz="900" i="1" dirty="0" err="1">
+                <a:solidFill>
+                  <a:srgbClr val="00B0F0"/>
+                </a:solidFill>
+              </a:rPr>
+              <a:t>dbt</a:t>
+            </a:r>
+            <a:r>
+              <a:rPr lang="fr-BE" sz="900" i="1" dirty="0">
+                <a:solidFill>
+                  <a:srgbClr val="00B0F0"/>
+                </a:solidFill>
+              </a:rPr>
+              <a:t> version)</a:t>
+            </a:r>
+          </a:p>
+          <a:p>
+            <a:pPr marL="342900" indent="-342900">
+              <a:buFont typeface="+mj-lt"/>
+              <a:buAutoNum type="arabicPeriod"/>
+            </a:pPr>
+            <a:r>
+              <a:rPr lang="fr-BE" sz="900" i="1" dirty="0" err="1">
+                <a:solidFill>
+                  <a:srgbClr val="00B0F0"/>
+                </a:solidFill>
+              </a:rPr>
+              <a:t>dbt</a:t>
+            </a:r>
+            <a:r>
+              <a:rPr lang="fr-BE" sz="900" i="1" dirty="0">
+                <a:solidFill>
+                  <a:srgbClr val="00B0F0"/>
+                </a:solidFill>
+              </a:rPr>
+              <a:t> init </a:t>
+            </a:r>
+            <a:r>
+              <a:rPr lang="fr-BE" sz="900" i="1" dirty="0" err="1">
+                <a:solidFill>
+                  <a:srgbClr val="00B0F0"/>
+                </a:solidFill>
+              </a:rPr>
+              <a:t>dbt_Freshcart_project</a:t>
+            </a:r>
+            <a:r>
+              <a:rPr lang="fr-BE" sz="900" i="1" dirty="0">
+                <a:solidFill>
+                  <a:srgbClr val="00B0F0"/>
+                </a:solidFill>
+              </a:rPr>
+              <a:t>   #(initialise a new </a:t>
+            </a:r>
+            <a:r>
+              <a:rPr lang="fr-BE" sz="900" i="1" dirty="0" err="1">
+                <a:solidFill>
+                  <a:srgbClr val="00B0F0"/>
+                </a:solidFill>
+              </a:rPr>
+              <a:t>dbt</a:t>
+            </a:r>
+            <a:r>
+              <a:rPr lang="fr-BE" sz="900" i="1" dirty="0">
+                <a:solidFill>
+                  <a:srgbClr val="00B0F0"/>
+                </a:solidFill>
+              </a:rPr>
+              <a:t> </a:t>
+            </a:r>
+            <a:r>
+              <a:rPr lang="fr-BE" sz="900" i="1" dirty="0" err="1">
+                <a:solidFill>
+                  <a:srgbClr val="00B0F0"/>
+                </a:solidFill>
+              </a:rPr>
+              <a:t>project</a:t>
+            </a:r>
+            <a:r>
+              <a:rPr lang="fr-BE" sz="900" i="1" dirty="0">
+                <a:solidFill>
+                  <a:srgbClr val="00B0F0"/>
+                </a:solidFill>
+              </a:rPr>
+              <a:t> )</a:t>
+            </a:r>
+          </a:p>
+          <a:p>
+            <a:pPr marL="342900" indent="-342900">
+              <a:buFont typeface="+mj-lt"/>
+              <a:buAutoNum type="arabicPeriod"/>
+            </a:pPr>
+            <a:endParaRPr lang="fr-BE" sz="1100" i="1" dirty="0">
+              <a:solidFill>
+                <a:srgbClr val="00B0F0"/>
+              </a:solidFill>
+            </a:endParaRPr>
+          </a:p>
+          <a:p>
+            <a:r>
+              <a:rPr lang="fr-BE" sz="1400" dirty="0"/>
+              <a:t>B-/ </a:t>
+            </a:r>
+            <a:r>
+              <a:rPr lang="fr-BE" sz="1400" dirty="0" err="1"/>
+              <a:t>Create</a:t>
+            </a:r>
+            <a:r>
+              <a:rPr lang="fr-BE" sz="1400" dirty="0"/>
+              <a:t> </a:t>
+            </a:r>
+            <a:r>
+              <a:rPr lang="fr-BE" sz="1400" dirty="0">
+                <a:highlight>
+                  <a:srgbClr val="00FF00"/>
+                </a:highlight>
+              </a:rPr>
+              <a:t>.</a:t>
+            </a:r>
+            <a:r>
+              <a:rPr lang="fr-BE" sz="1400" dirty="0" err="1">
+                <a:highlight>
+                  <a:srgbClr val="00FF00"/>
+                </a:highlight>
+              </a:rPr>
+              <a:t>env</a:t>
+            </a:r>
+            <a:r>
+              <a:rPr lang="fr-BE" sz="1400" dirty="0">
+                <a:highlight>
+                  <a:srgbClr val="00FF00"/>
+                </a:highlight>
+              </a:rPr>
+              <a:t> </a:t>
+            </a:r>
+            <a:r>
+              <a:rPr lang="fr-BE" sz="1100" dirty="0"/>
+              <a:t>file (to </a:t>
+            </a:r>
+            <a:r>
+              <a:rPr lang="fr-BE" sz="1100" dirty="0" err="1"/>
+              <a:t>create</a:t>
+            </a:r>
+            <a:r>
+              <a:rPr lang="fr-BE" sz="1100" dirty="0"/>
+              <a:t> </a:t>
+            </a:r>
+            <a:r>
+              <a:rPr lang="fr-BE" sz="1100" dirty="0" err="1"/>
+              <a:t>environment</a:t>
+            </a:r>
+            <a:r>
+              <a:rPr lang="fr-BE" sz="1100" dirty="0"/>
+              <a:t> variables for</a:t>
+            </a:r>
+          </a:p>
+          <a:p>
+            <a:r>
+              <a:rPr lang="fr-BE" sz="1000" dirty="0"/>
+              <a:t> </a:t>
+            </a:r>
+            <a:r>
+              <a:rPr lang="fr-BE" sz="1000" dirty="0" err="1"/>
+              <a:t>Fabric_DEV_SERVER</a:t>
+            </a:r>
+            <a:r>
+              <a:rPr lang="fr-BE" sz="1000" dirty="0"/>
+              <a:t>= </a:t>
+            </a:r>
+            <a:r>
+              <a:rPr lang="fr-BE" sz="1000" dirty="0" err="1"/>
+              <a:t>connectionstring</a:t>
+            </a:r>
+            <a:r>
+              <a:rPr lang="fr-BE" sz="1000" dirty="0"/>
+              <a:t> of </a:t>
+            </a:r>
+            <a:r>
+              <a:rPr lang="fr-BE" sz="1000" dirty="0" err="1"/>
+              <a:t>Fabric</a:t>
+            </a:r>
+            <a:r>
+              <a:rPr lang="fr-BE" sz="1000" dirty="0"/>
+              <a:t> datawarehouse</a:t>
+            </a:r>
+          </a:p>
+          <a:p>
+            <a:r>
+              <a:rPr lang="fr-BE" sz="1000" dirty="0" err="1"/>
+              <a:t>Fabric_DEV_DATABASE</a:t>
+            </a:r>
+            <a:r>
+              <a:rPr lang="fr-BE" sz="1000" dirty="0"/>
+              <a:t>= </a:t>
+            </a:r>
+            <a:r>
+              <a:rPr lang="fr-BE" sz="1000" dirty="0" err="1"/>
+              <a:t>your</a:t>
+            </a:r>
+            <a:r>
+              <a:rPr lang="fr-BE" sz="1000" dirty="0"/>
+              <a:t> </a:t>
+            </a:r>
+            <a:r>
+              <a:rPr lang="fr-BE" sz="1000" dirty="0" err="1"/>
+              <a:t>fabrivc</a:t>
+            </a:r>
+            <a:r>
+              <a:rPr lang="fr-BE" sz="1000" dirty="0"/>
+              <a:t> datawarehouse</a:t>
+            </a:r>
+          </a:p>
+          <a:p>
+            <a:r>
+              <a:rPr lang="fr-BE" sz="1000" dirty="0"/>
+              <a:t>FABRIC_LAKEHOUSE_DATABASE = </a:t>
+            </a:r>
+            <a:r>
+              <a:rPr lang="fr-BE" sz="1000" dirty="0" err="1"/>
+              <a:t>fabric</a:t>
+            </a:r>
+            <a:r>
+              <a:rPr lang="fr-BE" sz="1000" dirty="0"/>
+              <a:t> </a:t>
+            </a:r>
+            <a:r>
+              <a:rPr lang="fr-BE" sz="1000" dirty="0" err="1"/>
+              <a:t>lakehouseName</a:t>
+            </a:r>
+            <a:endParaRPr lang="fr-BE" sz="1000" dirty="0"/>
+          </a:p>
+          <a:p>
+            <a:pPr marL="342900" indent="-342900">
+              <a:buFont typeface="+mj-lt"/>
+              <a:buAutoNum type="arabicPeriod"/>
+            </a:pPr>
+            <a:endParaRPr lang="fr-BE" sz="1000" i="1" dirty="0">
+              <a:solidFill>
+                <a:srgbClr val="00B0F0"/>
+              </a:solidFill>
+            </a:endParaRPr>
+          </a:p>
+          <a:p>
+            <a:r>
+              <a:rPr lang="fr-BE" sz="1400" dirty="0"/>
+              <a:t>C-/ Go to </a:t>
+            </a:r>
+            <a:r>
+              <a:rPr lang="fr-BE" sz="1400" dirty="0" err="1"/>
+              <a:t>your</a:t>
+            </a:r>
+            <a:r>
+              <a:rPr lang="fr-BE" sz="1400" dirty="0"/>
+              <a:t> file explorer C drive </a:t>
+            </a:r>
+          </a:p>
+          <a:p>
+            <a:r>
+              <a:rPr lang="en-GB" sz="700" i="1" dirty="0"/>
+              <a:t>C:\Users\oumar.coulibaly\.dbt  open or  create </a:t>
+            </a:r>
+            <a:r>
+              <a:rPr lang="en-GB" sz="700" b="1" i="1" dirty="0" err="1">
+                <a:highlight>
+                  <a:srgbClr val="00FF00"/>
+                </a:highlight>
+              </a:rPr>
+              <a:t>profiles.yml</a:t>
+            </a:r>
+            <a:endParaRPr lang="en-GB" sz="700" b="1" i="1" dirty="0">
+              <a:highlight>
+                <a:srgbClr val="00FF00"/>
+              </a:highlight>
+            </a:endParaRPr>
+          </a:p>
+          <a:p>
+            <a:r>
+              <a:rPr lang="en-GB" sz="300" b="1" i="1" dirty="0">
+                <a:highlight>
+                  <a:srgbClr val="00FF00"/>
+                </a:highlight>
+              </a:rPr>
+              <a:t>  </a:t>
+            </a:r>
+            <a:r>
+              <a:rPr lang="fr-BE" sz="700" dirty="0" err="1"/>
+              <a:t>dbt_Fabric</a:t>
+            </a:r>
+            <a:r>
+              <a:rPr lang="fr-BE" sz="700" dirty="0"/>
+              <a:t>:</a:t>
+            </a:r>
+          </a:p>
+          <a:p>
+            <a:r>
+              <a:rPr lang="fr-BE" sz="700" dirty="0"/>
+              <a:t>  </a:t>
+            </a:r>
+            <a:r>
+              <a:rPr lang="fr-BE" sz="700" dirty="0" err="1"/>
+              <a:t>target</a:t>
+            </a:r>
+            <a:r>
+              <a:rPr lang="fr-BE" sz="700" dirty="0"/>
+              <a:t>: dev</a:t>
+            </a:r>
+          </a:p>
+          <a:p>
+            <a:r>
+              <a:rPr lang="fr-BE" sz="700" dirty="0"/>
+              <a:t>  outputs:</a:t>
+            </a:r>
+          </a:p>
+          <a:p>
+            <a:r>
+              <a:rPr lang="fr-BE" sz="700" dirty="0"/>
+              <a:t>    dev:</a:t>
+            </a:r>
+          </a:p>
+          <a:p>
+            <a:r>
+              <a:rPr lang="fr-BE" sz="700" dirty="0"/>
+              <a:t>      type: </a:t>
+            </a:r>
+            <a:r>
+              <a:rPr lang="fr-BE" sz="700" dirty="0" err="1"/>
+              <a:t>fabric</a:t>
+            </a:r>
+            <a:endParaRPr lang="fr-BE" sz="700" dirty="0"/>
+          </a:p>
+          <a:p>
+            <a:r>
+              <a:rPr lang="fr-BE" sz="700" dirty="0"/>
+              <a:t>      driver: 'ODBC Driver 18 for SQL Server'</a:t>
+            </a:r>
+          </a:p>
+          <a:p>
+            <a:r>
+              <a:rPr lang="fr-BE" sz="700" dirty="0"/>
+              <a:t>      server: "{{ </a:t>
+            </a:r>
+            <a:r>
+              <a:rPr lang="fr-BE" sz="700" dirty="0" err="1"/>
+              <a:t>env_var</a:t>
+            </a:r>
+            <a:r>
+              <a:rPr lang="fr-BE" sz="700" dirty="0"/>
+              <a:t>('FABRIC_DEV_SERVER') }}"</a:t>
+            </a:r>
+          </a:p>
+          <a:p>
+            <a:r>
+              <a:rPr lang="fr-BE" sz="700" dirty="0"/>
+              <a:t>      </a:t>
+            </a:r>
+            <a:r>
+              <a:rPr lang="fr-BE" sz="700" dirty="0" err="1"/>
+              <a:t>database</a:t>
+            </a:r>
+            <a:r>
+              <a:rPr lang="fr-BE" sz="700" dirty="0"/>
+              <a:t>: "{{ </a:t>
+            </a:r>
+            <a:r>
+              <a:rPr lang="fr-BE" sz="700" dirty="0" err="1"/>
+              <a:t>env_var</a:t>
+            </a:r>
+            <a:r>
+              <a:rPr lang="fr-BE" sz="700" dirty="0"/>
+              <a:t>('FABRIC_DEV_DATABASE') }}"</a:t>
+            </a:r>
+          </a:p>
+          <a:p>
+            <a:r>
+              <a:rPr lang="fr-BE" sz="700" dirty="0"/>
+              <a:t>      </a:t>
+            </a:r>
+            <a:r>
+              <a:rPr lang="fr-BE" sz="700" dirty="0" err="1"/>
+              <a:t>schema</a:t>
+            </a:r>
+            <a:r>
+              <a:rPr lang="fr-BE" sz="700" dirty="0"/>
+              <a:t>: </a:t>
+            </a:r>
+            <a:r>
+              <a:rPr lang="fr-BE" sz="700" dirty="0" err="1"/>
+              <a:t>dbo</a:t>
+            </a:r>
+            <a:endParaRPr lang="fr-BE" sz="700" dirty="0"/>
+          </a:p>
+          <a:p>
+            <a:r>
+              <a:rPr lang="fr-BE" sz="700" dirty="0"/>
+              <a:t>      </a:t>
+            </a:r>
+            <a:r>
+              <a:rPr lang="fr-BE" sz="700" dirty="0" err="1"/>
+              <a:t>authentication</a:t>
+            </a:r>
+            <a:r>
+              <a:rPr lang="fr-BE" sz="700" dirty="0"/>
+              <a:t>: CLI</a:t>
+            </a:r>
+          </a:p>
+          <a:p>
+            <a:r>
+              <a:rPr lang="fr-BE" sz="700" dirty="0"/>
+              <a:t>      threads: 4</a:t>
+            </a:r>
+          </a:p>
+          <a:p>
+            <a:r>
+              <a:rPr lang="fr-BE" sz="700" dirty="0"/>
+              <a:t>      </a:t>
+            </a:r>
+            <a:r>
+              <a:rPr lang="fr-BE" sz="700" dirty="0" err="1"/>
+              <a:t>connect_timeout</a:t>
+            </a:r>
+            <a:r>
+              <a:rPr lang="fr-BE" sz="700" dirty="0"/>
+              <a:t>: 30</a:t>
+            </a:r>
+          </a:p>
+          <a:p>
+            <a:r>
+              <a:rPr lang="fr-BE" sz="700" dirty="0"/>
+              <a:t>      retries: 2</a:t>
+            </a:r>
+          </a:p>
+          <a:p>
+            <a:endParaRPr lang="fr-BE" sz="1100" b="1" i="1" dirty="0">
+              <a:highlight>
+                <a:srgbClr val="00FF00"/>
+              </a:highlight>
+            </a:endParaRPr>
+          </a:p>
+          <a:p>
+            <a:r>
+              <a:rPr lang="fr-BE" sz="1400" dirty="0"/>
+              <a:t>D-/ </a:t>
+            </a:r>
+            <a:r>
+              <a:rPr lang="fr-BE" sz="1400" dirty="0" err="1"/>
+              <a:t>Autthentication</a:t>
+            </a:r>
+            <a:r>
+              <a:rPr lang="fr-BE" sz="1400" dirty="0"/>
+              <a:t> </a:t>
+            </a:r>
+          </a:p>
+          <a:p>
+            <a:endParaRPr lang="en-BE" sz="1100" b="1" i="1" dirty="0">
+              <a:highlight>
+                <a:srgbClr val="00FF00"/>
+              </a:highlight>
+            </a:endParaRPr>
+          </a:p>
+        </p:txBody>
+      </p:sp>
+      <p:pic>
+        <p:nvPicPr>
+          <p:cNvPr id="9" name="Picture 8">
+            <a:extLst>
+              <a:ext uri="{FF2B5EF4-FFF2-40B4-BE49-F238E27FC236}">
+                <a16:creationId xmlns:a16="http://schemas.microsoft.com/office/drawing/2014/main" id="{6740A242-D2E5-7672-B68F-1019257D41C5}"/>
+              </a:ext>
+            </a:extLst>
+          </p:cNvPr>
+          <p:cNvPicPr>
+            <a:picLocks noChangeAspect="1"/>
+          </p:cNvPicPr>
+          <p:nvPr/>
+        </p:nvPicPr>
+        <p:blipFill>
+          <a:blip r:embed="rId2"/>
+          <a:stretch>
+            <a:fillRect/>
+          </a:stretch>
+        </p:blipFill>
+        <p:spPr>
+          <a:xfrm>
+            <a:off x="3968496" y="2919149"/>
+            <a:ext cx="5158358" cy="1556902"/>
+          </a:xfrm>
+          <a:prstGeom prst="rect">
+            <a:avLst/>
+          </a:prstGeom>
+        </p:spPr>
+      </p:pic>
+    </p:spTree>
+    <p:extLst>
+      <p:ext uri="{BB962C8B-B14F-4D97-AF65-F5344CB8AC3E}">
+        <p14:creationId xmlns:p14="http://schemas.microsoft.com/office/powerpoint/2010/main" val="2834671667"/>
+      </p:ext>
+    </p:extLst>
+  </p:cSld>
+  <p:clrMapOvr>
+    <a:masterClrMapping/>
+  </p:clrMapOvr>
+</p:sld>
+</file>
+
+<file path=ppt/slides/slide3.xml><?xml version="1.0" encoding="utf-8"?>
+<p:sld xmlns:a="http://schemas.openxmlformats.org/drawingml/2006/main" xmlns:r="http://schemas.openxmlformats.org/officeDocument/2006/relationships" xmlns:p="http://schemas.openxmlformats.org/presentationml/2006/main">
+  <p:cSld>
+    <p:spTree>
+      <p:nvGrpSpPr>
+        <p:cNvPr id="1" name="">
+          <a:extLst>
+            <a:ext uri="{FF2B5EF4-FFF2-40B4-BE49-F238E27FC236}">
+              <a16:creationId xmlns:a16="http://schemas.microsoft.com/office/drawing/2014/main" id="{A7C1A3DD-BE36-3381-2C7F-784AF214D044}"/>
+            </a:ext>
+          </a:extLst>
+        </p:cNvPr>
+        <p:cNvGrpSpPr/>
+        <p:nvPr/>
+      </p:nvGrpSpPr>
+      <p:grpSpPr>
+        <a:xfrm>
+          <a:off x="0" y="0"/>
+          <a:ext cx="0" cy="0"/>
+          <a:chOff x="0" y="0"/>
+          <a:chExt cx="0" cy="0"/>
+        </a:xfrm>
+      </p:grpSpPr>
+      <p:sp>
+        <p:nvSpPr>
+          <p:cNvPr id="2" name="Title 1">
+            <a:extLst>
+              <a:ext uri="{FF2B5EF4-FFF2-40B4-BE49-F238E27FC236}">
+                <a16:creationId xmlns:a16="http://schemas.microsoft.com/office/drawing/2014/main" id="{3E4D4F2F-4D6D-8E2E-B3DD-CCE1EF91E3EE}"/>
+              </a:ext>
+            </a:extLst>
+          </p:cNvPr>
+          <p:cNvSpPr>
+            <a:spLocks noGrp="1"/>
+          </p:cNvSpPr>
+          <p:nvPr>
+            <p:ph type="ctrTitle"/>
+          </p:nvPr>
+        </p:nvSpPr>
+        <p:spPr>
+          <a:xfrm>
+            <a:off x="1361440" y="426719"/>
+            <a:ext cx="9144000" cy="594043"/>
+          </a:xfrm>
+        </p:spPr>
+        <p:txBody>
+          <a:bodyPr>
+            <a:normAutofit fontScale="90000"/>
+          </a:bodyPr>
+          <a:lstStyle/>
+          <a:p>
+            <a:r>
+              <a:rPr lang="en-GB" dirty="0" err="1"/>
+              <a:t>dbt</a:t>
+            </a:r>
+            <a:endParaRPr lang="en-BE" dirty="0"/>
+          </a:p>
+        </p:txBody>
+      </p:sp>
+      <p:sp>
+        <p:nvSpPr>
+          <p:cNvPr id="3" name="Subtitle 2">
+            <a:extLst>
+              <a:ext uri="{FF2B5EF4-FFF2-40B4-BE49-F238E27FC236}">
+                <a16:creationId xmlns:a16="http://schemas.microsoft.com/office/drawing/2014/main" id="{972820DF-BFED-1CC1-7217-262181BEE1ED}"/>
+              </a:ext>
+            </a:extLst>
+          </p:cNvPr>
+          <p:cNvSpPr>
+            <a:spLocks noGrp="1"/>
+          </p:cNvSpPr>
+          <p:nvPr>
+            <p:ph type="subTitle" idx="1"/>
+          </p:nvPr>
+        </p:nvSpPr>
+        <p:spPr>
+          <a:xfrm>
+            <a:off x="431798" y="1020762"/>
+            <a:ext cx="11531601" cy="1138238"/>
+          </a:xfrm>
+        </p:spPr>
+        <p:txBody>
+          <a:bodyPr>
+            <a:normAutofit/>
+          </a:bodyPr>
+          <a:lstStyle/>
+          <a:p>
+            <a:pPr algn="l"/>
+            <a:r>
+              <a:rPr lang="en-GB" sz="1400" dirty="0">
+                <a:hlinkClick r:id="rId2"/>
+              </a:rPr>
+              <a:t>https://www.udemy.com/course/simplifying-data-pipelines-using-dbt/learn/lecture/54953001?start=300#overview</a:t>
+            </a:r>
+            <a:r>
+              <a:rPr lang="en-GB" sz="1400" dirty="0"/>
+              <a:t> </a:t>
+            </a:r>
+            <a:endParaRPr lang="en-BE" sz="1400" dirty="0"/>
+          </a:p>
+        </p:txBody>
+      </p:sp>
+      <p:sp>
+        <p:nvSpPr>
+          <p:cNvPr id="4" name="TextBox 3">
+            <a:extLst>
+              <a:ext uri="{FF2B5EF4-FFF2-40B4-BE49-F238E27FC236}">
+                <a16:creationId xmlns:a16="http://schemas.microsoft.com/office/drawing/2014/main" id="{B20C6061-4358-5302-4B6B-36142D7DB27A}"/>
+              </a:ext>
+            </a:extLst>
+          </p:cNvPr>
+          <p:cNvSpPr txBox="1"/>
+          <p:nvPr/>
+        </p:nvSpPr>
+        <p:spPr>
+          <a:xfrm>
+            <a:off x="228602" y="1280159"/>
+            <a:ext cx="11531600" cy="2646878"/>
+          </a:xfrm>
+          <a:prstGeom prst="rect">
+            <a:avLst/>
+          </a:prstGeom>
+          <a:noFill/>
+        </p:spPr>
+        <p:txBody>
+          <a:bodyPr wrap="square" rtlCol="0">
+            <a:spAutoFit/>
+          </a:bodyPr>
+          <a:lstStyle/>
+          <a:p>
+            <a:r>
+              <a:rPr lang="fr-BE" sz="1400" dirty="0"/>
+              <a:t>D-/ </a:t>
+            </a:r>
+            <a:r>
+              <a:rPr lang="fr-BE" sz="1400" dirty="0" err="1"/>
+              <a:t>Autthentication</a:t>
+            </a:r>
+            <a:r>
+              <a:rPr lang="fr-BE" sz="1400" dirty="0"/>
+              <a:t>  </a:t>
+            </a:r>
+            <a:r>
+              <a:rPr lang="fr-BE" sz="900" i="1" dirty="0"/>
+              <a:t>(</a:t>
+            </a:r>
+            <a:r>
+              <a:rPr lang="fr-BE" sz="900" i="1" dirty="0" err="1"/>
+              <a:t>wiill</a:t>
+            </a:r>
+            <a:r>
+              <a:rPr lang="fr-BE" sz="900" i="1" dirty="0"/>
+              <a:t> </a:t>
+            </a:r>
+            <a:r>
+              <a:rPr lang="fr-BE" sz="900" i="1" dirty="0" err="1"/>
+              <a:t>authentocate</a:t>
+            </a:r>
+            <a:r>
+              <a:rPr lang="fr-BE" sz="900" i="1" dirty="0"/>
+              <a:t> </a:t>
+            </a:r>
+            <a:r>
+              <a:rPr lang="fr-BE" sz="900" i="1" dirty="0" err="1"/>
+              <a:t>you</a:t>
+            </a:r>
+            <a:r>
+              <a:rPr lang="fr-BE" sz="900" i="1" dirty="0"/>
+              <a:t> </a:t>
+            </a:r>
+            <a:r>
+              <a:rPr lang="fr-BE" sz="900" i="1" dirty="0" err="1"/>
+              <a:t>using</a:t>
+            </a:r>
+            <a:r>
+              <a:rPr lang="fr-BE" sz="900" i="1" dirty="0"/>
+              <a:t> the .</a:t>
+            </a:r>
+            <a:r>
+              <a:rPr lang="fr-BE" sz="900" i="1" dirty="0" err="1"/>
+              <a:t>env</a:t>
+            </a:r>
+            <a:r>
+              <a:rPr lang="fr-BE" sz="900" i="1" dirty="0"/>
+              <a:t> file )</a:t>
+            </a:r>
+          </a:p>
+          <a:p>
+            <a:r>
+              <a:rPr lang="fr-BE" sz="900" dirty="0">
+                <a:solidFill>
+                  <a:schemeClr val="accent1"/>
+                </a:solidFill>
+              </a:rPr>
+              <a:t>(</a:t>
+            </a:r>
+            <a:r>
+              <a:rPr lang="fr-BE" sz="900" dirty="0" err="1">
+                <a:solidFill>
+                  <a:schemeClr val="accent1"/>
+                </a:solidFill>
+              </a:rPr>
+              <a:t>dbt-env</a:t>
+            </a:r>
+            <a:r>
+              <a:rPr lang="fr-BE" sz="900" dirty="0">
+                <a:solidFill>
+                  <a:schemeClr val="accent1"/>
+                </a:solidFill>
+              </a:rPr>
+              <a:t>) PS C:\Users\oumar.coulibaly\Documents\VS Code Workspace\DBT-</a:t>
+            </a:r>
+            <a:r>
+              <a:rPr lang="fr-BE" sz="900" dirty="0" err="1">
+                <a:solidFill>
+                  <a:schemeClr val="accent1"/>
+                </a:solidFill>
+              </a:rPr>
+              <a:t>frechCart</a:t>
+            </a:r>
+            <a:r>
+              <a:rPr lang="fr-BE" sz="900" dirty="0">
+                <a:solidFill>
+                  <a:schemeClr val="accent1"/>
+                </a:solidFill>
+              </a:rPr>
+              <a:t>\</a:t>
+            </a:r>
+            <a:r>
+              <a:rPr lang="fr-BE" sz="900" dirty="0" err="1">
+                <a:solidFill>
+                  <a:schemeClr val="accent1"/>
+                </a:solidFill>
+              </a:rPr>
+              <a:t>dbt_Freshcart_project</a:t>
+            </a:r>
+            <a:r>
+              <a:rPr lang="fr-BE" sz="900" dirty="0">
+                <a:solidFill>
+                  <a:schemeClr val="accent1"/>
+                </a:solidFill>
+              </a:rPr>
+              <a:t>&gt;</a:t>
+            </a:r>
+          </a:p>
+          <a:p>
+            <a:r>
+              <a:rPr lang="fr-BE" sz="900" dirty="0">
+                <a:solidFill>
+                  <a:schemeClr val="accent1"/>
+                </a:solidFill>
+              </a:rPr>
+              <a:t> </a:t>
+            </a:r>
+          </a:p>
+          <a:p>
+            <a:r>
+              <a:rPr lang="fr-BE" sz="900" i="1" dirty="0" err="1">
+                <a:solidFill>
+                  <a:srgbClr val="0070C0"/>
+                </a:solidFill>
+              </a:rPr>
+              <a:t>Get</a:t>
+            </a:r>
+            <a:r>
+              <a:rPr lang="fr-BE" sz="900" i="1" dirty="0">
+                <a:solidFill>
+                  <a:srgbClr val="0070C0"/>
+                </a:solidFill>
+              </a:rPr>
+              <a:t>-Content .</a:t>
+            </a:r>
+            <a:r>
+              <a:rPr lang="fr-BE" sz="900" i="1" dirty="0" err="1">
+                <a:solidFill>
+                  <a:srgbClr val="0070C0"/>
+                </a:solidFill>
+              </a:rPr>
+              <a:t>env</a:t>
+            </a:r>
+            <a:r>
+              <a:rPr lang="fr-BE" sz="900" i="1" dirty="0">
+                <a:solidFill>
+                  <a:srgbClr val="0070C0"/>
+                </a:solidFill>
+              </a:rPr>
+              <a:t> | </a:t>
+            </a:r>
+            <a:r>
+              <a:rPr lang="fr-BE" sz="900" i="1" dirty="0" err="1">
+                <a:solidFill>
+                  <a:srgbClr val="0070C0"/>
+                </a:solidFill>
+              </a:rPr>
+              <a:t>ForEach</a:t>
+            </a:r>
+            <a:r>
+              <a:rPr lang="fr-BE" sz="900" i="1" dirty="0">
+                <a:solidFill>
+                  <a:srgbClr val="0070C0"/>
+                </a:solidFill>
+              </a:rPr>
+              <a:t>-Object {</a:t>
+            </a:r>
+          </a:p>
+          <a:p>
+            <a:r>
+              <a:rPr lang="fr-BE" sz="900" i="1" dirty="0">
+                <a:solidFill>
+                  <a:srgbClr val="0070C0"/>
+                </a:solidFill>
+              </a:rPr>
+              <a:t>    if ($_ -match "^(.*?)=(.*)$") {</a:t>
+            </a:r>
+          </a:p>
+          <a:p>
+            <a:r>
+              <a:rPr lang="fr-BE" sz="900" i="1" dirty="0">
+                <a:solidFill>
+                  <a:srgbClr val="0070C0"/>
+                </a:solidFill>
+              </a:rPr>
+              <a:t>        [</a:t>
+            </a:r>
+            <a:r>
+              <a:rPr lang="fr-BE" sz="900" i="1" dirty="0" err="1">
+                <a:solidFill>
+                  <a:srgbClr val="0070C0"/>
+                </a:solidFill>
+              </a:rPr>
+              <a:t>System.Environment</a:t>
+            </a:r>
+            <a:r>
+              <a:rPr lang="fr-BE" sz="900" i="1" dirty="0">
+                <a:solidFill>
+                  <a:srgbClr val="0070C0"/>
+                </a:solidFill>
+              </a:rPr>
+              <a:t>]::</a:t>
+            </a:r>
+            <a:r>
+              <a:rPr lang="fr-BE" sz="900" i="1" dirty="0" err="1">
+                <a:solidFill>
+                  <a:srgbClr val="0070C0"/>
+                </a:solidFill>
+              </a:rPr>
+              <a:t>SetEnvironmentVariable</a:t>
+            </a:r>
+            <a:r>
+              <a:rPr lang="fr-BE" sz="900" i="1" dirty="0">
+                <a:solidFill>
+                  <a:srgbClr val="0070C0"/>
+                </a:solidFill>
+              </a:rPr>
+              <a:t>($matches[1], $matches[2], "Process")</a:t>
+            </a:r>
+          </a:p>
+          <a:p>
+            <a:r>
+              <a:rPr lang="fr-BE" sz="900" i="1" dirty="0">
+                <a:solidFill>
+                  <a:srgbClr val="0070C0"/>
+                </a:solidFill>
+              </a:rPr>
+              <a:t>    }</a:t>
+            </a:r>
+          </a:p>
+          <a:p>
+            <a:r>
+              <a:rPr lang="fr-BE" sz="900" i="1" dirty="0">
+                <a:solidFill>
+                  <a:srgbClr val="0070C0"/>
+                </a:solidFill>
+              </a:rPr>
+              <a:t>}</a:t>
+            </a:r>
+          </a:p>
+          <a:p>
+            <a:endParaRPr lang="fr-BE" sz="900" b="1" i="1" dirty="0">
+              <a:solidFill>
+                <a:srgbClr val="0070C0"/>
+              </a:solidFill>
+              <a:highlight>
+                <a:srgbClr val="00FF00"/>
+              </a:highlight>
+            </a:endParaRPr>
+          </a:p>
+          <a:p>
+            <a:r>
+              <a:rPr lang="fr-BE" sz="1400" dirty="0"/>
+              <a:t>E-/ Check </a:t>
+            </a:r>
+            <a:r>
+              <a:rPr lang="fr-BE" sz="1400" dirty="0" err="1"/>
+              <a:t>authe</a:t>
+            </a:r>
+            <a:r>
+              <a:rPr lang="fr-BE" sz="1400" dirty="0"/>
+              <a:t> </a:t>
+            </a:r>
+            <a:r>
+              <a:rPr lang="fr-BE" sz="1400" dirty="0" err="1"/>
+              <a:t>ntication</a:t>
+            </a:r>
+            <a:r>
+              <a:rPr lang="fr-BE" sz="1400" dirty="0"/>
+              <a:t> </a:t>
+            </a:r>
+          </a:p>
+          <a:p>
+            <a:r>
+              <a:rPr lang="fr-BE" sz="1100" i="1" dirty="0" err="1">
+                <a:solidFill>
+                  <a:srgbClr val="0070C0"/>
+                </a:solidFill>
+              </a:rPr>
+              <a:t>dbt</a:t>
+            </a:r>
+            <a:r>
+              <a:rPr lang="fr-BE" sz="1100" i="1" dirty="0">
+                <a:solidFill>
+                  <a:srgbClr val="0070C0"/>
+                </a:solidFill>
+              </a:rPr>
+              <a:t> </a:t>
+            </a:r>
+            <a:r>
+              <a:rPr lang="fr-BE" sz="1100" i="1" dirty="0" err="1">
+                <a:solidFill>
+                  <a:srgbClr val="0070C0"/>
+                </a:solidFill>
+              </a:rPr>
+              <a:t>debug</a:t>
+            </a:r>
+            <a:r>
+              <a:rPr lang="fr-BE" sz="1100" i="1" dirty="0">
+                <a:solidFill>
+                  <a:srgbClr val="0070C0"/>
+                </a:solidFill>
+              </a:rPr>
+              <a:t>      #(check </a:t>
+            </a:r>
+            <a:r>
+              <a:rPr lang="fr-BE" sz="1100" i="1" dirty="0" err="1">
+                <a:solidFill>
+                  <a:srgbClr val="0070C0"/>
+                </a:solidFill>
+              </a:rPr>
+              <a:t>authentication</a:t>
+            </a:r>
+            <a:r>
+              <a:rPr lang="fr-BE" sz="1100" i="1" dirty="0">
+                <a:solidFill>
+                  <a:srgbClr val="0070C0"/>
+                </a:solidFill>
+              </a:rPr>
+              <a:t>)</a:t>
+            </a:r>
+          </a:p>
+          <a:p>
+            <a:endParaRPr lang="fr-BE" sz="1100" i="1" dirty="0">
+              <a:solidFill>
+                <a:srgbClr val="0070C0"/>
+              </a:solidFill>
+            </a:endParaRPr>
+          </a:p>
+          <a:p>
+            <a:r>
+              <a:rPr lang="fr-BE" sz="1100" i="1" dirty="0">
+                <a:solidFill>
+                  <a:srgbClr val="0070C0"/>
+                </a:solidFill>
+              </a:rPr>
+              <a:t>If output look like </a:t>
+            </a:r>
+            <a:r>
+              <a:rPr lang="fr-BE" sz="1100" i="1" dirty="0" err="1">
+                <a:solidFill>
+                  <a:srgbClr val="0070C0"/>
+                </a:solidFill>
+              </a:rPr>
+              <a:t>following</a:t>
+            </a:r>
+            <a:r>
+              <a:rPr lang="fr-BE" sz="1100" i="1" dirty="0">
+                <a:solidFill>
+                  <a:srgbClr val="0070C0"/>
+                </a:solidFill>
+              </a:rPr>
+              <a:t> , </a:t>
+            </a:r>
+            <a:r>
+              <a:rPr lang="fr-BE" sz="1100" i="1" dirty="0" err="1">
+                <a:solidFill>
+                  <a:srgbClr val="0070C0"/>
+                </a:solidFill>
+              </a:rPr>
+              <a:t>you</a:t>
+            </a:r>
+            <a:r>
+              <a:rPr lang="fr-BE" sz="1100" i="1" dirty="0">
+                <a:solidFill>
+                  <a:srgbClr val="0070C0"/>
+                </a:solidFill>
+              </a:rPr>
+              <a:t> are good </a:t>
+            </a:r>
+            <a:r>
+              <a:rPr lang="fr-BE" sz="1100" i="1" dirty="0" err="1">
+                <a:solidFill>
+                  <a:srgbClr val="0070C0"/>
+                </a:solidFill>
+              </a:rPr>
+              <a:t>done</a:t>
+            </a:r>
+            <a:r>
+              <a:rPr lang="fr-BE" sz="1100" i="1" dirty="0">
+                <a:solidFill>
+                  <a:srgbClr val="0070C0"/>
+                </a:solidFill>
+              </a:rPr>
+              <a:t> </a:t>
+            </a:r>
+            <a:r>
+              <a:rPr lang="fr-BE" sz="1100" i="1" dirty="0" err="1">
+                <a:solidFill>
+                  <a:srgbClr val="0070C0"/>
+                </a:solidFill>
+              </a:rPr>
+              <a:t>with</a:t>
+            </a:r>
+            <a:r>
+              <a:rPr lang="fr-BE" sz="1100" i="1" dirty="0">
+                <a:solidFill>
+                  <a:srgbClr val="0070C0"/>
+                </a:solidFill>
+              </a:rPr>
+              <a:t> the set up</a:t>
+            </a:r>
+          </a:p>
+          <a:p>
+            <a:endParaRPr lang="fr-BE" sz="1100" i="1" dirty="0">
+              <a:solidFill>
+                <a:srgbClr val="0070C0"/>
+              </a:solidFill>
+            </a:endParaRPr>
+          </a:p>
+          <a:p>
+            <a:endParaRPr lang="fr-BE" sz="1100" b="1" i="1" dirty="0">
+              <a:solidFill>
+                <a:srgbClr val="0070C0"/>
+              </a:solidFill>
+            </a:endParaRPr>
+          </a:p>
+          <a:p>
+            <a:endParaRPr lang="en-BE" sz="1100" i="1" dirty="0">
+              <a:solidFill>
+                <a:srgbClr val="0070C0"/>
+              </a:solidFill>
+              <a:highlight>
+                <a:srgbClr val="00FF00"/>
+              </a:highlight>
+            </a:endParaRPr>
+          </a:p>
+        </p:txBody>
+      </p:sp>
+      <p:pic>
+        <p:nvPicPr>
+          <p:cNvPr id="6" name="Picture 5">
+            <a:extLst>
+              <a:ext uri="{FF2B5EF4-FFF2-40B4-BE49-F238E27FC236}">
+                <a16:creationId xmlns:a16="http://schemas.microsoft.com/office/drawing/2014/main" id="{40025470-EE39-9875-ABBC-DB44DDFC259A}"/>
+              </a:ext>
+            </a:extLst>
+          </p:cNvPr>
+          <p:cNvPicPr>
+            <a:picLocks noChangeAspect="1"/>
+          </p:cNvPicPr>
+          <p:nvPr/>
+        </p:nvPicPr>
+        <p:blipFill>
+          <a:blip r:embed="rId3"/>
+          <a:stretch>
+            <a:fillRect/>
+          </a:stretch>
+        </p:blipFill>
+        <p:spPr>
+          <a:xfrm>
+            <a:off x="228602" y="3429000"/>
+            <a:ext cx="5678422" cy="3304700"/>
+          </a:xfrm>
+          <a:prstGeom prst="rect">
+            <a:avLst/>
+          </a:prstGeom>
+        </p:spPr>
+      </p:pic>
+    </p:spTree>
+    <p:extLst>
+      <p:ext uri="{BB962C8B-B14F-4D97-AF65-F5344CB8AC3E}">
+        <p14:creationId xmlns:p14="http://schemas.microsoft.com/office/powerpoint/2010/main" val="3042477453"/>
+      </p:ext>
+    </p:extLst>
+  </p:cSld>
+  <p:clrMapOvr>
+    <a:masterClrMapping/>
+  </p:clrMapOvr>
+</p:sld>
+</file>
+
+<file path=ppt/slides/slide4.xml><?xml version="1.0" encoding="utf-8"?>
+<p:sld xmlns:a="http://schemas.openxmlformats.org/drawingml/2006/main" xmlns:r="http://schemas.openxmlformats.org/officeDocument/2006/relationships" xmlns:p="http://schemas.openxmlformats.org/presentationml/2006/main">
+  <p:cSld>
+    <p:spTree>
+      <p:nvGrpSpPr>
+        <p:cNvPr id="1" name="">
+          <a:extLst>
+            <a:ext uri="{FF2B5EF4-FFF2-40B4-BE49-F238E27FC236}">
+              <a16:creationId xmlns:a16="http://schemas.microsoft.com/office/drawing/2014/main" id="{8C66326A-B628-2D35-54AB-051068645361}"/>
+            </a:ext>
+          </a:extLst>
+        </p:cNvPr>
+        <p:cNvGrpSpPr/>
+        <p:nvPr/>
+      </p:nvGrpSpPr>
+      <p:grpSpPr>
+        <a:xfrm>
+          <a:off x="0" y="0"/>
+          <a:ext cx="0" cy="0"/>
+          <a:chOff x="0" y="0"/>
+          <a:chExt cx="0" cy="0"/>
+        </a:xfrm>
+      </p:grpSpPr>
+      <p:sp>
+        <p:nvSpPr>
+          <p:cNvPr id="2" name="Title 1">
+            <a:extLst>
+              <a:ext uri="{FF2B5EF4-FFF2-40B4-BE49-F238E27FC236}">
+                <a16:creationId xmlns:a16="http://schemas.microsoft.com/office/drawing/2014/main" id="{6D892895-E2DC-2261-4DAF-4052151E6E64}"/>
+              </a:ext>
+            </a:extLst>
+          </p:cNvPr>
+          <p:cNvSpPr>
+            <a:spLocks noGrp="1"/>
+          </p:cNvSpPr>
+          <p:nvPr>
+            <p:ph type="ctrTitle"/>
+          </p:nvPr>
+        </p:nvSpPr>
+        <p:spPr>
+          <a:xfrm>
+            <a:off x="1346199" y="452120"/>
+            <a:ext cx="8541173" cy="301414"/>
+          </a:xfrm>
+        </p:spPr>
+        <p:txBody>
+          <a:bodyPr>
+            <a:noAutofit/>
+          </a:bodyPr>
+          <a:lstStyle/>
+          <a:p>
+            <a:r>
+              <a:rPr lang="fr-BE" sz="2800" dirty="0" err="1"/>
+              <a:t>Dbt_project.yml</a:t>
+            </a:r>
+            <a:endParaRPr lang="en-BE" sz="2800" dirty="0"/>
+          </a:p>
+        </p:txBody>
+      </p:sp>
+      <p:pic>
+        <p:nvPicPr>
+          <p:cNvPr id="7" name="Picture 6">
+            <a:extLst>
+              <a:ext uri="{FF2B5EF4-FFF2-40B4-BE49-F238E27FC236}">
+                <a16:creationId xmlns:a16="http://schemas.microsoft.com/office/drawing/2014/main" id="{AF367921-FB2E-0F45-1048-61B9900B631E}"/>
+              </a:ext>
+            </a:extLst>
+          </p:cNvPr>
+          <p:cNvPicPr>
+            <a:picLocks noChangeAspect="1"/>
+          </p:cNvPicPr>
+          <p:nvPr/>
+        </p:nvPicPr>
+        <p:blipFill>
+          <a:blip r:embed="rId2"/>
+          <a:stretch>
+            <a:fillRect/>
+          </a:stretch>
+        </p:blipFill>
+        <p:spPr>
+          <a:xfrm>
+            <a:off x="151356" y="130202"/>
+            <a:ext cx="4183577" cy="4732430"/>
+          </a:xfrm>
+          <a:prstGeom prst="rect">
+            <a:avLst/>
+          </a:prstGeom>
+        </p:spPr>
+      </p:pic>
+      <p:sp>
+        <p:nvSpPr>
+          <p:cNvPr id="8" name="TextBox 7">
+            <a:extLst>
+              <a:ext uri="{FF2B5EF4-FFF2-40B4-BE49-F238E27FC236}">
+                <a16:creationId xmlns:a16="http://schemas.microsoft.com/office/drawing/2014/main" id="{9C51A18A-2343-8DFD-F495-20EB667A75F2}"/>
+              </a:ext>
+            </a:extLst>
+          </p:cNvPr>
+          <p:cNvSpPr txBox="1"/>
+          <p:nvPr/>
+        </p:nvSpPr>
+        <p:spPr>
+          <a:xfrm>
+            <a:off x="6646072" y="753534"/>
+            <a:ext cx="5793574" cy="3139321"/>
+          </a:xfrm>
+          <a:prstGeom prst="rect">
+            <a:avLst/>
+          </a:prstGeom>
+          <a:noFill/>
+        </p:spPr>
+        <p:txBody>
+          <a:bodyPr wrap="none" rtlCol="0">
+            <a:spAutoFit/>
+          </a:bodyPr>
+          <a:lstStyle/>
+          <a:p>
+            <a:r>
+              <a:rPr lang="fr-BE" sz="1100" dirty="0" err="1"/>
+              <a:t>Make</a:t>
+            </a:r>
+            <a:r>
+              <a:rPr lang="fr-BE" sz="1100" dirty="0"/>
+              <a:t> sure </a:t>
+            </a:r>
+            <a:r>
+              <a:rPr lang="fr-BE" sz="1100" dirty="0" err="1"/>
+              <a:t>models</a:t>
+            </a:r>
+            <a:r>
+              <a:rPr lang="fr-BE" sz="1100" dirty="0"/>
+              <a:t> </a:t>
+            </a:r>
+            <a:r>
+              <a:rPr lang="fr-BE" sz="1100" dirty="0" err="1"/>
+              <a:t>is</a:t>
+            </a:r>
+            <a:r>
+              <a:rPr lang="fr-BE" sz="1100" dirty="0"/>
+              <a:t> </a:t>
+            </a:r>
+            <a:r>
+              <a:rPr lang="fr-BE" sz="1100" dirty="0" err="1"/>
+              <a:t>filed</a:t>
+            </a:r>
+            <a:r>
+              <a:rPr lang="fr-BE" sz="1100" dirty="0"/>
+              <a:t> </a:t>
+            </a:r>
+            <a:r>
+              <a:rPr lang="fr-BE" sz="1100" dirty="0" err="1"/>
+              <a:t>exactly</a:t>
+            </a:r>
+            <a:r>
+              <a:rPr lang="fr-BE" sz="1100" dirty="0"/>
+              <a:t> like in </a:t>
+            </a:r>
+            <a:r>
+              <a:rPr lang="fr-BE" sz="1100" dirty="0" err="1"/>
+              <a:t>picture</a:t>
+            </a:r>
+            <a:r>
+              <a:rPr lang="fr-BE" sz="1100" dirty="0"/>
+              <a:t>  </a:t>
+            </a:r>
+            <a:r>
+              <a:rPr lang="fr-BE" sz="1100" dirty="0">
+                <a:highlight>
+                  <a:srgbClr val="00FF00"/>
+                </a:highlight>
+              </a:rPr>
+              <a:t> stage </a:t>
+            </a:r>
+            <a:r>
+              <a:rPr lang="fr-BE" sz="1100" dirty="0"/>
+              <a:t>–</a:t>
+            </a:r>
+            <a:r>
+              <a:rPr lang="fr-BE" sz="1100" b="1" dirty="0">
+                <a:highlight>
+                  <a:srgbClr val="00FF00"/>
+                </a:highlight>
+              </a:rPr>
+              <a:t> </a:t>
+            </a:r>
+            <a:r>
+              <a:rPr lang="fr-BE" sz="1100" b="1" dirty="0" err="1">
+                <a:highlight>
+                  <a:srgbClr val="00FF00"/>
+                </a:highlight>
+              </a:rPr>
+              <a:t>mart</a:t>
+            </a:r>
+            <a:r>
+              <a:rPr lang="fr-BE" sz="1100" b="1" dirty="0">
+                <a:highlight>
+                  <a:srgbClr val="00FF00"/>
+                </a:highlight>
+              </a:rPr>
+              <a:t>  </a:t>
+            </a:r>
+            <a:r>
+              <a:rPr lang="fr-BE" sz="1100" dirty="0"/>
+              <a:t>and </a:t>
+            </a:r>
+            <a:r>
+              <a:rPr lang="fr-BE" sz="1100" dirty="0" err="1">
+                <a:highlight>
+                  <a:srgbClr val="00FF00"/>
+                </a:highlight>
+              </a:rPr>
+              <a:t>seeds</a:t>
+            </a:r>
+            <a:r>
+              <a:rPr lang="fr-BE" sz="1100" dirty="0">
+                <a:highlight>
+                  <a:srgbClr val="00FF00"/>
+                </a:highlight>
+              </a:rPr>
+              <a:t>   </a:t>
+            </a:r>
+            <a:r>
+              <a:rPr lang="fr-BE" sz="1100" dirty="0"/>
+              <a:t>and </a:t>
+            </a:r>
+            <a:r>
+              <a:rPr lang="fr-BE" sz="1100" dirty="0" err="1"/>
+              <a:t>save</a:t>
+            </a:r>
+            <a:r>
+              <a:rPr lang="fr-BE" sz="1100" dirty="0"/>
+              <a:t> the file</a:t>
+            </a:r>
+          </a:p>
+          <a:p>
+            <a:endParaRPr lang="fr-BE" sz="1100" dirty="0"/>
+          </a:p>
+          <a:p>
+            <a:r>
+              <a:rPr lang="fr-BE" sz="1100" dirty="0" err="1"/>
+              <a:t>Now</a:t>
+            </a:r>
+            <a:r>
+              <a:rPr lang="fr-BE" sz="1100" dirty="0"/>
+              <a:t> </a:t>
+            </a:r>
+            <a:r>
+              <a:rPr lang="fr-BE" sz="1100" dirty="0">
+                <a:highlight>
+                  <a:srgbClr val="FFFF00"/>
+                </a:highlight>
+              </a:rPr>
+              <a:t>Dag and </a:t>
+            </a:r>
+            <a:r>
+              <a:rPr lang="fr-BE" sz="1100" dirty="0" err="1">
+                <a:highlight>
+                  <a:srgbClr val="FFFF00"/>
+                </a:highlight>
+              </a:rPr>
+              <a:t>brop</a:t>
+            </a:r>
+            <a:r>
+              <a:rPr lang="fr-BE" sz="1100" dirty="0">
+                <a:highlight>
+                  <a:srgbClr val="FFFF00"/>
+                </a:highlight>
+              </a:rPr>
+              <a:t> </a:t>
+            </a:r>
+            <a:r>
+              <a:rPr lang="fr-BE" sz="1100" dirty="0"/>
+              <a:t>a file in the </a:t>
+            </a:r>
+            <a:r>
+              <a:rPr lang="fr-BE" sz="1100" dirty="0" err="1"/>
+              <a:t>seeds</a:t>
+            </a:r>
+            <a:r>
+              <a:rPr lang="fr-BE" sz="1100" dirty="0"/>
+              <a:t> section like </a:t>
+            </a:r>
+            <a:r>
+              <a:rPr lang="fr-BE" sz="1100" dirty="0" err="1"/>
+              <a:t>below</a:t>
+            </a:r>
+            <a:r>
+              <a:rPr lang="fr-BE" sz="1100" dirty="0"/>
+              <a:t>. And run the </a:t>
+            </a:r>
+            <a:r>
+              <a:rPr lang="fr-BE" sz="1100" dirty="0" err="1"/>
+              <a:t>following</a:t>
+            </a:r>
+            <a:r>
+              <a:rPr lang="fr-BE" sz="1100" dirty="0"/>
+              <a:t> in the terminal </a:t>
+            </a:r>
+          </a:p>
+          <a:p>
+            <a:r>
+              <a:rPr lang="en-GB" sz="1100" dirty="0" err="1"/>
+              <a:t>bt_Freshcart_project</a:t>
+            </a:r>
+            <a:r>
+              <a:rPr lang="en-GB" sz="1100" dirty="0"/>
+              <a:t>&gt; </a:t>
+            </a:r>
+            <a:r>
+              <a:rPr lang="en-GB" sz="1100" b="1" i="1" dirty="0" err="1">
+                <a:solidFill>
+                  <a:srgbClr val="0070C0"/>
+                </a:solidFill>
+              </a:rPr>
+              <a:t>dbt</a:t>
+            </a:r>
+            <a:r>
+              <a:rPr lang="en-GB" sz="1100" b="1" i="1" dirty="0">
+                <a:solidFill>
+                  <a:srgbClr val="0070C0"/>
+                </a:solidFill>
+              </a:rPr>
+              <a:t> seed</a:t>
+            </a:r>
+          </a:p>
+          <a:p>
+            <a:endParaRPr lang="fr-BE" sz="1100" b="1" i="1" dirty="0">
+              <a:solidFill>
+                <a:srgbClr val="0070C0"/>
+              </a:solidFill>
+            </a:endParaRPr>
+          </a:p>
+          <a:p>
+            <a:r>
+              <a:rPr lang="fr-BE" sz="1100" dirty="0"/>
+              <a:t>Output </a:t>
+            </a:r>
+            <a:r>
+              <a:rPr lang="fr-BE" sz="1100" dirty="0" err="1"/>
+              <a:t>should</a:t>
+            </a:r>
+            <a:r>
+              <a:rPr lang="fr-BE" sz="1100" dirty="0"/>
+              <a:t> </a:t>
+            </a:r>
+            <a:r>
+              <a:rPr lang="fr-BE" sz="1100" dirty="0" err="1"/>
+              <a:t>be</a:t>
+            </a:r>
+            <a:r>
+              <a:rPr lang="fr-BE" sz="1100" dirty="0"/>
+              <a:t> :</a:t>
+            </a:r>
+          </a:p>
+          <a:p>
+            <a:endParaRPr lang="fr-BE" sz="1100" dirty="0"/>
+          </a:p>
+          <a:p>
+            <a:endParaRPr lang="fr-BE" sz="1100" dirty="0"/>
+          </a:p>
+          <a:p>
+            <a:endParaRPr lang="fr-BE" sz="1100" dirty="0"/>
+          </a:p>
+          <a:p>
+            <a:endParaRPr lang="fr-BE" sz="1100" dirty="0"/>
+          </a:p>
+          <a:p>
+            <a:endParaRPr lang="fr-BE" sz="1100" dirty="0"/>
+          </a:p>
+          <a:p>
+            <a:r>
+              <a:rPr lang="en-GB" sz="1100" dirty="0"/>
+              <a:t>Note : </a:t>
+            </a:r>
+            <a:r>
+              <a:rPr lang="en-GB" sz="1100" dirty="0">
+                <a:highlight>
+                  <a:srgbClr val="FFFF00"/>
+                </a:highlight>
+              </a:rPr>
+              <a:t>this the semi manual processing </a:t>
+            </a:r>
+            <a:r>
+              <a:rPr lang="en-GB" sz="1100" dirty="0"/>
+              <a:t>of the file </a:t>
+            </a:r>
+            <a:r>
+              <a:rPr lang="en-GB" sz="1100" dirty="0" err="1"/>
+              <a:t>wicth</a:t>
+            </a:r>
+            <a:r>
+              <a:rPr lang="en-GB" sz="1100" dirty="0"/>
+              <a:t> will populate the </a:t>
+            </a:r>
+            <a:r>
+              <a:rPr lang="en-GB" sz="1100" dirty="0" err="1"/>
+              <a:t>datawarese</a:t>
+            </a:r>
+            <a:r>
+              <a:rPr lang="en-GB" sz="1100" dirty="0"/>
+              <a:t> with</a:t>
+            </a:r>
+          </a:p>
+          <a:p>
+            <a:r>
+              <a:rPr lang="en-GB" sz="1100" dirty="0"/>
+              <a:t> a table named : </a:t>
+            </a:r>
+            <a:r>
+              <a:rPr lang="en-GB" sz="1100" dirty="0" err="1"/>
+              <a:t>dbo_raw.raw_sales_trabsactions</a:t>
+            </a:r>
+            <a:r>
+              <a:rPr lang="en-GB" sz="1100" dirty="0"/>
+              <a:t> </a:t>
+            </a:r>
+          </a:p>
+          <a:p>
+            <a:endParaRPr lang="en-GB" sz="1100" dirty="0"/>
+          </a:p>
+          <a:p>
+            <a:r>
+              <a:rPr lang="en-GB" sz="1100" dirty="0"/>
+              <a:t>If we want to do the same thing using data already existing in the </a:t>
+            </a:r>
+            <a:r>
+              <a:rPr lang="en-GB" sz="1100" dirty="0" err="1"/>
+              <a:t>lakehouse</a:t>
+            </a:r>
+            <a:r>
+              <a:rPr lang="en-GB" sz="1100" dirty="0"/>
+              <a:t> (full automate</a:t>
+            </a:r>
+          </a:p>
+          <a:p>
+            <a:r>
+              <a:rPr lang="en-GB" sz="1100" dirty="0"/>
+              <a:t>Processing) we should use </a:t>
+            </a:r>
+            <a:r>
+              <a:rPr lang="en-GB" sz="1100" b="1" dirty="0" err="1">
+                <a:highlight>
+                  <a:srgbClr val="FFFF00"/>
+                </a:highlight>
+              </a:rPr>
+              <a:t>source.yml</a:t>
+            </a:r>
+            <a:r>
+              <a:rPr lang="en-GB" sz="1100" b="1" dirty="0">
+                <a:highlight>
+                  <a:srgbClr val="FFFF00"/>
+                </a:highlight>
+              </a:rPr>
+              <a:t> </a:t>
+            </a:r>
+            <a:r>
+              <a:rPr lang="en-GB" sz="1100" dirty="0"/>
+              <a:t>file </a:t>
+            </a:r>
+          </a:p>
+          <a:p>
+            <a:endParaRPr lang="en-GB" sz="1100" dirty="0"/>
+          </a:p>
+          <a:p>
+            <a:endParaRPr lang="en-GB" sz="1100" dirty="0"/>
+          </a:p>
+        </p:txBody>
+      </p:sp>
+      <p:pic>
+        <p:nvPicPr>
+          <p:cNvPr id="10" name="Picture 9">
+            <a:extLst>
+              <a:ext uri="{FF2B5EF4-FFF2-40B4-BE49-F238E27FC236}">
+                <a16:creationId xmlns:a16="http://schemas.microsoft.com/office/drawing/2014/main" id="{11302624-4DB2-2A53-CF4B-A7EDAE8B6E52}"/>
+              </a:ext>
+            </a:extLst>
+          </p:cNvPr>
+          <p:cNvPicPr>
+            <a:picLocks noChangeAspect="1"/>
+          </p:cNvPicPr>
+          <p:nvPr/>
+        </p:nvPicPr>
+        <p:blipFill>
+          <a:blip r:embed="rId3"/>
+          <a:stretch>
+            <a:fillRect/>
+          </a:stretch>
+        </p:blipFill>
+        <p:spPr>
+          <a:xfrm>
+            <a:off x="4496006" y="1197409"/>
+            <a:ext cx="1988992" cy="3520745"/>
+          </a:xfrm>
+          <a:prstGeom prst="rect">
+            <a:avLst/>
+          </a:prstGeom>
+        </p:spPr>
+      </p:pic>
+      <p:pic>
+        <p:nvPicPr>
+          <p:cNvPr id="12" name="Picture 11">
+            <a:extLst>
+              <a:ext uri="{FF2B5EF4-FFF2-40B4-BE49-F238E27FC236}">
+                <a16:creationId xmlns:a16="http://schemas.microsoft.com/office/drawing/2014/main" id="{BA980405-3580-7F82-B77C-3760143C92D0}"/>
+              </a:ext>
+            </a:extLst>
+          </p:cNvPr>
+          <p:cNvPicPr>
+            <a:picLocks noChangeAspect="1"/>
+          </p:cNvPicPr>
+          <p:nvPr/>
+        </p:nvPicPr>
+        <p:blipFill>
+          <a:blip r:embed="rId4"/>
+          <a:stretch>
+            <a:fillRect/>
+          </a:stretch>
+        </p:blipFill>
+        <p:spPr>
+          <a:xfrm>
+            <a:off x="6731713" y="1921684"/>
+            <a:ext cx="4387690" cy="451998"/>
+          </a:xfrm>
+          <a:prstGeom prst="rect">
+            <a:avLst/>
+          </a:prstGeom>
+        </p:spPr>
+      </p:pic>
+    </p:spTree>
+    <p:extLst>
+      <p:ext uri="{BB962C8B-B14F-4D97-AF65-F5344CB8AC3E}">
+        <p14:creationId xmlns:p14="http://schemas.microsoft.com/office/powerpoint/2010/main" val="2398786340"/>
+      </p:ext>
+    </p:extLst>
+  </p:cSld>
+  <p:clrMapOvr>
+    <a:masterClrMapping/>
+  </p:clrMapOvr>
+</p:sld>
+</file>
+
+<file path=ppt/slides/slide5.xml><?xml version="1.0" encoding="utf-8"?>
+<p:sld xmlns:a="http://schemas.openxmlformats.org/drawingml/2006/main" xmlns:r="http://schemas.openxmlformats.org/officeDocument/2006/relationships" xmlns:p="http://schemas.openxmlformats.org/presentationml/2006/main">
+  <p:cSld>
+    <p:spTree>
+      <p:nvGrpSpPr>
+        <p:cNvPr id="1" name="">
+          <a:extLst>
+            <a:ext uri="{FF2B5EF4-FFF2-40B4-BE49-F238E27FC236}">
+              <a16:creationId xmlns:a16="http://schemas.microsoft.com/office/drawing/2014/main" id="{37EC7BFB-1D00-51DA-B38E-B4BAD9ADF935}"/>
+            </a:ext>
+          </a:extLst>
+        </p:cNvPr>
+        <p:cNvGrpSpPr/>
+        <p:nvPr/>
+      </p:nvGrpSpPr>
+      <p:grpSpPr>
+        <a:xfrm>
+          <a:off x="0" y="0"/>
+          <a:ext cx="0" cy="0"/>
+          <a:chOff x="0" y="0"/>
+          <a:chExt cx="0" cy="0"/>
+        </a:xfrm>
+      </p:grpSpPr>
+      <p:sp>
+        <p:nvSpPr>
+          <p:cNvPr id="2" name="Title 1">
+            <a:extLst>
+              <a:ext uri="{FF2B5EF4-FFF2-40B4-BE49-F238E27FC236}">
+                <a16:creationId xmlns:a16="http://schemas.microsoft.com/office/drawing/2014/main" id="{D77FFF13-1F55-2010-DD48-2EF33439EFD6}"/>
+              </a:ext>
+            </a:extLst>
+          </p:cNvPr>
+          <p:cNvSpPr>
+            <a:spLocks noGrp="1"/>
+          </p:cNvSpPr>
+          <p:nvPr>
+            <p:ph type="ctrTitle"/>
+          </p:nvPr>
+        </p:nvSpPr>
+        <p:spPr>
+          <a:xfrm>
+            <a:off x="1075266" y="189653"/>
+            <a:ext cx="8541173" cy="301414"/>
+          </a:xfrm>
+        </p:spPr>
+        <p:txBody>
+          <a:bodyPr>
+            <a:noAutofit/>
+          </a:bodyPr>
+          <a:lstStyle/>
+          <a:p>
+            <a:r>
+              <a:rPr lang="fr-BE" sz="2800" dirty="0" err="1"/>
+              <a:t>Dbt_project.yml</a:t>
+            </a:r>
+            <a:r>
+              <a:rPr lang="fr-BE" sz="2800" dirty="0"/>
+              <a:t> + </a:t>
+            </a:r>
+            <a:r>
+              <a:rPr lang="fr-BE" sz="2800" dirty="0" err="1"/>
+              <a:t>Source.yml</a:t>
+            </a:r>
+            <a:endParaRPr lang="en-BE" sz="2800" dirty="0"/>
+          </a:p>
+        </p:txBody>
+      </p:sp>
+      <p:sp>
+        <p:nvSpPr>
+          <p:cNvPr id="8" name="TextBox 7">
+            <a:extLst>
+              <a:ext uri="{FF2B5EF4-FFF2-40B4-BE49-F238E27FC236}">
+                <a16:creationId xmlns:a16="http://schemas.microsoft.com/office/drawing/2014/main" id="{1F98AA75-9CCE-9B33-D7BD-DD7AAB6C5085}"/>
+              </a:ext>
+            </a:extLst>
+          </p:cNvPr>
+          <p:cNvSpPr txBox="1"/>
+          <p:nvPr/>
+        </p:nvSpPr>
+        <p:spPr>
+          <a:xfrm>
+            <a:off x="1540672" y="1380067"/>
+            <a:ext cx="184731" cy="430887"/>
+          </a:xfrm>
+          <a:prstGeom prst="rect">
+            <a:avLst/>
+          </a:prstGeom>
+          <a:noFill/>
+        </p:spPr>
+        <p:txBody>
+          <a:bodyPr wrap="none" rtlCol="0">
+            <a:spAutoFit/>
+          </a:bodyPr>
+          <a:lstStyle/>
+          <a:p>
+            <a:endParaRPr lang="en-GB" sz="1100" dirty="0"/>
+          </a:p>
+          <a:p>
+            <a:endParaRPr lang="en-GB" sz="1100" dirty="0"/>
+          </a:p>
+        </p:txBody>
+      </p:sp>
+      <p:pic>
+        <p:nvPicPr>
+          <p:cNvPr id="4" name="Picture 3">
+            <a:extLst>
+              <a:ext uri="{FF2B5EF4-FFF2-40B4-BE49-F238E27FC236}">
+                <a16:creationId xmlns:a16="http://schemas.microsoft.com/office/drawing/2014/main" id="{53F5AA01-169C-B554-FB5E-118F54133408}"/>
+              </a:ext>
+            </a:extLst>
+          </p:cNvPr>
+          <p:cNvPicPr>
+            <a:picLocks noChangeAspect="1"/>
+          </p:cNvPicPr>
+          <p:nvPr/>
+        </p:nvPicPr>
+        <p:blipFill>
+          <a:blip r:embed="rId2"/>
+          <a:stretch>
+            <a:fillRect/>
+          </a:stretch>
+        </p:blipFill>
+        <p:spPr>
+          <a:xfrm>
+            <a:off x="166891" y="544182"/>
+            <a:ext cx="6473117" cy="2227804"/>
+          </a:xfrm>
+          <a:prstGeom prst="rect">
+            <a:avLst/>
+          </a:prstGeom>
+        </p:spPr>
+      </p:pic>
+      <p:sp>
+        <p:nvSpPr>
+          <p:cNvPr id="5" name="TextBox 4">
+            <a:extLst>
+              <a:ext uri="{FF2B5EF4-FFF2-40B4-BE49-F238E27FC236}">
+                <a16:creationId xmlns:a16="http://schemas.microsoft.com/office/drawing/2014/main" id="{E72A8257-EE88-01AF-9EA4-075328A6E018}"/>
+              </a:ext>
+            </a:extLst>
+          </p:cNvPr>
+          <p:cNvSpPr txBox="1"/>
+          <p:nvPr/>
+        </p:nvSpPr>
+        <p:spPr>
+          <a:xfrm>
+            <a:off x="287867" y="3056467"/>
+            <a:ext cx="7408333" cy="646331"/>
+          </a:xfrm>
+          <a:prstGeom prst="rect">
+            <a:avLst/>
+          </a:prstGeom>
+          <a:noFill/>
+        </p:spPr>
+        <p:txBody>
+          <a:bodyPr wrap="square" rtlCol="0">
+            <a:spAutoFit/>
+          </a:bodyPr>
+          <a:lstStyle/>
+          <a:p>
+            <a:pPr marL="228600" indent="-228600">
+              <a:buFont typeface="+mj-lt"/>
+              <a:buAutoNum type="arabicPeriod"/>
+            </a:pPr>
+            <a:r>
+              <a:rPr lang="fr-BE" sz="1200" dirty="0"/>
+              <a:t>The code </a:t>
+            </a:r>
+            <a:r>
+              <a:rPr lang="fr-BE" sz="1200" dirty="0" err="1"/>
+              <a:t>inside</a:t>
+            </a:r>
+            <a:r>
+              <a:rPr lang="fr-BE" sz="1200" dirty="0"/>
+              <a:t> </a:t>
+            </a:r>
+            <a:r>
+              <a:rPr lang="fr-BE" sz="1200" dirty="0" err="1"/>
+              <a:t>this</a:t>
+            </a:r>
+            <a:r>
+              <a:rPr lang="fr-BE" sz="1200" dirty="0"/>
+              <a:t> file look like </a:t>
+            </a:r>
+            <a:r>
+              <a:rPr lang="fr-BE" sz="1200" dirty="0" err="1"/>
+              <a:t>this</a:t>
+            </a:r>
+            <a:r>
+              <a:rPr lang="fr-BE" sz="1200" dirty="0"/>
+              <a:t> : </a:t>
+            </a:r>
+            <a:r>
+              <a:rPr lang="fr-BE" sz="1200" dirty="0" err="1"/>
+              <a:t>with</a:t>
+            </a:r>
+            <a:r>
+              <a:rPr lang="fr-BE" sz="1200" dirty="0"/>
+              <a:t> the </a:t>
+            </a:r>
+            <a:r>
+              <a:rPr lang="fr-BE" sz="1200" dirty="0" err="1"/>
+              <a:t>soure</a:t>
+            </a:r>
+            <a:r>
+              <a:rPr lang="fr-BE" sz="1200" dirty="0"/>
+              <a:t> </a:t>
+            </a:r>
+            <a:r>
+              <a:rPr lang="fr-BE" sz="1200" dirty="0" err="1"/>
+              <a:t>name</a:t>
+            </a:r>
+            <a:r>
+              <a:rPr lang="fr-BE" sz="1200" dirty="0"/>
+              <a:t>  , </a:t>
+            </a:r>
+            <a:r>
+              <a:rPr lang="fr-BE" sz="1200" dirty="0" err="1"/>
+              <a:t>schema</a:t>
+            </a:r>
+            <a:r>
+              <a:rPr lang="fr-BE" sz="1200" dirty="0"/>
+              <a:t> , </a:t>
+            </a:r>
+            <a:r>
+              <a:rPr lang="fr-BE" sz="1200" dirty="0" err="1"/>
+              <a:t>database</a:t>
+            </a:r>
+            <a:r>
+              <a:rPr lang="fr-BE" sz="1200" dirty="0"/>
+              <a:t>  and all the </a:t>
+            </a:r>
+            <a:r>
+              <a:rPr lang="fr-BE" sz="1200" dirty="0" err="1"/>
+              <a:t>needed</a:t>
+            </a:r>
+            <a:r>
+              <a:rPr lang="fr-BE" sz="1200" dirty="0"/>
+              <a:t> table </a:t>
+            </a:r>
+            <a:r>
+              <a:rPr lang="fr-BE" sz="1200" dirty="0" err="1"/>
+              <a:t>exalple</a:t>
+            </a:r>
+            <a:r>
+              <a:rPr lang="fr-BE" sz="1200" dirty="0"/>
+              <a:t> </a:t>
+            </a:r>
+            <a:r>
+              <a:rPr lang="fr-BE" sz="1200" b="1" i="1" dirty="0" err="1"/>
+              <a:t>raw_prodiucts</a:t>
+            </a:r>
+            <a:endParaRPr lang="fr-BE" sz="1200" b="1" i="1" dirty="0"/>
+          </a:p>
+          <a:p>
+            <a:pPr marL="228600" indent="-228600">
+              <a:buFont typeface="+mj-lt"/>
+              <a:buAutoNum type="arabicPeriod"/>
+            </a:pPr>
+            <a:r>
+              <a:rPr lang="fr-BE" sz="1200" dirty="0" err="1"/>
+              <a:t>Create</a:t>
+            </a:r>
+            <a:r>
+              <a:rPr lang="fr-BE" sz="1200" b="1" i="1" dirty="0"/>
+              <a:t> </a:t>
+            </a:r>
+            <a:r>
+              <a:rPr lang="fr-BE" sz="1200" b="1" i="1" dirty="0" err="1"/>
+              <a:t>stg_customers.sql</a:t>
+            </a:r>
+            <a:r>
+              <a:rPr lang="fr-BE" sz="1200" b="1" i="1" dirty="0"/>
+              <a:t>  </a:t>
+            </a:r>
+            <a:r>
+              <a:rPr lang="fr-BE" sz="1200" dirty="0" err="1"/>
+              <a:t>witch</a:t>
+            </a:r>
+            <a:r>
+              <a:rPr lang="fr-BE" sz="1200" dirty="0"/>
+              <a:t> </a:t>
+            </a:r>
+            <a:r>
+              <a:rPr lang="fr-BE" sz="1200" dirty="0" err="1"/>
+              <a:t>will</a:t>
+            </a:r>
+            <a:r>
+              <a:rPr lang="fr-BE" sz="1200" dirty="0"/>
+              <a:t> </a:t>
+            </a:r>
+            <a:r>
+              <a:rPr lang="fr-BE" sz="1200" dirty="0" err="1"/>
+              <a:t>contains</a:t>
+            </a:r>
+            <a:r>
+              <a:rPr lang="fr-BE" sz="1200" dirty="0"/>
+              <a:t> the </a:t>
+            </a:r>
+            <a:r>
+              <a:rPr lang="fr-BE" sz="1200" dirty="0" err="1"/>
+              <a:t>sql</a:t>
+            </a:r>
+            <a:r>
+              <a:rPr lang="fr-BE" sz="1200" dirty="0"/>
+              <a:t> </a:t>
+            </a:r>
+            <a:r>
+              <a:rPr lang="fr-BE" sz="1200" dirty="0" err="1"/>
+              <a:t>statement</a:t>
+            </a:r>
+            <a:r>
+              <a:rPr lang="fr-BE" sz="1200" dirty="0"/>
+              <a:t> </a:t>
+            </a:r>
+            <a:endParaRPr lang="en-BE" sz="1200" dirty="0"/>
+          </a:p>
+        </p:txBody>
+      </p:sp>
+      <p:pic>
+        <p:nvPicPr>
+          <p:cNvPr id="9" name="Picture 8">
+            <a:extLst>
+              <a:ext uri="{FF2B5EF4-FFF2-40B4-BE49-F238E27FC236}">
+                <a16:creationId xmlns:a16="http://schemas.microsoft.com/office/drawing/2014/main" id="{D367BECC-4B1F-3D3D-9B25-BBEBF79ABC85}"/>
+              </a:ext>
+            </a:extLst>
+          </p:cNvPr>
+          <p:cNvPicPr>
+            <a:picLocks noChangeAspect="1"/>
+          </p:cNvPicPr>
+          <p:nvPr/>
+        </p:nvPicPr>
+        <p:blipFill>
+          <a:blip r:embed="rId3"/>
+          <a:stretch>
+            <a:fillRect/>
+          </a:stretch>
+        </p:blipFill>
+        <p:spPr>
+          <a:xfrm>
+            <a:off x="379379" y="3807380"/>
+            <a:ext cx="4610910" cy="3023623"/>
+          </a:xfrm>
+          <a:prstGeom prst="rect">
+            <a:avLst/>
+          </a:prstGeom>
+        </p:spPr>
+      </p:pic>
+      <p:sp>
+        <p:nvSpPr>
+          <p:cNvPr id="11" name="TextBox 10">
+            <a:extLst>
+              <a:ext uri="{FF2B5EF4-FFF2-40B4-BE49-F238E27FC236}">
+                <a16:creationId xmlns:a16="http://schemas.microsoft.com/office/drawing/2014/main" id="{A1CB9702-73DA-FD0C-8758-7472ED5BB97B}"/>
+              </a:ext>
+            </a:extLst>
+          </p:cNvPr>
+          <p:cNvSpPr txBox="1"/>
+          <p:nvPr/>
+        </p:nvSpPr>
+        <p:spPr>
+          <a:xfrm>
+            <a:off x="5903408" y="4870287"/>
+            <a:ext cx="5645126" cy="1569660"/>
+          </a:xfrm>
+          <a:prstGeom prst="rect">
+            <a:avLst/>
+          </a:prstGeom>
+          <a:noFill/>
+        </p:spPr>
+        <p:txBody>
+          <a:bodyPr wrap="square" rtlCol="0">
+            <a:spAutoFit/>
+          </a:bodyPr>
+          <a:lstStyle/>
+          <a:p>
+            <a:r>
+              <a:rPr lang="fr-BE" sz="1200" dirty="0"/>
+              <a:t>3. Building </a:t>
+            </a:r>
+            <a:r>
+              <a:rPr lang="fr-BE" sz="1200" dirty="0" err="1"/>
+              <a:t>this</a:t>
+            </a:r>
+            <a:r>
+              <a:rPr lang="fr-BE" sz="1200" dirty="0"/>
+              <a:t> in the terminal </a:t>
+            </a:r>
+            <a:r>
+              <a:rPr lang="fr-BE" sz="1200" dirty="0" err="1"/>
+              <a:t>will</a:t>
+            </a:r>
+            <a:r>
+              <a:rPr lang="fr-BE" sz="1200" dirty="0"/>
+              <a:t> </a:t>
+            </a:r>
+            <a:r>
+              <a:rPr lang="fr-BE" sz="1200" dirty="0" err="1"/>
+              <a:t>create</a:t>
+            </a:r>
+            <a:r>
+              <a:rPr lang="fr-BE" sz="1200" dirty="0"/>
+              <a:t> a new table </a:t>
+            </a:r>
+            <a:r>
+              <a:rPr lang="fr-BE" sz="1200" dirty="0" err="1"/>
+              <a:t>into</a:t>
+            </a:r>
+            <a:r>
+              <a:rPr lang="fr-BE" sz="1200" dirty="0"/>
+              <a:t> the datawarehouse</a:t>
+            </a:r>
+          </a:p>
+          <a:p>
+            <a:endParaRPr lang="fr-BE" sz="1200" dirty="0"/>
+          </a:p>
+          <a:p>
+            <a:endParaRPr lang="fr-BE" sz="1200" dirty="0"/>
+          </a:p>
+          <a:p>
+            <a:r>
+              <a:rPr lang="fr-BE" sz="1200" dirty="0"/>
+              <a:t>Note : </a:t>
+            </a:r>
+          </a:p>
+          <a:p>
+            <a:r>
+              <a:rPr lang="fr-BE" sz="1200" b="1" i="1" dirty="0" err="1"/>
+              <a:t>source.yml</a:t>
+            </a:r>
+            <a:r>
+              <a:rPr lang="fr-BE" sz="1200" b="1" i="1" dirty="0"/>
+              <a:t>   </a:t>
+            </a:r>
+            <a:r>
+              <a:rPr lang="fr-BE" sz="1200" dirty="0"/>
+              <a:t>(</a:t>
+            </a:r>
+            <a:r>
+              <a:rPr lang="fr-BE" sz="1200" dirty="0" err="1"/>
+              <a:t>define</a:t>
+            </a:r>
+            <a:r>
+              <a:rPr lang="fr-BE" sz="1200" dirty="0"/>
+              <a:t> de source of data)</a:t>
+            </a:r>
+          </a:p>
+          <a:p>
+            <a:r>
+              <a:rPr lang="fr-BE" sz="1200" b="1" i="1" dirty="0" err="1"/>
+              <a:t>dbt_projrct.yml</a:t>
+            </a:r>
+            <a:r>
+              <a:rPr lang="fr-BE" sz="1200" b="1" i="1" dirty="0"/>
+              <a:t> </a:t>
+            </a:r>
+            <a:r>
+              <a:rPr lang="fr-BE" sz="1200" dirty="0"/>
+              <a:t>( </a:t>
+            </a:r>
+            <a:r>
+              <a:rPr lang="fr-BE" sz="1200" dirty="0" err="1"/>
+              <a:t>define</a:t>
+            </a:r>
+            <a:r>
+              <a:rPr lang="fr-BE" sz="1200" dirty="0"/>
+              <a:t> the destination )</a:t>
+            </a:r>
+          </a:p>
+          <a:p>
+            <a:endParaRPr lang="fr-BE" sz="1200" dirty="0"/>
+          </a:p>
+          <a:p>
+            <a:r>
+              <a:rPr lang="fr-BE" sz="1200" dirty="0" err="1"/>
+              <a:t>Make</a:t>
+            </a:r>
+            <a:r>
+              <a:rPr lang="fr-BE" sz="1200" dirty="0"/>
+              <a:t> sure the are </a:t>
+            </a:r>
+            <a:r>
+              <a:rPr lang="fr-BE" sz="1200" dirty="0" err="1"/>
+              <a:t>present</a:t>
+            </a:r>
+            <a:r>
+              <a:rPr lang="fr-BE" sz="1200" dirty="0"/>
+              <a:t> and good </a:t>
+            </a:r>
+            <a:r>
+              <a:rPr lang="fr-BE" sz="1200" dirty="0" err="1"/>
+              <a:t>configured</a:t>
+            </a:r>
+            <a:r>
+              <a:rPr lang="fr-BE" sz="1200" dirty="0"/>
+              <a:t>.</a:t>
+            </a:r>
+            <a:endParaRPr lang="en-BE" sz="1200" dirty="0"/>
+          </a:p>
+        </p:txBody>
+      </p:sp>
+    </p:spTree>
+    <p:extLst>
+      <p:ext uri="{BB962C8B-B14F-4D97-AF65-F5344CB8AC3E}">
+        <p14:creationId xmlns:p14="http://schemas.microsoft.com/office/powerpoint/2010/main" val="2004096513"/>
       </p:ext>
     </p:extLst>
   </p:cSld>

--- a/dbt/dbt.pptx
+++ b/dbt/dbt.pptx
@@ -6,10 +6,15 @@
   </p:sldMasterIdLst>
   <p:sldIdLst>
     <p:sldId id="256" r:id="rId2"/>
-    <p:sldId id="257" r:id="rId3"/>
-    <p:sldId id="258" r:id="rId4"/>
-    <p:sldId id="259" r:id="rId5"/>
-    <p:sldId id="260" r:id="rId6"/>
+    <p:sldId id="262" r:id="rId3"/>
+    <p:sldId id="257" r:id="rId4"/>
+    <p:sldId id="258" r:id="rId5"/>
+    <p:sldId id="259" r:id="rId6"/>
+    <p:sldId id="260" r:id="rId7"/>
+    <p:sldId id="261" r:id="rId8"/>
+    <p:sldId id="264" r:id="rId9"/>
+    <p:sldId id="263" r:id="rId10"/>
+    <p:sldId id="265" r:id="rId11"/>
   </p:sldIdLst>
   <p:sldSz cx="12192000" cy="6858000"/>
   <p:notesSz cx="6858000" cy="9144000"/>
@@ -3375,15 +3380,15 @@
         </p:spPr>
         <p:txBody>
           <a:bodyPr>
-            <a:normAutofit fontScale="90000"/>
+            <a:noAutofit/>
           </a:bodyPr>
           <a:lstStyle/>
           <a:p>
             <a:r>
-              <a:rPr lang="en-GB" dirty="0" err="1"/>
+              <a:rPr lang="en-GB" sz="4000" i="1" dirty="0" err="1"/>
               <a:t>dbt</a:t>
             </a:r>
-            <a:endParaRPr lang="en-BE" dirty="0"/>
+            <a:endParaRPr lang="en-BE" sz="4000" i="1" dirty="0"/>
           </a:p>
         </p:txBody>
       </p:sp>
@@ -3393,6 +3398,723 @@
             <a:extLst>
               <a:ext uri="{FF2B5EF4-FFF2-40B4-BE49-F238E27FC236}">
                 <a16:creationId xmlns:a16="http://schemas.microsoft.com/office/drawing/2014/main" id="{8540024A-28D9-E703-08EA-E65B2E3D5727}"/>
+              </a:ext>
+            </a:extLst>
+          </p:cNvPr>
+          <p:cNvSpPr>
+            <a:spLocks noGrp="1"/>
+          </p:cNvSpPr>
+          <p:nvPr>
+            <p:ph type="subTitle" idx="1"/>
+          </p:nvPr>
+        </p:nvSpPr>
+        <p:spPr>
+          <a:xfrm>
+            <a:off x="414864" y="1130829"/>
+            <a:ext cx="11531601" cy="1138238"/>
+          </a:xfrm>
+        </p:spPr>
+        <p:txBody>
+          <a:bodyPr>
+            <a:normAutofit/>
+          </a:bodyPr>
+          <a:lstStyle/>
+          <a:p>
+            <a:pPr algn="l"/>
+            <a:endParaRPr lang="en-BE" sz="1400" dirty="0"/>
+          </a:p>
+        </p:txBody>
+      </p:sp>
+    </p:spTree>
+    <p:extLst>
+      <p:ext uri="{BB962C8B-B14F-4D97-AF65-F5344CB8AC3E}">
+        <p14:creationId xmlns:p14="http://schemas.microsoft.com/office/powerpoint/2010/main" val="1296687254"/>
+      </p:ext>
+    </p:extLst>
+  </p:cSld>
+  <p:clrMapOvr>
+    <a:masterClrMapping/>
+  </p:clrMapOvr>
+</p:sld>
+</file>
+
+<file path=ppt/slides/slide10.xml><?xml version="1.0" encoding="utf-8"?>
+<p:sld xmlns:a="http://schemas.openxmlformats.org/drawingml/2006/main" xmlns:r="http://schemas.openxmlformats.org/officeDocument/2006/relationships" xmlns:p="http://schemas.openxmlformats.org/presentationml/2006/main">
+  <p:cSld>
+    <p:spTree>
+      <p:nvGrpSpPr>
+        <p:cNvPr id="1" name="">
+          <a:extLst>
+            <a:ext uri="{FF2B5EF4-FFF2-40B4-BE49-F238E27FC236}">
+              <a16:creationId xmlns:a16="http://schemas.microsoft.com/office/drawing/2014/main" id="{10ED4FAA-1E98-4BA7-B1DD-786EA5159272}"/>
+            </a:ext>
+          </a:extLst>
+        </p:cNvPr>
+        <p:cNvGrpSpPr/>
+        <p:nvPr/>
+      </p:nvGrpSpPr>
+      <p:grpSpPr>
+        <a:xfrm>
+          <a:off x="0" y="0"/>
+          <a:ext cx="0" cy="0"/>
+          <a:chOff x="0" y="0"/>
+          <a:chExt cx="0" cy="0"/>
+        </a:xfrm>
+      </p:grpSpPr>
+      <p:sp>
+        <p:nvSpPr>
+          <p:cNvPr id="2" name="Title 1">
+            <a:extLst>
+              <a:ext uri="{FF2B5EF4-FFF2-40B4-BE49-F238E27FC236}">
+                <a16:creationId xmlns:a16="http://schemas.microsoft.com/office/drawing/2014/main" id="{5424930C-8D55-64E8-3CE0-A04951EF5AD6}"/>
+              </a:ext>
+            </a:extLst>
+          </p:cNvPr>
+          <p:cNvSpPr>
+            <a:spLocks noGrp="1"/>
+          </p:cNvSpPr>
+          <p:nvPr>
+            <p:ph type="ctrTitle"/>
+          </p:nvPr>
+        </p:nvSpPr>
+        <p:spPr>
+          <a:xfrm>
+            <a:off x="872066" y="73048"/>
+            <a:ext cx="8541173" cy="414467"/>
+          </a:xfrm>
+        </p:spPr>
+        <p:txBody>
+          <a:bodyPr>
+            <a:noAutofit/>
+          </a:bodyPr>
+          <a:lstStyle/>
+          <a:p>
+            <a:r>
+              <a:rPr lang="fr-BE" sz="2800" dirty="0" err="1"/>
+              <a:t>Implemenation</a:t>
+            </a:r>
+            <a:r>
+              <a:rPr lang="fr-BE" sz="2800" dirty="0"/>
+              <a:t> </a:t>
+            </a:r>
+            <a:r>
+              <a:rPr lang="fr-BE" sz="2800" b="1" i="1" dirty="0" err="1"/>
+              <a:t>customers.sql</a:t>
+            </a:r>
+            <a:r>
+              <a:rPr lang="fr-BE" sz="2800" b="1" i="1" dirty="0"/>
+              <a:t> </a:t>
+            </a:r>
+            <a:endParaRPr lang="en-BE" sz="2800" dirty="0"/>
+          </a:p>
+        </p:txBody>
+      </p:sp>
+      <p:sp>
+        <p:nvSpPr>
+          <p:cNvPr id="8" name="TextBox 7">
+            <a:extLst>
+              <a:ext uri="{FF2B5EF4-FFF2-40B4-BE49-F238E27FC236}">
+                <a16:creationId xmlns:a16="http://schemas.microsoft.com/office/drawing/2014/main" id="{600C0921-646A-709F-4173-7E0957F0AECC}"/>
+              </a:ext>
+            </a:extLst>
+          </p:cNvPr>
+          <p:cNvSpPr txBox="1"/>
+          <p:nvPr/>
+        </p:nvSpPr>
+        <p:spPr>
+          <a:xfrm>
+            <a:off x="1540672" y="1380067"/>
+            <a:ext cx="184731" cy="430887"/>
+          </a:xfrm>
+          <a:prstGeom prst="rect">
+            <a:avLst/>
+          </a:prstGeom>
+          <a:noFill/>
+        </p:spPr>
+        <p:txBody>
+          <a:bodyPr wrap="none" rtlCol="0">
+            <a:spAutoFit/>
+          </a:bodyPr>
+          <a:lstStyle/>
+          <a:p>
+            <a:endParaRPr lang="en-GB" sz="1100" dirty="0"/>
+          </a:p>
+          <a:p>
+            <a:endParaRPr lang="en-GB" sz="1100" dirty="0"/>
+          </a:p>
+        </p:txBody>
+      </p:sp>
+      <p:sp>
+        <p:nvSpPr>
+          <p:cNvPr id="3" name="TextBox 2">
+            <a:extLst>
+              <a:ext uri="{FF2B5EF4-FFF2-40B4-BE49-F238E27FC236}">
+                <a16:creationId xmlns:a16="http://schemas.microsoft.com/office/drawing/2014/main" id="{C57E8BFE-9E98-A600-FC9C-D73FBFFF2C35}"/>
+              </a:ext>
+            </a:extLst>
+          </p:cNvPr>
+          <p:cNvSpPr txBox="1"/>
+          <p:nvPr/>
+        </p:nvSpPr>
+        <p:spPr>
+          <a:xfrm>
+            <a:off x="228600" y="518293"/>
+            <a:ext cx="11590867" cy="900246"/>
+          </a:xfrm>
+          <a:prstGeom prst="rect">
+            <a:avLst/>
+          </a:prstGeom>
+          <a:noFill/>
+        </p:spPr>
+        <p:txBody>
+          <a:bodyPr wrap="square" rtlCol="0">
+            <a:spAutoFit/>
+          </a:bodyPr>
+          <a:lstStyle/>
+          <a:p>
+            <a:r>
+              <a:rPr lang="fr-BE" sz="1050" dirty="0"/>
+              <a:t>5. In (</a:t>
+            </a:r>
+            <a:r>
+              <a:rPr lang="fr-BE" sz="1050" dirty="0" err="1"/>
+              <a:t>dbt</a:t>
+            </a:r>
+            <a:r>
+              <a:rPr lang="fr-BE" sz="1050" dirty="0"/>
+              <a:t>) </a:t>
+            </a:r>
+            <a:r>
+              <a:rPr lang="fr-BE" sz="1050" dirty="0" err="1"/>
+              <a:t>models</a:t>
+            </a:r>
+            <a:r>
+              <a:rPr lang="fr-BE" sz="1050" dirty="0"/>
+              <a:t>\</a:t>
+            </a:r>
+            <a:r>
+              <a:rPr lang="fr-BE" sz="1050" dirty="0" err="1"/>
+              <a:t>staging</a:t>
+            </a:r>
+            <a:r>
+              <a:rPr lang="fr-BE" sz="1050" dirty="0"/>
+              <a:t>\ </a:t>
+            </a:r>
+            <a:r>
+              <a:rPr lang="fr-BE" sz="1050" b="1" i="1" dirty="0" err="1"/>
+              <a:t>stg_customer</a:t>
+            </a:r>
+            <a:r>
+              <a:rPr lang="fr-BE" sz="1050" b="1" i="1" dirty="0"/>
+              <a:t>   </a:t>
+            </a:r>
+            <a:r>
+              <a:rPr lang="fr-BE" sz="1050" dirty="0" err="1"/>
+              <a:t>fabric</a:t>
+            </a:r>
+            <a:r>
+              <a:rPr lang="fr-BE" sz="1050" dirty="0"/>
+              <a:t> (bronze) </a:t>
+            </a:r>
+            <a:r>
+              <a:rPr lang="fr-BE" sz="1050" dirty="0" err="1"/>
+              <a:t>raw_customers</a:t>
+            </a:r>
+            <a:r>
+              <a:rPr lang="fr-BE" sz="1050" dirty="0"/>
+              <a:t>  </a:t>
+            </a:r>
+            <a:r>
+              <a:rPr lang="fr-BE" sz="1050" dirty="0" err="1"/>
+              <a:t>get</a:t>
+            </a:r>
+            <a:r>
+              <a:rPr lang="fr-BE" sz="1050" dirty="0"/>
+              <a:t> </a:t>
+            </a:r>
+            <a:r>
+              <a:rPr lang="fr-BE" sz="1050" dirty="0" err="1"/>
+              <a:t>transformed</a:t>
+            </a:r>
+            <a:r>
+              <a:rPr lang="fr-BE" sz="1050" dirty="0"/>
+              <a:t> </a:t>
+            </a:r>
+          </a:p>
+          <a:p>
+            <a:r>
+              <a:rPr lang="fr-BE" sz="1050" dirty="0"/>
+              <a:t>to </a:t>
+            </a:r>
+            <a:r>
+              <a:rPr lang="fr-BE" sz="1050" dirty="0" err="1"/>
+              <a:t>become</a:t>
+            </a:r>
+            <a:r>
+              <a:rPr lang="fr-BE" sz="1050" dirty="0"/>
+              <a:t>  </a:t>
+            </a:r>
+            <a:r>
+              <a:rPr lang="fr-BE" sz="1050" b="1" i="1" dirty="0" err="1"/>
+              <a:t>dbo_silver.stg_customer</a:t>
+            </a:r>
+            <a:r>
+              <a:rPr lang="fr-BE" sz="1050" b="1" i="1" dirty="0"/>
+              <a:t> </a:t>
+            </a:r>
+            <a:r>
+              <a:rPr lang="fr-BE" sz="1050" dirty="0"/>
+              <a:t>in the </a:t>
+            </a:r>
+            <a:r>
+              <a:rPr lang="fr-BE" sz="1050" dirty="0" err="1"/>
+              <a:t>dwh</a:t>
+            </a:r>
+            <a:r>
+              <a:rPr lang="fr-BE" sz="1050" dirty="0"/>
+              <a:t>. </a:t>
+            </a:r>
+          </a:p>
+          <a:p>
+            <a:endParaRPr lang="fr-BE" sz="1050" dirty="0"/>
+          </a:p>
+          <a:p>
+            <a:r>
+              <a:rPr lang="fr-BE" sz="1050" dirty="0"/>
+              <a:t>In the </a:t>
+            </a:r>
+            <a:r>
+              <a:rPr lang="fr-BE" sz="1050" dirty="0" err="1"/>
+              <a:t>staging</a:t>
+            </a:r>
+            <a:r>
+              <a:rPr lang="fr-BE" sz="1050" dirty="0"/>
+              <a:t> folder (</a:t>
+            </a:r>
+            <a:r>
+              <a:rPr lang="fr-BE" sz="1050" dirty="0" err="1"/>
+              <a:t>dbt</a:t>
+            </a:r>
+            <a:r>
+              <a:rPr lang="fr-BE" sz="1050" dirty="0"/>
+              <a:t>) , </a:t>
+            </a:r>
+            <a:r>
+              <a:rPr lang="fr-BE" sz="1050" dirty="0" err="1"/>
+              <a:t>create</a:t>
+            </a:r>
+            <a:r>
+              <a:rPr lang="fr-BE" sz="1050" dirty="0"/>
+              <a:t> a files call </a:t>
+            </a:r>
+            <a:r>
+              <a:rPr lang="fr-BE" sz="1050" b="1" i="1" dirty="0" err="1"/>
+              <a:t>customer.sql</a:t>
+            </a:r>
+            <a:r>
+              <a:rPr lang="fr-BE" sz="1050" b="1" i="1" dirty="0"/>
+              <a:t>  </a:t>
+            </a:r>
+            <a:r>
+              <a:rPr lang="fr-BE" sz="1050" dirty="0"/>
+              <a:t>(</a:t>
+            </a:r>
+            <a:r>
+              <a:rPr lang="fr-BE" sz="1050" dirty="0">
+                <a:highlight>
+                  <a:srgbClr val="FFFF00"/>
+                </a:highlight>
+              </a:rPr>
+              <a:t>the </a:t>
+            </a:r>
+            <a:r>
+              <a:rPr lang="fr-BE" sz="1050" dirty="0" err="1">
+                <a:highlight>
+                  <a:srgbClr val="FFFF00"/>
+                </a:highlight>
+              </a:rPr>
+              <a:t>same</a:t>
+            </a:r>
+            <a:r>
+              <a:rPr lang="fr-BE" sz="1050" dirty="0">
+                <a:highlight>
+                  <a:srgbClr val="FFFF00"/>
+                </a:highlight>
+              </a:rPr>
+              <a:t> process </a:t>
+            </a:r>
+            <a:r>
+              <a:rPr lang="fr-BE" sz="1050" dirty="0" err="1">
+                <a:highlight>
+                  <a:srgbClr val="FFFF00"/>
+                </a:highlight>
+              </a:rPr>
+              <a:t>is</a:t>
+            </a:r>
+            <a:r>
+              <a:rPr lang="fr-BE" sz="1050" dirty="0">
+                <a:highlight>
+                  <a:srgbClr val="FFFF00"/>
+                </a:highlight>
+              </a:rPr>
+              <a:t> all tables in the </a:t>
+            </a:r>
+            <a:r>
+              <a:rPr lang="fr-BE" sz="1050" dirty="0" err="1">
+                <a:highlight>
+                  <a:srgbClr val="FFFF00"/>
+                </a:highlight>
+              </a:rPr>
+              <a:t>datamodel</a:t>
+            </a:r>
+            <a:r>
+              <a:rPr lang="fr-BE" sz="1050" dirty="0"/>
+              <a:t>)</a:t>
+            </a:r>
+          </a:p>
+          <a:p>
+            <a:r>
+              <a:rPr lang="fr-BE" sz="1050" dirty="0"/>
+              <a:t>The </a:t>
+            </a:r>
+            <a:r>
+              <a:rPr lang="fr-BE" sz="1050" b="1" i="1" dirty="0"/>
+              <a:t>source  </a:t>
+            </a:r>
+            <a:r>
+              <a:rPr lang="fr-BE" sz="1050" dirty="0" err="1"/>
+              <a:t>is</a:t>
+            </a:r>
+            <a:r>
+              <a:rPr lang="fr-BE" sz="1050" dirty="0"/>
+              <a:t> </a:t>
+            </a:r>
+            <a:r>
+              <a:rPr lang="fr-BE" sz="1050" dirty="0" err="1"/>
+              <a:t>defined</a:t>
+            </a:r>
+            <a:r>
+              <a:rPr lang="fr-BE" sz="1050" dirty="0"/>
+              <a:t> at </a:t>
+            </a:r>
+            <a:r>
+              <a:rPr lang="fr-BE" sz="1050" b="1" i="1" dirty="0"/>
+              <a:t>section 3  , </a:t>
+            </a:r>
+            <a:r>
+              <a:rPr lang="fr-BE" sz="1050" dirty="0"/>
+              <a:t>the business </a:t>
+            </a:r>
+            <a:r>
+              <a:rPr lang="fr-BE" sz="1050" dirty="0" err="1"/>
+              <a:t>logic</a:t>
+            </a:r>
+            <a:r>
+              <a:rPr lang="fr-BE" sz="1050" dirty="0"/>
+              <a:t>  </a:t>
+            </a:r>
+            <a:r>
+              <a:rPr lang="fr-BE" sz="1050" dirty="0" err="1"/>
+              <a:t>should</a:t>
+            </a:r>
+            <a:r>
+              <a:rPr lang="fr-BE" sz="1050" dirty="0"/>
+              <a:t> </a:t>
+            </a:r>
+            <a:r>
+              <a:rPr lang="fr-BE" sz="1050" dirty="0" err="1"/>
+              <a:t>be</a:t>
+            </a:r>
+            <a:r>
+              <a:rPr lang="fr-BE" sz="1050" dirty="0"/>
+              <a:t> </a:t>
+            </a:r>
+            <a:r>
+              <a:rPr lang="fr-BE" sz="1050" dirty="0" err="1"/>
+              <a:t>aggreed</a:t>
+            </a:r>
+            <a:r>
+              <a:rPr lang="fr-BE" sz="1050" dirty="0"/>
+              <a:t> by the business </a:t>
+            </a:r>
+            <a:endParaRPr lang="en-BE" sz="1050" dirty="0"/>
+          </a:p>
+        </p:txBody>
+      </p:sp>
+      <p:pic>
+        <p:nvPicPr>
+          <p:cNvPr id="5" name="Picture 4">
+            <a:extLst>
+              <a:ext uri="{FF2B5EF4-FFF2-40B4-BE49-F238E27FC236}">
+                <a16:creationId xmlns:a16="http://schemas.microsoft.com/office/drawing/2014/main" id="{AB8C61E4-1145-97FA-2C9A-BA327AFD8814}"/>
+              </a:ext>
+            </a:extLst>
+          </p:cNvPr>
+          <p:cNvPicPr>
+            <a:picLocks noChangeAspect="1"/>
+          </p:cNvPicPr>
+          <p:nvPr/>
+        </p:nvPicPr>
+        <p:blipFill>
+          <a:blip r:embed="rId2"/>
+          <a:stretch>
+            <a:fillRect/>
+          </a:stretch>
+        </p:blipFill>
+        <p:spPr>
+          <a:xfrm>
+            <a:off x="152400" y="1686384"/>
+            <a:ext cx="5361533" cy="4214883"/>
+          </a:xfrm>
+          <a:prstGeom prst="rect">
+            <a:avLst/>
+          </a:prstGeom>
+        </p:spPr>
+      </p:pic>
+      <p:sp>
+        <p:nvSpPr>
+          <p:cNvPr id="6" name="TextBox 5">
+            <a:extLst>
+              <a:ext uri="{FF2B5EF4-FFF2-40B4-BE49-F238E27FC236}">
+                <a16:creationId xmlns:a16="http://schemas.microsoft.com/office/drawing/2014/main" id="{7118FD22-714F-946F-7322-BA0AFD1F9A1A}"/>
+              </a:ext>
+            </a:extLst>
+          </p:cNvPr>
+          <p:cNvSpPr txBox="1"/>
+          <p:nvPr/>
+        </p:nvSpPr>
+        <p:spPr>
+          <a:xfrm>
+            <a:off x="5958402" y="2832463"/>
+            <a:ext cx="5861065" cy="900246"/>
+          </a:xfrm>
+          <a:prstGeom prst="rect">
+            <a:avLst/>
+          </a:prstGeom>
+          <a:noFill/>
+        </p:spPr>
+        <p:txBody>
+          <a:bodyPr wrap="square" rtlCol="0">
+            <a:spAutoFit/>
+          </a:bodyPr>
+          <a:lstStyle/>
+          <a:p>
+            <a:r>
+              <a:rPr lang="fr-BE" sz="1050" dirty="0"/>
+              <a:t>6. Test if </a:t>
+            </a:r>
+            <a:r>
+              <a:rPr lang="fr-BE" sz="1050" dirty="0" err="1"/>
+              <a:t>it</a:t>
+            </a:r>
+            <a:r>
+              <a:rPr lang="fr-BE" sz="1050" dirty="0"/>
+              <a:t> </a:t>
+            </a:r>
+            <a:r>
+              <a:rPr lang="fr-BE" sz="1050" dirty="0" err="1"/>
+              <a:t>works</a:t>
+            </a:r>
+            <a:r>
+              <a:rPr lang="fr-BE" sz="1050" dirty="0"/>
+              <a:t>  </a:t>
+            </a:r>
+          </a:p>
+          <a:p>
+            <a:r>
+              <a:rPr lang="fr-BE" sz="1050" b="1" i="1" dirty="0">
+                <a:solidFill>
+                  <a:srgbClr val="002060"/>
+                </a:solidFill>
+              </a:rPr>
+              <a:t> </a:t>
+            </a:r>
+            <a:r>
+              <a:rPr lang="en-GB" sz="1050" b="1" i="1" dirty="0" err="1">
+                <a:solidFill>
+                  <a:srgbClr val="002060"/>
+                </a:solidFill>
+              </a:rPr>
+              <a:t>dbt</a:t>
+            </a:r>
+            <a:r>
+              <a:rPr lang="en-GB" sz="1050" b="1" i="1" dirty="0">
+                <a:solidFill>
+                  <a:srgbClr val="002060"/>
+                </a:solidFill>
+              </a:rPr>
+              <a:t> run </a:t>
+            </a:r>
+            <a:r>
+              <a:rPr lang="en-GB" sz="1050" dirty="0">
+                <a:solidFill>
+                  <a:srgbClr val="FFC000"/>
+                </a:solidFill>
+              </a:rPr>
+              <a:t>--select </a:t>
+            </a:r>
+            <a:r>
+              <a:rPr lang="en-GB" sz="1050" dirty="0" err="1">
+                <a:solidFill>
+                  <a:srgbClr val="FFC000"/>
+                </a:solidFill>
+              </a:rPr>
+              <a:t>stg_customer</a:t>
+            </a:r>
+            <a:r>
+              <a:rPr lang="en-GB" sz="1050" dirty="0">
+                <a:solidFill>
+                  <a:srgbClr val="FFC000"/>
+                </a:solidFill>
+              </a:rPr>
+              <a:t>  customer                     </a:t>
+            </a:r>
+            <a:r>
+              <a:rPr lang="en-GB" sz="1050" dirty="0">
+                <a:solidFill>
+                  <a:srgbClr val="00B050"/>
+                </a:solidFill>
+              </a:rPr>
+              <a:t>#(see table exist after crating </a:t>
+            </a:r>
+            <a:r>
+              <a:rPr lang="en-GB" sz="1050" dirty="0" err="1">
+                <a:solidFill>
+                  <a:srgbClr val="00B050"/>
+                </a:solidFill>
+              </a:rPr>
+              <a:t>sql</a:t>
+            </a:r>
+            <a:r>
+              <a:rPr lang="en-GB" sz="1050" dirty="0">
+                <a:solidFill>
+                  <a:srgbClr val="00B050"/>
+                </a:solidFill>
+              </a:rPr>
+              <a:t> file )</a:t>
+            </a:r>
+          </a:p>
+          <a:p>
+            <a:endParaRPr lang="en-GB" sz="1050" dirty="0">
+              <a:solidFill>
+                <a:srgbClr val="00B050"/>
+              </a:solidFill>
+            </a:endParaRPr>
+          </a:p>
+          <a:p>
+            <a:r>
+              <a:rPr lang="en-GB" sz="1050" dirty="0">
+                <a:solidFill>
+                  <a:srgbClr val="00B050"/>
+                </a:solidFill>
+              </a:rPr>
+              <a:t>7</a:t>
+            </a:r>
+            <a:r>
+              <a:rPr lang="en-GB" sz="1050" dirty="0"/>
+              <a:t>.Run some data quality </a:t>
+            </a:r>
+            <a:r>
+              <a:rPr lang="en-GB" sz="1050" dirty="0" err="1"/>
+              <a:t>chek</a:t>
+            </a:r>
+            <a:r>
+              <a:rPr lang="en-GB" sz="1050" dirty="0"/>
+              <a:t> using  </a:t>
+            </a:r>
+            <a:r>
+              <a:rPr lang="en-GB" sz="1050" b="1" dirty="0" err="1"/>
+              <a:t>schema.yml</a:t>
+            </a:r>
+            <a:r>
+              <a:rPr lang="en-GB" sz="1050" b="1" dirty="0"/>
+              <a:t> file  </a:t>
+            </a:r>
+            <a:endParaRPr lang="fr-BE" sz="1050" b="1" dirty="0"/>
+          </a:p>
+          <a:p>
+            <a:endParaRPr lang="en-BE" sz="1050" dirty="0"/>
+          </a:p>
+        </p:txBody>
+      </p:sp>
+    </p:spTree>
+    <p:extLst>
+      <p:ext uri="{BB962C8B-B14F-4D97-AF65-F5344CB8AC3E}">
+        <p14:creationId xmlns:p14="http://schemas.microsoft.com/office/powerpoint/2010/main" val="3537983665"/>
+      </p:ext>
+    </p:extLst>
+  </p:cSld>
+  <p:clrMapOvr>
+    <a:masterClrMapping/>
+  </p:clrMapOvr>
+</p:sld>
+</file>
+
+<file path=ppt/slides/slide2.xml><?xml version="1.0" encoding="utf-8"?>
+<p:sld xmlns:a="http://schemas.openxmlformats.org/drawingml/2006/main" xmlns:r="http://schemas.openxmlformats.org/officeDocument/2006/relationships" xmlns:p="http://schemas.openxmlformats.org/presentationml/2006/main">
+  <p:cSld>
+    <p:spTree>
+      <p:nvGrpSpPr>
+        <p:cNvPr id="1" name="">
+          <a:extLst>
+            <a:ext uri="{FF2B5EF4-FFF2-40B4-BE49-F238E27FC236}">
+              <a16:creationId xmlns:a16="http://schemas.microsoft.com/office/drawing/2014/main" id="{23D69519-1C6D-2BB9-3777-06026D874625}"/>
+            </a:ext>
+          </a:extLst>
+        </p:cNvPr>
+        <p:cNvGrpSpPr/>
+        <p:nvPr/>
+      </p:nvGrpSpPr>
+      <p:grpSpPr>
+        <a:xfrm>
+          <a:off x="0" y="0"/>
+          <a:ext cx="0" cy="0"/>
+          <a:chOff x="0" y="0"/>
+          <a:chExt cx="0" cy="0"/>
+        </a:xfrm>
+      </p:grpSpPr>
+      <p:sp>
+        <p:nvSpPr>
+          <p:cNvPr id="2" name="Title 1">
+            <a:extLst>
+              <a:ext uri="{FF2B5EF4-FFF2-40B4-BE49-F238E27FC236}">
+                <a16:creationId xmlns:a16="http://schemas.microsoft.com/office/drawing/2014/main" id="{68D1314B-7FFB-AEE2-6EE9-A7A056FB2299}"/>
+              </a:ext>
+            </a:extLst>
+          </p:cNvPr>
+          <p:cNvSpPr>
+            <a:spLocks noGrp="1"/>
+          </p:cNvSpPr>
+          <p:nvPr>
+            <p:ph type="ctrTitle"/>
+          </p:nvPr>
+        </p:nvSpPr>
+        <p:spPr>
+          <a:xfrm>
+            <a:off x="1361440" y="426719"/>
+            <a:ext cx="9144000" cy="594043"/>
+          </a:xfrm>
+        </p:spPr>
+        <p:txBody>
+          <a:bodyPr>
+            <a:normAutofit fontScale="90000"/>
+          </a:bodyPr>
+          <a:lstStyle/>
+          <a:p>
+            <a:r>
+              <a:rPr lang="en-GB" dirty="0" err="1"/>
+              <a:t>dbt</a:t>
+            </a:r>
+            <a:endParaRPr lang="en-BE" dirty="0"/>
+          </a:p>
+        </p:txBody>
+      </p:sp>
+      <p:sp>
+        <p:nvSpPr>
+          <p:cNvPr id="3" name="Subtitle 2">
+            <a:extLst>
+              <a:ext uri="{FF2B5EF4-FFF2-40B4-BE49-F238E27FC236}">
+                <a16:creationId xmlns:a16="http://schemas.microsoft.com/office/drawing/2014/main" id="{0B00B004-9B40-81F4-E1D6-D38F82FED4B0}"/>
               </a:ext>
             </a:extLst>
           </p:cNvPr>
@@ -3435,7 +4157,7 @@
           <p:cNvPr id="4" name="TextBox 3">
             <a:extLst>
               <a:ext uri="{FF2B5EF4-FFF2-40B4-BE49-F238E27FC236}">
-                <a16:creationId xmlns:a16="http://schemas.microsoft.com/office/drawing/2014/main" id="{30B735E0-6E8F-8192-8228-5ECE2A97507B}"/>
+                <a16:creationId xmlns:a16="http://schemas.microsoft.com/office/drawing/2014/main" id="{E00D2F57-A5EB-A740-9A55-C85524F6FA0D}"/>
               </a:ext>
             </a:extLst>
           </p:cNvPr>
@@ -3444,8 +4166,8 @@
         </p:nvSpPr>
         <p:spPr>
           <a:xfrm>
-            <a:off x="431798" y="1752600"/>
-            <a:ext cx="10676469" cy="2031325"/>
+            <a:off x="330198" y="1313106"/>
+            <a:ext cx="10676469" cy="2246769"/>
           </a:xfrm>
           <a:prstGeom prst="rect">
             <a:avLst/>
@@ -3645,7 +4367,9 @@
               <a:rPr lang="en-GB" sz="1400" dirty="0"/>
               <a:t>.</a:t>
             </a:r>
-            <a:endParaRPr lang="en-BE" sz="1400" dirty="0"/>
+          </a:p>
+          <a:p>
+            <a:endParaRPr lang="en-GB" sz="1400" dirty="0"/>
           </a:p>
         </p:txBody>
       </p:sp>
@@ -3654,7 +4378,7 @@
           <p:cNvPr id="6" name="Picture 5">
             <a:extLst>
               <a:ext uri="{FF2B5EF4-FFF2-40B4-BE49-F238E27FC236}">
-                <a16:creationId xmlns:a16="http://schemas.microsoft.com/office/drawing/2014/main" id="{CCB8DC79-5370-3637-8414-9FF328B64C77}"/>
+                <a16:creationId xmlns:a16="http://schemas.microsoft.com/office/drawing/2014/main" id="{49675BAF-E9B1-2135-E982-6CC39520A834}"/>
               </a:ext>
             </a:extLst>
           </p:cNvPr>
@@ -3684,7 +4408,7 @@
           <p:cNvPr id="8" name="Picture 7">
             <a:extLst>
               <a:ext uri="{FF2B5EF4-FFF2-40B4-BE49-F238E27FC236}">
-                <a16:creationId xmlns:a16="http://schemas.microsoft.com/office/drawing/2014/main" id="{7029D8F6-D241-3C64-2218-984531D8A0F4}"/>
+                <a16:creationId xmlns:a16="http://schemas.microsoft.com/office/drawing/2014/main" id="{AB07AD10-E330-8B10-9A0A-5758711B9DD9}"/>
               </a:ext>
             </a:extLst>
           </p:cNvPr>
@@ -3714,7 +4438,7 @@
           <p:cNvPr id="7" name="Picture 6">
             <a:extLst>
               <a:ext uri="{FF2B5EF4-FFF2-40B4-BE49-F238E27FC236}">
-                <a16:creationId xmlns:a16="http://schemas.microsoft.com/office/drawing/2014/main" id="{08E0D376-6757-8C3C-D879-DD62098F29D3}"/>
+                <a16:creationId xmlns:a16="http://schemas.microsoft.com/office/drawing/2014/main" id="{F5DCEB1D-6CDF-0178-7A4B-06DB5DB7A46F}"/>
               </a:ext>
             </a:extLst>
           </p:cNvPr>
@@ -3742,7 +4466,7 @@
     </p:spTree>
     <p:extLst>
       <p:ext uri="{BB962C8B-B14F-4D97-AF65-F5344CB8AC3E}">
-        <p14:creationId xmlns:p14="http://schemas.microsoft.com/office/powerpoint/2010/main" val="1296687254"/>
+        <p14:creationId xmlns:p14="http://schemas.microsoft.com/office/powerpoint/2010/main" val="3240441969"/>
       </p:ext>
     </p:extLst>
   </p:cSld>
@@ -3752,7 +4476,7 @@
 </p:sld>
 </file>
 
-<file path=ppt/slides/slide2.xml><?xml version="1.0" encoding="utf-8"?>
+<file path=ppt/slides/slide3.xml><?xml version="1.0" encoding="utf-8"?>
 <p:sld xmlns:a="http://schemas.openxmlformats.org/drawingml/2006/main" xmlns:r="http://schemas.openxmlformats.org/officeDocument/2006/relationships" xmlns:p="http://schemas.openxmlformats.org/presentationml/2006/main">
   <p:cSld>
     <p:spTree>
@@ -4765,7 +5489,7 @@
 </p:sld>
 </file>
 
-<file path=ppt/slides/slide3.xml><?xml version="1.0" encoding="utf-8"?>
+<file path=ppt/slides/slide4.xml><?xml version="1.0" encoding="utf-8"?>
 <p:sld xmlns:a="http://schemas.openxmlformats.org/drawingml/2006/main" xmlns:r="http://schemas.openxmlformats.org/officeDocument/2006/relationships" xmlns:p="http://schemas.openxmlformats.org/presentationml/2006/main">
   <p:cSld>
     <p:spTree>
@@ -5374,7 +6098,7 @@
 </p:sld>
 </file>
 
-<file path=ppt/slides/slide4.xml><?xml version="1.0" encoding="utf-8"?>
+<file path=ppt/slides/slide5.xml><?xml version="1.0" encoding="utf-8"?>
 <p:sld xmlns:a="http://schemas.openxmlformats.org/drawingml/2006/main" xmlns:r="http://schemas.openxmlformats.org/officeDocument/2006/relationships" xmlns:p="http://schemas.openxmlformats.org/presentationml/2006/main">
   <p:cSld>
     <p:spTree>
@@ -5915,7 +6639,7 @@
 </p:sld>
 </file>
 
-<file path=ppt/slides/slide5.xml><?xml version="1.0" encoding="utf-8"?>
+<file path=ppt/slides/slide6.xml><?xml version="1.0" encoding="utf-8"?>
 <p:sld xmlns:a="http://schemas.openxmlformats.org/drawingml/2006/main" xmlns:r="http://schemas.openxmlformats.org/officeDocument/2006/relationships" xmlns:p="http://schemas.openxmlformats.org/presentationml/2006/main">
   <p:cSld>
     <p:spTree>
@@ -6421,6 +7145,1941 @@
     <p:extLst>
       <p:ext uri="{BB962C8B-B14F-4D97-AF65-F5344CB8AC3E}">
         <p14:creationId xmlns:p14="http://schemas.microsoft.com/office/powerpoint/2010/main" val="2004096513"/>
+      </p:ext>
+    </p:extLst>
+  </p:cSld>
+  <p:clrMapOvr>
+    <a:masterClrMapping/>
+  </p:clrMapOvr>
+</p:sld>
+</file>
+
+<file path=ppt/slides/slide7.xml><?xml version="1.0" encoding="utf-8"?>
+<p:sld xmlns:a="http://schemas.openxmlformats.org/drawingml/2006/main" xmlns:r="http://schemas.openxmlformats.org/officeDocument/2006/relationships" xmlns:p="http://schemas.openxmlformats.org/presentationml/2006/main">
+  <p:cSld>
+    <p:spTree>
+      <p:nvGrpSpPr>
+        <p:cNvPr id="1" name="">
+          <a:extLst>
+            <a:ext uri="{FF2B5EF4-FFF2-40B4-BE49-F238E27FC236}">
+              <a16:creationId xmlns:a16="http://schemas.microsoft.com/office/drawing/2014/main" id="{3D4CDE27-C4EC-1533-6F3C-FB3C7D509083}"/>
+            </a:ext>
+          </a:extLst>
+        </p:cNvPr>
+        <p:cNvGrpSpPr/>
+        <p:nvPr/>
+      </p:nvGrpSpPr>
+      <p:grpSpPr>
+        <a:xfrm>
+          <a:off x="0" y="0"/>
+          <a:ext cx="0" cy="0"/>
+          <a:chOff x="0" y="0"/>
+          <a:chExt cx="0" cy="0"/>
+        </a:xfrm>
+      </p:grpSpPr>
+      <p:sp>
+        <p:nvSpPr>
+          <p:cNvPr id="2" name="Title 1">
+            <a:extLst>
+              <a:ext uri="{FF2B5EF4-FFF2-40B4-BE49-F238E27FC236}">
+                <a16:creationId xmlns:a16="http://schemas.microsoft.com/office/drawing/2014/main" id="{6E62BAF8-2BA3-F9B8-45C5-58E234EB0F8F}"/>
+              </a:ext>
+            </a:extLst>
+          </p:cNvPr>
+          <p:cNvSpPr>
+            <a:spLocks noGrp="1"/>
+          </p:cNvSpPr>
+          <p:nvPr>
+            <p:ph type="ctrTitle"/>
+          </p:nvPr>
+        </p:nvSpPr>
+        <p:spPr>
+          <a:xfrm>
+            <a:off x="872066" y="186101"/>
+            <a:ext cx="8541173" cy="301414"/>
+          </a:xfrm>
+        </p:spPr>
+        <p:txBody>
+          <a:bodyPr>
+            <a:noAutofit/>
+          </a:bodyPr>
+          <a:lstStyle/>
+          <a:p>
+            <a:r>
+              <a:rPr lang="fr-BE" sz="2800" dirty="0"/>
+              <a:t>Use </a:t>
+            </a:r>
+            <a:r>
+              <a:rPr lang="fr-BE" sz="2800" dirty="0" err="1"/>
+              <a:t>dbt</a:t>
+            </a:r>
+            <a:r>
+              <a:rPr lang="fr-BE" sz="2800" dirty="0"/>
+              <a:t> </a:t>
+            </a:r>
+            <a:r>
+              <a:rPr lang="fr-BE" sz="2800" dirty="0" err="1"/>
+              <a:t>project</a:t>
+            </a:r>
+            <a:r>
+              <a:rPr lang="fr-BE" sz="2800" dirty="0"/>
+              <a:t> and </a:t>
+            </a:r>
+            <a:r>
+              <a:rPr lang="fr-BE" sz="2800" dirty="0" err="1"/>
+              <a:t>venv</a:t>
+            </a:r>
+            <a:r>
+              <a:rPr lang="fr-BE" sz="2800" dirty="0"/>
+              <a:t> </a:t>
+            </a:r>
+            <a:r>
+              <a:rPr lang="fr-BE" sz="2800" dirty="0" err="1"/>
+              <a:t>exists</a:t>
+            </a:r>
+            <a:endParaRPr lang="en-BE" sz="2800" dirty="0"/>
+          </a:p>
+        </p:txBody>
+      </p:sp>
+      <p:sp>
+        <p:nvSpPr>
+          <p:cNvPr id="8" name="TextBox 7">
+            <a:extLst>
+              <a:ext uri="{FF2B5EF4-FFF2-40B4-BE49-F238E27FC236}">
+                <a16:creationId xmlns:a16="http://schemas.microsoft.com/office/drawing/2014/main" id="{AB04152C-3A65-4D76-CB7C-7FEF7FE4B30F}"/>
+              </a:ext>
+            </a:extLst>
+          </p:cNvPr>
+          <p:cNvSpPr txBox="1"/>
+          <p:nvPr/>
+        </p:nvSpPr>
+        <p:spPr>
+          <a:xfrm>
+            <a:off x="1540672" y="1380067"/>
+            <a:ext cx="184731" cy="430887"/>
+          </a:xfrm>
+          <a:prstGeom prst="rect">
+            <a:avLst/>
+          </a:prstGeom>
+          <a:noFill/>
+        </p:spPr>
+        <p:txBody>
+          <a:bodyPr wrap="none" rtlCol="0">
+            <a:spAutoFit/>
+          </a:bodyPr>
+          <a:lstStyle/>
+          <a:p>
+            <a:endParaRPr lang="en-GB" sz="1100" dirty="0"/>
+          </a:p>
+          <a:p>
+            <a:endParaRPr lang="en-GB" sz="1100" dirty="0"/>
+          </a:p>
+        </p:txBody>
+      </p:sp>
+      <p:sp>
+        <p:nvSpPr>
+          <p:cNvPr id="5" name="TextBox 4">
+            <a:extLst>
+              <a:ext uri="{FF2B5EF4-FFF2-40B4-BE49-F238E27FC236}">
+                <a16:creationId xmlns:a16="http://schemas.microsoft.com/office/drawing/2014/main" id="{091947FF-CB07-E088-43F4-E31697E1DB79}"/>
+              </a:ext>
+            </a:extLst>
+          </p:cNvPr>
+          <p:cNvSpPr txBox="1"/>
+          <p:nvPr/>
+        </p:nvSpPr>
+        <p:spPr>
+          <a:xfrm>
+            <a:off x="110067" y="736600"/>
+            <a:ext cx="11366499" cy="4339650"/>
+          </a:xfrm>
+          <a:prstGeom prst="rect">
+            <a:avLst/>
+          </a:prstGeom>
+          <a:noFill/>
+        </p:spPr>
+        <p:txBody>
+          <a:bodyPr wrap="square" rtlCol="0">
+            <a:spAutoFit/>
+          </a:bodyPr>
+          <a:lstStyle/>
+          <a:p>
+            <a:pPr marL="228600" indent="-228600">
+              <a:buFont typeface="+mj-lt"/>
+              <a:buAutoNum type="arabicPeriod"/>
+            </a:pPr>
+            <a:r>
+              <a:rPr lang="fr-BE" sz="1200" dirty="0"/>
+              <a:t>Start </a:t>
+            </a:r>
+            <a:r>
+              <a:rPr lang="fr-BE" sz="1200" dirty="0" err="1"/>
+              <a:t>Venv</a:t>
+            </a:r>
+            <a:r>
+              <a:rPr lang="fr-BE" sz="1200" dirty="0"/>
+              <a:t> :   </a:t>
+            </a:r>
+            <a:r>
+              <a:rPr lang="fr-BE" sz="1200" dirty="0" err="1"/>
+              <a:t>from</a:t>
+            </a:r>
+            <a:r>
+              <a:rPr lang="fr-BE" sz="1200" dirty="0"/>
+              <a:t> the top </a:t>
+            </a:r>
+            <a:r>
+              <a:rPr lang="fr-BE" sz="1200" dirty="0" err="1"/>
+              <a:t>project</a:t>
+            </a:r>
+            <a:r>
+              <a:rPr lang="fr-BE" sz="1200" dirty="0"/>
+              <a:t> run the </a:t>
+            </a:r>
+            <a:r>
+              <a:rPr lang="fr-BE" sz="1200" dirty="0" err="1"/>
+              <a:t>following</a:t>
+            </a:r>
+            <a:r>
+              <a:rPr lang="fr-BE" sz="1200" dirty="0"/>
+              <a:t> :</a:t>
+            </a:r>
+          </a:p>
+          <a:p>
+            <a:r>
+              <a:rPr lang="fr-BE" sz="1200" dirty="0"/>
+              <a:t>  </a:t>
+            </a:r>
+            <a:r>
+              <a:rPr lang="fr-BE" sz="1100" i="1" dirty="0">
+                <a:solidFill>
+                  <a:srgbClr val="FFC000"/>
+                </a:solidFill>
+              </a:rPr>
+              <a:t>&amp;</a:t>
+            </a:r>
+            <a:r>
+              <a:rPr lang="fr-BE" sz="1200" dirty="0"/>
+              <a:t> </a:t>
+            </a:r>
+            <a:r>
+              <a:rPr lang="fr-BE" sz="1100" i="1" dirty="0">
+                <a:solidFill>
+                  <a:srgbClr val="0070C0"/>
+                </a:solidFill>
+              </a:rPr>
+              <a:t>"c:/Users/oumar.coulibaly/Documents/VS Code Workspace/DBT-</a:t>
+            </a:r>
+            <a:r>
+              <a:rPr lang="fr-BE" sz="1100" i="1" dirty="0" err="1">
+                <a:solidFill>
+                  <a:srgbClr val="0070C0"/>
+                </a:solidFill>
+              </a:rPr>
+              <a:t>frechCart</a:t>
+            </a:r>
+            <a:r>
+              <a:rPr lang="fr-BE" sz="1100" i="1" dirty="0">
+                <a:solidFill>
+                  <a:srgbClr val="0070C0"/>
+                </a:solidFill>
+              </a:rPr>
+              <a:t>/</a:t>
+            </a:r>
+            <a:r>
+              <a:rPr lang="fr-BE" sz="1100" i="1" dirty="0" err="1">
+                <a:solidFill>
+                  <a:srgbClr val="0070C0"/>
+                </a:solidFill>
+              </a:rPr>
+              <a:t>dbt-env</a:t>
+            </a:r>
+            <a:r>
+              <a:rPr lang="fr-BE" sz="1100" i="1" dirty="0">
+                <a:solidFill>
+                  <a:srgbClr val="0070C0"/>
+                </a:solidFill>
+              </a:rPr>
+              <a:t>/Scripts/Activate.ps1"</a:t>
+            </a:r>
+            <a:r>
+              <a:rPr lang="fr-BE" sz="1200" dirty="0"/>
+              <a:t>   </a:t>
+            </a:r>
+          </a:p>
+          <a:p>
+            <a:endParaRPr lang="fr-BE" sz="1200" dirty="0"/>
+          </a:p>
+          <a:p>
+            <a:endParaRPr lang="fr-BE" sz="1200" dirty="0"/>
+          </a:p>
+          <a:p>
+            <a:endParaRPr lang="fr-BE" sz="1200" dirty="0"/>
+          </a:p>
+          <a:p>
+            <a:endParaRPr lang="fr-BE" sz="1200" dirty="0"/>
+          </a:p>
+          <a:p>
+            <a:endParaRPr lang="fr-BE" sz="1200" dirty="0"/>
+          </a:p>
+          <a:p>
+            <a:endParaRPr lang="fr-BE" sz="1200" dirty="0"/>
+          </a:p>
+          <a:p>
+            <a:endParaRPr lang="fr-BE" sz="1200" dirty="0"/>
+          </a:p>
+          <a:p>
+            <a:endParaRPr lang="fr-BE" sz="1200" dirty="0"/>
+          </a:p>
+          <a:p>
+            <a:endParaRPr lang="fr-BE" sz="1200" dirty="0"/>
+          </a:p>
+          <a:p>
+            <a:r>
+              <a:rPr lang="fr-BE" sz="1200" dirty="0"/>
+              <a:t>2.   </a:t>
+            </a:r>
+            <a:r>
+              <a:rPr lang="fr-BE" sz="1200" dirty="0" err="1"/>
+              <a:t>Authentication</a:t>
+            </a:r>
+            <a:r>
+              <a:rPr lang="fr-BE" sz="1200" dirty="0"/>
+              <a:t>  to </a:t>
+            </a:r>
+            <a:r>
+              <a:rPr lang="fr-BE" sz="1200" dirty="0" err="1"/>
+              <a:t>you</a:t>
+            </a:r>
+            <a:r>
+              <a:rPr lang="fr-BE" sz="1200" dirty="0"/>
+              <a:t> </a:t>
+            </a:r>
+            <a:r>
+              <a:rPr lang="fr-BE" sz="1200" dirty="0" err="1"/>
+              <a:t>fabric</a:t>
+            </a:r>
+            <a:r>
+              <a:rPr lang="fr-BE" sz="1200" dirty="0"/>
+              <a:t> : </a:t>
+            </a:r>
+          </a:p>
+          <a:p>
+            <a:r>
+              <a:rPr lang="fr-BE" sz="1200" i="1" dirty="0" err="1">
+                <a:solidFill>
+                  <a:srgbClr val="0070C0"/>
+                </a:solidFill>
+              </a:rPr>
+              <a:t>Get</a:t>
+            </a:r>
+            <a:r>
+              <a:rPr lang="fr-BE" sz="1200" i="1" dirty="0">
+                <a:solidFill>
+                  <a:srgbClr val="0070C0"/>
+                </a:solidFill>
+              </a:rPr>
+              <a:t>-Content .</a:t>
+            </a:r>
+            <a:r>
+              <a:rPr lang="fr-BE" sz="1200" i="1" dirty="0" err="1">
+                <a:solidFill>
+                  <a:srgbClr val="0070C0"/>
+                </a:solidFill>
+              </a:rPr>
+              <a:t>env</a:t>
+            </a:r>
+            <a:r>
+              <a:rPr lang="fr-BE" sz="1200" i="1" dirty="0">
+                <a:solidFill>
+                  <a:srgbClr val="0070C0"/>
+                </a:solidFill>
+              </a:rPr>
+              <a:t> | </a:t>
+            </a:r>
+            <a:r>
+              <a:rPr lang="fr-BE" sz="1200" i="1" dirty="0" err="1">
+                <a:solidFill>
+                  <a:srgbClr val="0070C0"/>
+                </a:solidFill>
+              </a:rPr>
+              <a:t>ForEach</a:t>
+            </a:r>
+            <a:r>
+              <a:rPr lang="fr-BE" sz="1200" i="1" dirty="0">
+                <a:solidFill>
+                  <a:srgbClr val="0070C0"/>
+                </a:solidFill>
+              </a:rPr>
+              <a:t>-Object {</a:t>
+            </a:r>
+          </a:p>
+          <a:p>
+            <a:r>
+              <a:rPr lang="fr-BE" sz="1200" i="1" dirty="0">
+                <a:solidFill>
+                  <a:srgbClr val="0070C0"/>
+                </a:solidFill>
+              </a:rPr>
+              <a:t>    if ($_ -match "^(.*?)=(.*)$") {</a:t>
+            </a:r>
+          </a:p>
+          <a:p>
+            <a:r>
+              <a:rPr lang="fr-BE" sz="1200" i="1" dirty="0">
+                <a:solidFill>
+                  <a:srgbClr val="0070C0"/>
+                </a:solidFill>
+              </a:rPr>
+              <a:t>        [</a:t>
+            </a:r>
+            <a:r>
+              <a:rPr lang="fr-BE" sz="1200" i="1" dirty="0" err="1">
+                <a:solidFill>
+                  <a:srgbClr val="0070C0"/>
+                </a:solidFill>
+              </a:rPr>
+              <a:t>System.Environment</a:t>
+            </a:r>
+            <a:r>
+              <a:rPr lang="fr-BE" sz="1200" i="1" dirty="0">
+                <a:solidFill>
+                  <a:srgbClr val="0070C0"/>
+                </a:solidFill>
+              </a:rPr>
+              <a:t>]::</a:t>
+            </a:r>
+            <a:r>
+              <a:rPr lang="fr-BE" sz="1200" i="1" dirty="0" err="1">
+                <a:solidFill>
+                  <a:srgbClr val="0070C0"/>
+                </a:solidFill>
+              </a:rPr>
+              <a:t>SetEnvironmentVariable</a:t>
+            </a:r>
+            <a:r>
+              <a:rPr lang="fr-BE" sz="1200" i="1" dirty="0">
+                <a:solidFill>
+                  <a:srgbClr val="0070C0"/>
+                </a:solidFill>
+              </a:rPr>
+              <a:t>($matches[1], $matches[2], "Process")</a:t>
+            </a:r>
+          </a:p>
+          <a:p>
+            <a:r>
+              <a:rPr lang="fr-BE" sz="1200" i="1" dirty="0">
+                <a:solidFill>
+                  <a:srgbClr val="0070C0"/>
+                </a:solidFill>
+              </a:rPr>
+              <a:t>    }</a:t>
+            </a:r>
+          </a:p>
+          <a:p>
+            <a:r>
+              <a:rPr lang="fr-BE" sz="1200" i="1" dirty="0">
+                <a:solidFill>
+                  <a:srgbClr val="0070C0"/>
+                </a:solidFill>
+              </a:rPr>
+              <a:t>}</a:t>
+            </a:r>
+          </a:p>
+          <a:p>
+            <a:endParaRPr lang="fr-BE" sz="1200" i="1" dirty="0">
+              <a:solidFill>
+                <a:srgbClr val="0070C0"/>
+              </a:solidFill>
+            </a:endParaRPr>
+          </a:p>
+          <a:p>
+            <a:r>
+              <a:rPr lang="en-GB" sz="1200" dirty="0">
+                <a:solidFill>
+                  <a:srgbClr val="00B050"/>
+                </a:solidFill>
+              </a:rPr>
+              <a:t>3. </a:t>
+            </a:r>
+            <a:r>
+              <a:rPr lang="en-GB" sz="1200" b="1" i="1" dirty="0" err="1">
+                <a:solidFill>
+                  <a:srgbClr val="002060"/>
+                </a:solidFill>
+              </a:rPr>
+              <a:t>dbt</a:t>
+            </a:r>
+            <a:r>
+              <a:rPr lang="en-GB" sz="1200" b="1" i="1" dirty="0">
+                <a:solidFill>
+                  <a:srgbClr val="002060"/>
+                </a:solidFill>
+              </a:rPr>
+              <a:t> run </a:t>
+            </a:r>
+            <a:r>
+              <a:rPr lang="en-GB" sz="1200" dirty="0">
+                <a:solidFill>
+                  <a:srgbClr val="FFC000"/>
+                </a:solidFill>
+              </a:rPr>
+              <a:t>--select </a:t>
+            </a:r>
+            <a:r>
+              <a:rPr lang="en-GB" sz="1200" dirty="0" err="1">
+                <a:solidFill>
+                  <a:srgbClr val="FFC000"/>
+                </a:solidFill>
+              </a:rPr>
+              <a:t>dim_customer</a:t>
+            </a:r>
+            <a:r>
+              <a:rPr lang="en-GB" sz="1200" dirty="0">
+                <a:solidFill>
+                  <a:srgbClr val="FFC000"/>
+                </a:solidFill>
+              </a:rPr>
+              <a:t>                     </a:t>
+            </a:r>
+            <a:r>
+              <a:rPr lang="en-GB" sz="1200" dirty="0">
+                <a:solidFill>
+                  <a:srgbClr val="00B050"/>
+                </a:solidFill>
+              </a:rPr>
+              <a:t>#(see table exist after crating </a:t>
+            </a:r>
+            <a:r>
+              <a:rPr lang="en-GB" sz="1200" dirty="0" err="1">
+                <a:solidFill>
+                  <a:srgbClr val="00B050"/>
+                </a:solidFill>
+              </a:rPr>
+              <a:t>sql</a:t>
+            </a:r>
+            <a:r>
+              <a:rPr lang="en-GB" sz="1200" dirty="0">
+                <a:solidFill>
+                  <a:srgbClr val="00B050"/>
+                </a:solidFill>
+              </a:rPr>
+              <a:t> file )</a:t>
+            </a:r>
+            <a:endParaRPr lang="fr-BE" sz="1200" dirty="0"/>
+          </a:p>
+          <a:p>
+            <a:r>
+              <a:rPr lang="fr-BE" sz="1200" dirty="0"/>
+              <a:t>4. </a:t>
+            </a:r>
+            <a:r>
+              <a:rPr lang="en-GB" sz="1200" b="1" i="1" dirty="0" err="1">
+                <a:solidFill>
+                  <a:srgbClr val="002060"/>
+                </a:solidFill>
+              </a:rPr>
+              <a:t>dbt</a:t>
+            </a:r>
+            <a:r>
+              <a:rPr lang="en-GB" sz="1200" b="1" i="1" dirty="0">
+                <a:solidFill>
+                  <a:srgbClr val="002060"/>
+                </a:solidFill>
+              </a:rPr>
+              <a:t> show </a:t>
+            </a:r>
+            <a:r>
+              <a:rPr lang="en-GB" sz="1200" dirty="0">
+                <a:solidFill>
+                  <a:srgbClr val="FFC000"/>
+                </a:solidFill>
+              </a:rPr>
+              <a:t>--select </a:t>
+            </a:r>
+            <a:r>
+              <a:rPr lang="en-GB" sz="1200" dirty="0" err="1">
+                <a:solidFill>
+                  <a:srgbClr val="FFC000"/>
+                </a:solidFill>
+              </a:rPr>
+              <a:t>stg_customers</a:t>
+            </a:r>
+            <a:r>
+              <a:rPr lang="en-GB" sz="1200" dirty="0">
+                <a:solidFill>
+                  <a:srgbClr val="FFC000"/>
+                </a:solidFill>
+              </a:rPr>
+              <a:t>                         </a:t>
+            </a:r>
+            <a:r>
+              <a:rPr lang="en-GB" sz="1200" dirty="0">
+                <a:solidFill>
+                  <a:srgbClr val="00B050"/>
+                </a:solidFill>
+              </a:rPr>
+              <a:t>#(see table values)</a:t>
+            </a:r>
+            <a:endParaRPr lang="fr-BE" sz="1200" dirty="0">
+              <a:solidFill>
+                <a:srgbClr val="00B050"/>
+              </a:solidFill>
+            </a:endParaRPr>
+          </a:p>
+          <a:p>
+            <a:r>
+              <a:rPr lang="fr-BE" sz="1200" dirty="0"/>
+              <a:t>5. </a:t>
+            </a:r>
+            <a:r>
+              <a:rPr lang="en-GB" sz="1200" b="1" i="1" dirty="0" err="1">
+                <a:solidFill>
+                  <a:srgbClr val="002060"/>
+                </a:solidFill>
+              </a:rPr>
+              <a:t>dbt</a:t>
+            </a:r>
+            <a:r>
+              <a:rPr lang="en-GB" sz="1200" b="1" i="1" dirty="0">
+                <a:solidFill>
+                  <a:srgbClr val="002060"/>
+                </a:solidFill>
+              </a:rPr>
+              <a:t> test </a:t>
+            </a:r>
+            <a:r>
+              <a:rPr lang="en-GB" sz="1200" i="1" dirty="0">
+                <a:solidFill>
+                  <a:srgbClr val="FFC000"/>
+                </a:solidFill>
+              </a:rPr>
+              <a:t>--select </a:t>
+            </a:r>
+            <a:r>
+              <a:rPr lang="en-GB" sz="1200" i="1" dirty="0" err="1">
+                <a:solidFill>
+                  <a:srgbClr val="FFC000"/>
+                </a:solidFill>
+              </a:rPr>
+              <a:t>stg_customers</a:t>
+            </a:r>
+            <a:r>
+              <a:rPr lang="en-GB" sz="1200" i="1" dirty="0">
+                <a:solidFill>
+                  <a:srgbClr val="FFC000"/>
+                </a:solidFill>
+              </a:rPr>
+              <a:t> </a:t>
+            </a:r>
+            <a:r>
+              <a:rPr lang="en-GB" sz="1200" i="1" dirty="0" err="1">
+                <a:solidFill>
+                  <a:srgbClr val="FFC000"/>
+                </a:solidFill>
+              </a:rPr>
+              <a:t>stg_sales</a:t>
+            </a:r>
+            <a:r>
+              <a:rPr lang="en-GB" sz="1200" i="1" dirty="0">
+                <a:solidFill>
+                  <a:srgbClr val="FFC000"/>
+                </a:solidFill>
+              </a:rPr>
+              <a:t>    </a:t>
+            </a:r>
+            <a:r>
+              <a:rPr lang="en-GB" sz="1200" dirty="0">
+                <a:solidFill>
+                  <a:srgbClr val="00B050"/>
+                </a:solidFill>
+              </a:rPr>
+              <a:t>#(run some test on </a:t>
+            </a:r>
+            <a:r>
+              <a:rPr lang="en-GB" sz="1200" dirty="0" err="1">
+                <a:solidFill>
+                  <a:srgbClr val="00B050"/>
+                </a:solidFill>
+              </a:rPr>
+              <a:t>stg_customer</a:t>
+            </a:r>
+            <a:r>
+              <a:rPr lang="en-GB" sz="1200" dirty="0">
+                <a:solidFill>
+                  <a:srgbClr val="00B050"/>
+                </a:solidFill>
+              </a:rPr>
+              <a:t> and </a:t>
+            </a:r>
+            <a:r>
+              <a:rPr lang="en-GB" sz="1200" dirty="0" err="1">
+                <a:solidFill>
+                  <a:srgbClr val="00B050"/>
+                </a:solidFill>
+              </a:rPr>
+              <a:t>stg_sales</a:t>
+            </a:r>
+            <a:r>
+              <a:rPr lang="en-GB" sz="1200" dirty="0">
+                <a:solidFill>
+                  <a:srgbClr val="00B050"/>
+                </a:solidFill>
+              </a:rPr>
+              <a:t>  see staging/</a:t>
+            </a:r>
+            <a:r>
+              <a:rPr lang="en-GB" sz="1200" b="1" i="1" dirty="0" err="1">
+                <a:solidFill>
+                  <a:srgbClr val="00B050"/>
+                </a:solidFill>
+              </a:rPr>
+              <a:t>schema.yml</a:t>
+            </a:r>
+            <a:r>
+              <a:rPr lang="en-GB" sz="1200" b="1" i="1" dirty="0">
+                <a:solidFill>
+                  <a:srgbClr val="00B050"/>
+                </a:solidFill>
+              </a:rPr>
+              <a:t> </a:t>
+            </a:r>
+            <a:r>
+              <a:rPr lang="en-GB" sz="1200" dirty="0">
+                <a:solidFill>
+                  <a:srgbClr val="00B050"/>
+                </a:solidFill>
+              </a:rPr>
+              <a:t>)</a:t>
+            </a:r>
+          </a:p>
+          <a:p>
+            <a:endParaRPr lang="fr-BE" sz="1200" i="1" dirty="0">
+              <a:solidFill>
+                <a:srgbClr val="FFC000"/>
+              </a:solidFill>
+            </a:endParaRPr>
+          </a:p>
+          <a:p>
+            <a:pPr marL="228600" indent="-228600">
+              <a:buFont typeface="+mj-lt"/>
+              <a:buAutoNum type="arabicPeriod"/>
+            </a:pPr>
+            <a:endParaRPr lang="en-BE" sz="1200" dirty="0"/>
+          </a:p>
+        </p:txBody>
+      </p:sp>
+      <p:pic>
+        <p:nvPicPr>
+          <p:cNvPr id="6" name="Picture 5">
+            <a:extLst>
+              <a:ext uri="{FF2B5EF4-FFF2-40B4-BE49-F238E27FC236}">
+                <a16:creationId xmlns:a16="http://schemas.microsoft.com/office/drawing/2014/main" id="{38380D39-BF29-C78F-553F-E1C2EADFF441}"/>
+              </a:ext>
+            </a:extLst>
+          </p:cNvPr>
+          <p:cNvPicPr>
+            <a:picLocks noChangeAspect="1"/>
+          </p:cNvPicPr>
+          <p:nvPr/>
+        </p:nvPicPr>
+        <p:blipFill>
+          <a:blip r:embed="rId2"/>
+          <a:stretch>
+            <a:fillRect/>
+          </a:stretch>
+        </p:blipFill>
+        <p:spPr>
+          <a:xfrm>
+            <a:off x="208274" y="1316166"/>
+            <a:ext cx="9868755" cy="1158340"/>
+          </a:xfrm>
+          <a:prstGeom prst="rect">
+            <a:avLst/>
+          </a:prstGeom>
+        </p:spPr>
+      </p:pic>
+    </p:spTree>
+    <p:extLst>
+      <p:ext uri="{BB962C8B-B14F-4D97-AF65-F5344CB8AC3E}">
+        <p14:creationId xmlns:p14="http://schemas.microsoft.com/office/powerpoint/2010/main" val="3779960817"/>
+      </p:ext>
+    </p:extLst>
+  </p:cSld>
+  <p:clrMapOvr>
+    <a:masterClrMapping/>
+  </p:clrMapOvr>
+</p:sld>
+</file>
+
+<file path=ppt/slides/slide8.xml><?xml version="1.0" encoding="utf-8"?>
+<p:sld xmlns:a="http://schemas.openxmlformats.org/drawingml/2006/main" xmlns:r="http://schemas.openxmlformats.org/officeDocument/2006/relationships" xmlns:p="http://schemas.openxmlformats.org/presentationml/2006/main">
+  <p:cSld>
+    <p:spTree>
+      <p:nvGrpSpPr>
+        <p:cNvPr id="1" name="">
+          <a:extLst>
+            <a:ext uri="{FF2B5EF4-FFF2-40B4-BE49-F238E27FC236}">
+              <a16:creationId xmlns:a16="http://schemas.microsoft.com/office/drawing/2014/main" id="{C0723577-00B2-BA70-99A8-465EB8897AA2}"/>
+            </a:ext>
+          </a:extLst>
+        </p:cNvPr>
+        <p:cNvGrpSpPr/>
+        <p:nvPr/>
+      </p:nvGrpSpPr>
+      <p:grpSpPr>
+        <a:xfrm>
+          <a:off x="0" y="0"/>
+          <a:ext cx="0" cy="0"/>
+          <a:chOff x="0" y="0"/>
+          <a:chExt cx="0" cy="0"/>
+        </a:xfrm>
+      </p:grpSpPr>
+      <p:sp>
+        <p:nvSpPr>
+          <p:cNvPr id="2" name="Title 1">
+            <a:extLst>
+              <a:ext uri="{FF2B5EF4-FFF2-40B4-BE49-F238E27FC236}">
+                <a16:creationId xmlns:a16="http://schemas.microsoft.com/office/drawing/2014/main" id="{55412DF8-E6AD-6488-88FB-69D55F60B3C7}"/>
+              </a:ext>
+            </a:extLst>
+          </p:cNvPr>
+          <p:cNvSpPr>
+            <a:spLocks noGrp="1"/>
+          </p:cNvSpPr>
+          <p:nvPr>
+            <p:ph type="ctrTitle"/>
+          </p:nvPr>
+        </p:nvSpPr>
+        <p:spPr>
+          <a:xfrm>
+            <a:off x="872066" y="73048"/>
+            <a:ext cx="8541173" cy="414467"/>
+          </a:xfrm>
+        </p:spPr>
+        <p:txBody>
+          <a:bodyPr>
+            <a:noAutofit/>
+          </a:bodyPr>
+          <a:lstStyle/>
+          <a:p>
+            <a:r>
+              <a:rPr lang="fr-BE" sz="2400" dirty="0" err="1"/>
+              <a:t>Implemenation</a:t>
+            </a:r>
+            <a:r>
+              <a:rPr lang="fr-BE" sz="2400" dirty="0"/>
+              <a:t> </a:t>
+            </a:r>
+            <a:r>
+              <a:rPr lang="fr-BE" sz="2400" b="1" i="1" dirty="0"/>
+              <a:t>.</a:t>
+            </a:r>
+            <a:r>
+              <a:rPr lang="fr-BE" sz="2400" b="1" i="1" dirty="0" err="1"/>
+              <a:t>env</a:t>
+            </a:r>
+            <a:r>
+              <a:rPr lang="fr-BE" sz="2400" b="1" i="1" dirty="0"/>
+              <a:t> </a:t>
+            </a:r>
+            <a:r>
+              <a:rPr lang="fr-BE" sz="2400" dirty="0"/>
+              <a:t>and </a:t>
+            </a:r>
+            <a:r>
+              <a:rPr lang="fr-BE" sz="2400" b="1" i="1" dirty="0" err="1"/>
+              <a:t>profile.yml</a:t>
+            </a:r>
+            <a:r>
+              <a:rPr lang="fr-BE" sz="2400" b="1" i="1" dirty="0"/>
+              <a:t> files</a:t>
+            </a:r>
+            <a:endParaRPr lang="en-BE" sz="2400" b="1" i="1" dirty="0"/>
+          </a:p>
+        </p:txBody>
+      </p:sp>
+      <p:sp>
+        <p:nvSpPr>
+          <p:cNvPr id="8" name="TextBox 7">
+            <a:extLst>
+              <a:ext uri="{FF2B5EF4-FFF2-40B4-BE49-F238E27FC236}">
+                <a16:creationId xmlns:a16="http://schemas.microsoft.com/office/drawing/2014/main" id="{2322A350-0A2D-D690-2790-B7E5FBBE9F78}"/>
+              </a:ext>
+            </a:extLst>
+          </p:cNvPr>
+          <p:cNvSpPr txBox="1"/>
+          <p:nvPr/>
+        </p:nvSpPr>
+        <p:spPr>
+          <a:xfrm>
+            <a:off x="1540672" y="1380067"/>
+            <a:ext cx="184731" cy="430887"/>
+          </a:xfrm>
+          <a:prstGeom prst="rect">
+            <a:avLst/>
+          </a:prstGeom>
+          <a:noFill/>
+        </p:spPr>
+        <p:txBody>
+          <a:bodyPr wrap="none" rtlCol="0">
+            <a:spAutoFit/>
+          </a:bodyPr>
+          <a:lstStyle/>
+          <a:p>
+            <a:endParaRPr lang="en-GB" sz="1100" dirty="0"/>
+          </a:p>
+          <a:p>
+            <a:endParaRPr lang="en-GB" sz="1100" dirty="0"/>
+          </a:p>
+        </p:txBody>
+      </p:sp>
+      <p:sp>
+        <p:nvSpPr>
+          <p:cNvPr id="3" name="TextBox 2">
+            <a:extLst>
+              <a:ext uri="{FF2B5EF4-FFF2-40B4-BE49-F238E27FC236}">
+                <a16:creationId xmlns:a16="http://schemas.microsoft.com/office/drawing/2014/main" id="{D35ABFBE-C6F2-DBAE-10A3-BD7D2BCD474D}"/>
+              </a:ext>
+            </a:extLst>
+          </p:cNvPr>
+          <p:cNvSpPr txBox="1"/>
+          <p:nvPr/>
+        </p:nvSpPr>
+        <p:spPr>
+          <a:xfrm>
+            <a:off x="355600" y="804333"/>
+            <a:ext cx="11590867" cy="1384995"/>
+          </a:xfrm>
+          <a:prstGeom prst="rect">
+            <a:avLst/>
+          </a:prstGeom>
+          <a:noFill/>
+        </p:spPr>
+        <p:txBody>
+          <a:bodyPr wrap="square" rtlCol="0">
+            <a:spAutoFit/>
+          </a:bodyPr>
+          <a:lstStyle/>
+          <a:p>
+            <a:pPr marL="228600" indent="-228600">
+              <a:buAutoNum type="arabicPeriod"/>
+            </a:pPr>
+            <a:r>
+              <a:rPr lang="fr-BE" sz="1050" dirty="0" err="1"/>
+              <a:t>Define</a:t>
+            </a:r>
+            <a:r>
+              <a:rPr lang="fr-BE" sz="1050" dirty="0"/>
+              <a:t> </a:t>
+            </a:r>
+            <a:r>
+              <a:rPr lang="fr-BE" sz="1050" b="1" dirty="0" err="1"/>
+              <a:t>dbt_Freshcart_project</a:t>
+            </a:r>
+            <a:r>
+              <a:rPr lang="fr-BE" sz="1050" b="1" dirty="0"/>
+              <a:t>\</a:t>
+            </a:r>
+            <a:r>
+              <a:rPr lang="fr-BE" sz="1050" b="1" dirty="0">
+                <a:highlight>
+                  <a:srgbClr val="FFFF00"/>
+                </a:highlight>
+              </a:rPr>
+              <a:t>.</a:t>
+            </a:r>
+            <a:r>
+              <a:rPr lang="fr-BE" sz="1050" b="1" dirty="0" err="1">
+                <a:highlight>
+                  <a:srgbClr val="FFFF00"/>
+                </a:highlight>
+              </a:rPr>
+              <a:t>env</a:t>
+            </a:r>
+            <a:r>
+              <a:rPr lang="fr-BE" sz="1050" b="1" dirty="0">
+                <a:highlight>
+                  <a:srgbClr val="FFFF00"/>
+                </a:highlight>
+              </a:rPr>
+              <a:t> </a:t>
+            </a:r>
+            <a:r>
+              <a:rPr lang="fr-BE" sz="1050" dirty="0"/>
+              <a:t>file to store all variable values (</a:t>
+            </a:r>
+            <a:r>
+              <a:rPr lang="fr-BE" sz="1050" b="1" i="1" dirty="0" err="1"/>
+              <a:t>conn</a:t>
+            </a:r>
+            <a:r>
+              <a:rPr lang="fr-BE" sz="1050" b="1" i="1" dirty="0"/>
+              <a:t>-string-</a:t>
+            </a:r>
+            <a:r>
+              <a:rPr lang="fr-BE" sz="1050" b="1" i="1" dirty="0" err="1"/>
+              <a:t>dwh</a:t>
+            </a:r>
+            <a:r>
+              <a:rPr lang="fr-BE" sz="1050" dirty="0"/>
+              <a:t>, </a:t>
+            </a:r>
+            <a:r>
+              <a:rPr lang="fr-BE" sz="1050" b="1" i="1" dirty="0" err="1"/>
+              <a:t>dwh</a:t>
+            </a:r>
+            <a:r>
+              <a:rPr lang="fr-BE" sz="1050" b="1" i="1" dirty="0"/>
+              <a:t>,</a:t>
+            </a:r>
+            <a:r>
+              <a:rPr lang="fr-BE" sz="1050" dirty="0"/>
+              <a:t> </a:t>
+            </a:r>
+            <a:r>
+              <a:rPr lang="fr-BE" sz="1050" b="1" i="1" dirty="0" err="1"/>
+              <a:t>Lkh</a:t>
+            </a:r>
+            <a:r>
+              <a:rPr lang="fr-BE" sz="1050" dirty="0"/>
+              <a:t> )</a:t>
+            </a:r>
+          </a:p>
+          <a:p>
+            <a:pPr marL="228600" indent="-228600">
+              <a:buAutoNum type="arabicPeriod"/>
+            </a:pPr>
+            <a:endParaRPr lang="fr-BE" sz="1050" dirty="0"/>
+          </a:p>
+          <a:p>
+            <a:pPr marL="228600" indent="-228600">
+              <a:buAutoNum type="arabicPeriod"/>
+            </a:pPr>
+            <a:endParaRPr lang="fr-BE" sz="1050" dirty="0"/>
+          </a:p>
+          <a:p>
+            <a:pPr marL="228600" indent="-228600">
+              <a:buAutoNum type="arabicPeriod"/>
+            </a:pPr>
+            <a:endParaRPr lang="fr-BE" sz="1050" dirty="0"/>
+          </a:p>
+          <a:p>
+            <a:pPr marL="228600" indent="-228600">
+              <a:buAutoNum type="arabicPeriod"/>
+            </a:pPr>
+            <a:endParaRPr lang="fr-BE" sz="1050" dirty="0"/>
+          </a:p>
+          <a:p>
+            <a:pPr marL="228600" indent="-228600">
+              <a:buAutoNum type="arabicPeriod"/>
+            </a:pPr>
+            <a:endParaRPr lang="fr-BE" sz="1050" dirty="0"/>
+          </a:p>
+          <a:p>
+            <a:pPr marL="228600" indent="-228600">
+              <a:buAutoNum type="arabicPeriod"/>
+            </a:pPr>
+            <a:endParaRPr lang="fr-BE" sz="1050" dirty="0"/>
+          </a:p>
+          <a:p>
+            <a:pPr marL="228600" indent="-228600">
+              <a:buAutoNum type="arabicPeriod"/>
+            </a:pPr>
+            <a:r>
+              <a:rPr lang="fr-BE" sz="1050" dirty="0" err="1"/>
+              <a:t>Define</a:t>
+            </a:r>
+            <a:r>
+              <a:rPr lang="fr-BE" sz="1050" dirty="0"/>
+              <a:t>  </a:t>
+            </a:r>
+            <a:r>
+              <a:rPr lang="en-GB" sz="1050" b="1" i="1" dirty="0"/>
+              <a:t>C:\Users\oumar.coulibaly\.dbt\</a:t>
+            </a:r>
+            <a:r>
+              <a:rPr lang="fr-BE" sz="1050" b="1" i="1" dirty="0" err="1">
+                <a:highlight>
+                  <a:srgbClr val="FFFF00"/>
+                </a:highlight>
+              </a:rPr>
+              <a:t>profile.yml</a:t>
+            </a:r>
+            <a:r>
+              <a:rPr lang="fr-BE" sz="1050" b="1" i="1" dirty="0">
+                <a:highlight>
+                  <a:srgbClr val="FFFF00"/>
+                </a:highlight>
+              </a:rPr>
+              <a:t> </a:t>
+            </a:r>
+            <a:r>
+              <a:rPr lang="fr-BE" sz="1050" dirty="0"/>
+              <a:t>file  in 1 document  (for </a:t>
+            </a:r>
+            <a:r>
+              <a:rPr lang="fr-BE" sz="1050" dirty="0" err="1"/>
+              <a:t>deployment</a:t>
+            </a:r>
+            <a:r>
+              <a:rPr lang="fr-BE" sz="1050" dirty="0"/>
+              <a:t> </a:t>
+            </a:r>
+            <a:r>
+              <a:rPr lang="fr-BE" sz="1050" dirty="0" err="1"/>
+              <a:t>containing</a:t>
+            </a:r>
+            <a:r>
+              <a:rPr lang="fr-BE" sz="1050" dirty="0"/>
+              <a:t> the </a:t>
+            </a:r>
+            <a:r>
+              <a:rPr lang="fr-BE" sz="1050" dirty="0" err="1"/>
+              <a:t>target</a:t>
+            </a:r>
+            <a:r>
+              <a:rPr lang="fr-BE" sz="1050" dirty="0"/>
+              <a:t> </a:t>
+            </a:r>
+            <a:r>
+              <a:rPr lang="fr-BE" sz="1050" dirty="0" err="1"/>
+              <a:t>environments</a:t>
+            </a:r>
+            <a:r>
+              <a:rPr lang="fr-BE" sz="1050" dirty="0"/>
+              <a:t> dev, test, prod)</a:t>
+            </a:r>
+            <a:endParaRPr lang="en-BE" sz="1050" dirty="0"/>
+          </a:p>
+        </p:txBody>
+      </p:sp>
+      <p:pic>
+        <p:nvPicPr>
+          <p:cNvPr id="7" name="Picture 6">
+            <a:extLst>
+              <a:ext uri="{FF2B5EF4-FFF2-40B4-BE49-F238E27FC236}">
+                <a16:creationId xmlns:a16="http://schemas.microsoft.com/office/drawing/2014/main" id="{F3A2986F-1B37-8C39-4E25-F700801B2911}"/>
+              </a:ext>
+            </a:extLst>
+          </p:cNvPr>
+          <p:cNvPicPr>
+            <a:picLocks noChangeAspect="1"/>
+          </p:cNvPicPr>
+          <p:nvPr/>
+        </p:nvPicPr>
+        <p:blipFill>
+          <a:blip r:embed="rId2"/>
+          <a:stretch>
+            <a:fillRect/>
+          </a:stretch>
+        </p:blipFill>
+        <p:spPr>
+          <a:xfrm>
+            <a:off x="1436754" y="1109049"/>
+            <a:ext cx="6942422" cy="594412"/>
+          </a:xfrm>
+          <a:prstGeom prst="rect">
+            <a:avLst/>
+          </a:prstGeom>
+        </p:spPr>
+      </p:pic>
+      <p:pic>
+        <p:nvPicPr>
+          <p:cNvPr id="14" name="Picture 13">
+            <a:extLst>
+              <a:ext uri="{FF2B5EF4-FFF2-40B4-BE49-F238E27FC236}">
+                <a16:creationId xmlns:a16="http://schemas.microsoft.com/office/drawing/2014/main" id="{FECFD901-1829-4879-9760-73438D916EAF}"/>
+              </a:ext>
+            </a:extLst>
+          </p:cNvPr>
+          <p:cNvPicPr>
+            <a:picLocks noChangeAspect="1"/>
+          </p:cNvPicPr>
+          <p:nvPr/>
+        </p:nvPicPr>
+        <p:blipFill>
+          <a:blip r:embed="rId3"/>
+          <a:stretch>
+            <a:fillRect/>
+          </a:stretch>
+        </p:blipFill>
+        <p:spPr>
+          <a:xfrm>
+            <a:off x="211666" y="2253235"/>
+            <a:ext cx="4037096" cy="1548300"/>
+          </a:xfrm>
+          <a:prstGeom prst="rect">
+            <a:avLst/>
+          </a:prstGeom>
+        </p:spPr>
+      </p:pic>
+      <p:pic>
+        <p:nvPicPr>
+          <p:cNvPr id="16" name="Picture 15">
+            <a:extLst>
+              <a:ext uri="{FF2B5EF4-FFF2-40B4-BE49-F238E27FC236}">
+                <a16:creationId xmlns:a16="http://schemas.microsoft.com/office/drawing/2014/main" id="{A5C17829-4D2A-4497-4ADA-E26EAB7D3EAE}"/>
+              </a:ext>
+            </a:extLst>
+          </p:cNvPr>
+          <p:cNvPicPr>
+            <a:picLocks noChangeAspect="1"/>
+          </p:cNvPicPr>
+          <p:nvPr/>
+        </p:nvPicPr>
+        <p:blipFill>
+          <a:blip r:embed="rId4"/>
+          <a:stretch>
+            <a:fillRect/>
+          </a:stretch>
+        </p:blipFill>
+        <p:spPr>
+          <a:xfrm>
+            <a:off x="211667" y="3850266"/>
+            <a:ext cx="3445934" cy="2389106"/>
+          </a:xfrm>
+          <a:prstGeom prst="rect">
+            <a:avLst/>
+          </a:prstGeom>
+        </p:spPr>
+      </p:pic>
+      <p:pic>
+        <p:nvPicPr>
+          <p:cNvPr id="18" name="Picture 17">
+            <a:extLst>
+              <a:ext uri="{FF2B5EF4-FFF2-40B4-BE49-F238E27FC236}">
+                <a16:creationId xmlns:a16="http://schemas.microsoft.com/office/drawing/2014/main" id="{DCB783A5-B6F6-D8D8-4ABC-5602DCE11175}"/>
+              </a:ext>
+            </a:extLst>
+          </p:cNvPr>
+          <p:cNvPicPr>
+            <a:picLocks noChangeAspect="1"/>
+          </p:cNvPicPr>
+          <p:nvPr/>
+        </p:nvPicPr>
+        <p:blipFill>
+          <a:blip r:embed="rId5"/>
+          <a:stretch>
+            <a:fillRect/>
+          </a:stretch>
+        </p:blipFill>
+        <p:spPr>
+          <a:xfrm>
+            <a:off x="3737365" y="3994301"/>
+            <a:ext cx="4235846" cy="2245071"/>
+          </a:xfrm>
+          <a:prstGeom prst="rect">
+            <a:avLst/>
+          </a:prstGeom>
+        </p:spPr>
+      </p:pic>
+      <p:pic>
+        <p:nvPicPr>
+          <p:cNvPr id="20" name="Picture 19">
+            <a:extLst>
+              <a:ext uri="{FF2B5EF4-FFF2-40B4-BE49-F238E27FC236}">
+                <a16:creationId xmlns:a16="http://schemas.microsoft.com/office/drawing/2014/main" id="{CE01A0C1-8100-AFFE-9FFC-AC56009C74CE}"/>
+              </a:ext>
+            </a:extLst>
+          </p:cNvPr>
+          <p:cNvPicPr>
+            <a:picLocks noChangeAspect="1"/>
+          </p:cNvPicPr>
+          <p:nvPr/>
+        </p:nvPicPr>
+        <p:blipFill>
+          <a:blip r:embed="rId6"/>
+          <a:stretch>
+            <a:fillRect/>
+          </a:stretch>
+        </p:blipFill>
+        <p:spPr>
+          <a:xfrm>
+            <a:off x="8052975" y="4121594"/>
+            <a:ext cx="4115947" cy="2117778"/>
+          </a:xfrm>
+          <a:prstGeom prst="rect">
+            <a:avLst/>
+          </a:prstGeom>
+        </p:spPr>
+      </p:pic>
+      <p:pic>
+        <p:nvPicPr>
+          <p:cNvPr id="22" name="Picture 21">
+            <a:extLst>
+              <a:ext uri="{FF2B5EF4-FFF2-40B4-BE49-F238E27FC236}">
+                <a16:creationId xmlns:a16="http://schemas.microsoft.com/office/drawing/2014/main" id="{7CA0DE46-A0DE-219D-EC94-581EC49F3A40}"/>
+              </a:ext>
+            </a:extLst>
+          </p:cNvPr>
+          <p:cNvPicPr>
+            <a:picLocks noChangeAspect="1"/>
+          </p:cNvPicPr>
+          <p:nvPr/>
+        </p:nvPicPr>
+        <p:blipFill>
+          <a:blip r:embed="rId7"/>
+          <a:stretch>
+            <a:fillRect/>
+          </a:stretch>
+        </p:blipFill>
+        <p:spPr>
+          <a:xfrm>
+            <a:off x="5142652" y="2242069"/>
+            <a:ext cx="3706259" cy="1457864"/>
+          </a:xfrm>
+          <a:prstGeom prst="rect">
+            <a:avLst/>
+          </a:prstGeom>
+        </p:spPr>
+      </p:pic>
+    </p:spTree>
+    <p:extLst>
+      <p:ext uri="{BB962C8B-B14F-4D97-AF65-F5344CB8AC3E}">
+        <p14:creationId xmlns:p14="http://schemas.microsoft.com/office/powerpoint/2010/main" val="3564959877"/>
+      </p:ext>
+    </p:extLst>
+  </p:cSld>
+  <p:clrMapOvr>
+    <a:masterClrMapping/>
+  </p:clrMapOvr>
+</p:sld>
+</file>
+
+<file path=ppt/slides/slide9.xml><?xml version="1.0" encoding="utf-8"?>
+<p:sld xmlns:a="http://schemas.openxmlformats.org/drawingml/2006/main" xmlns:r="http://schemas.openxmlformats.org/officeDocument/2006/relationships" xmlns:p="http://schemas.openxmlformats.org/presentationml/2006/main">
+  <p:cSld>
+    <p:spTree>
+      <p:nvGrpSpPr>
+        <p:cNvPr id="1" name="">
+          <a:extLst>
+            <a:ext uri="{FF2B5EF4-FFF2-40B4-BE49-F238E27FC236}">
+              <a16:creationId xmlns:a16="http://schemas.microsoft.com/office/drawing/2014/main" id="{F444A7C3-A176-302D-74BD-8B039B22E18B}"/>
+            </a:ext>
+          </a:extLst>
+        </p:cNvPr>
+        <p:cNvGrpSpPr/>
+        <p:nvPr/>
+      </p:nvGrpSpPr>
+      <p:grpSpPr>
+        <a:xfrm>
+          <a:off x="0" y="0"/>
+          <a:ext cx="0" cy="0"/>
+          <a:chOff x="0" y="0"/>
+          <a:chExt cx="0" cy="0"/>
+        </a:xfrm>
+      </p:grpSpPr>
+      <p:sp>
+        <p:nvSpPr>
+          <p:cNvPr id="2" name="Title 1">
+            <a:extLst>
+              <a:ext uri="{FF2B5EF4-FFF2-40B4-BE49-F238E27FC236}">
+                <a16:creationId xmlns:a16="http://schemas.microsoft.com/office/drawing/2014/main" id="{CCA38983-9765-11EF-E0DB-7EFAA423E1D9}"/>
+              </a:ext>
+            </a:extLst>
+          </p:cNvPr>
+          <p:cNvSpPr>
+            <a:spLocks noGrp="1"/>
+          </p:cNvSpPr>
+          <p:nvPr>
+            <p:ph type="ctrTitle"/>
+          </p:nvPr>
+        </p:nvSpPr>
+        <p:spPr>
+          <a:xfrm>
+            <a:off x="872066" y="73048"/>
+            <a:ext cx="8541173" cy="414467"/>
+          </a:xfrm>
+        </p:spPr>
+        <p:txBody>
+          <a:bodyPr>
+            <a:noAutofit/>
+          </a:bodyPr>
+          <a:lstStyle/>
+          <a:p>
+            <a:r>
+              <a:rPr lang="fr-BE" sz="2800" dirty="0" err="1"/>
+              <a:t>Implemenation</a:t>
+            </a:r>
+            <a:r>
+              <a:rPr lang="fr-BE" sz="2800" dirty="0"/>
+              <a:t> </a:t>
+            </a:r>
+            <a:r>
+              <a:rPr lang="fr-BE" sz="2800" b="1" i="1" dirty="0" err="1"/>
+              <a:t>source.yml</a:t>
+            </a:r>
+            <a:r>
+              <a:rPr lang="fr-BE" sz="2800" b="1" i="1" dirty="0"/>
+              <a:t> and </a:t>
+            </a:r>
+            <a:r>
+              <a:rPr lang="fr-BE" sz="2800" b="1" i="1" dirty="0" err="1"/>
+              <a:t>project.yml</a:t>
+            </a:r>
+            <a:endParaRPr lang="en-BE" sz="2800" dirty="0"/>
+          </a:p>
+        </p:txBody>
+      </p:sp>
+      <p:sp>
+        <p:nvSpPr>
+          <p:cNvPr id="8" name="TextBox 7">
+            <a:extLst>
+              <a:ext uri="{FF2B5EF4-FFF2-40B4-BE49-F238E27FC236}">
+                <a16:creationId xmlns:a16="http://schemas.microsoft.com/office/drawing/2014/main" id="{D03833FE-2AEB-CC35-831F-B5D915759463}"/>
+              </a:ext>
+            </a:extLst>
+          </p:cNvPr>
+          <p:cNvSpPr txBox="1"/>
+          <p:nvPr/>
+        </p:nvSpPr>
+        <p:spPr>
+          <a:xfrm>
+            <a:off x="1540672" y="1380067"/>
+            <a:ext cx="184731" cy="430887"/>
+          </a:xfrm>
+          <a:prstGeom prst="rect">
+            <a:avLst/>
+          </a:prstGeom>
+          <a:noFill/>
+        </p:spPr>
+        <p:txBody>
+          <a:bodyPr wrap="none" rtlCol="0">
+            <a:spAutoFit/>
+          </a:bodyPr>
+          <a:lstStyle/>
+          <a:p>
+            <a:endParaRPr lang="en-GB" sz="1100" dirty="0"/>
+          </a:p>
+          <a:p>
+            <a:endParaRPr lang="en-GB" sz="1100" dirty="0"/>
+          </a:p>
+        </p:txBody>
+      </p:sp>
+      <p:sp>
+        <p:nvSpPr>
+          <p:cNvPr id="3" name="TextBox 2">
+            <a:extLst>
+              <a:ext uri="{FF2B5EF4-FFF2-40B4-BE49-F238E27FC236}">
+                <a16:creationId xmlns:a16="http://schemas.microsoft.com/office/drawing/2014/main" id="{262FBD14-B821-6FC3-3B13-A87816A58DCD}"/>
+              </a:ext>
+            </a:extLst>
+          </p:cNvPr>
+          <p:cNvSpPr txBox="1"/>
+          <p:nvPr/>
+        </p:nvSpPr>
+        <p:spPr>
+          <a:xfrm>
+            <a:off x="355600" y="804333"/>
+            <a:ext cx="11590867" cy="3808735"/>
+          </a:xfrm>
+          <a:prstGeom prst="rect">
+            <a:avLst/>
+          </a:prstGeom>
+          <a:noFill/>
+        </p:spPr>
+        <p:txBody>
+          <a:bodyPr wrap="square" rtlCol="0">
+            <a:spAutoFit/>
+          </a:bodyPr>
+          <a:lstStyle/>
+          <a:p>
+            <a:r>
+              <a:rPr lang="fr-BE" sz="1050" dirty="0"/>
+              <a:t>3. </a:t>
+            </a:r>
+            <a:r>
+              <a:rPr lang="fr-BE" sz="1050" dirty="0" err="1"/>
+              <a:t>Define</a:t>
+            </a:r>
+            <a:r>
+              <a:rPr lang="fr-BE" sz="1050" dirty="0"/>
+              <a:t> </a:t>
+            </a:r>
+            <a:r>
+              <a:rPr lang="fr-BE" sz="1050" b="1" dirty="0" err="1"/>
+              <a:t>dbt_Freshcart_project</a:t>
+            </a:r>
+            <a:r>
+              <a:rPr lang="fr-BE" sz="1050" b="1" dirty="0"/>
+              <a:t>\</a:t>
+            </a:r>
+            <a:r>
+              <a:rPr lang="fr-BE" sz="1050" b="1" dirty="0">
+                <a:highlight>
+                  <a:srgbClr val="FFFF00"/>
+                </a:highlight>
+              </a:rPr>
+              <a:t>source </a:t>
+            </a:r>
+            <a:r>
+              <a:rPr lang="fr-BE" sz="1050" dirty="0"/>
+              <a:t>fi </a:t>
+            </a:r>
+            <a:r>
+              <a:rPr lang="fr-BE" sz="1050" dirty="0" err="1"/>
+              <a:t>containing</a:t>
+            </a:r>
+            <a:r>
+              <a:rPr lang="fr-BE" sz="1050" dirty="0"/>
+              <a:t> source system info  (</a:t>
+            </a:r>
+            <a:r>
+              <a:rPr lang="fr-BE" sz="1050" b="1" i="1" dirty="0"/>
+              <a:t>in </a:t>
+            </a:r>
+            <a:r>
+              <a:rPr lang="fr-BE" sz="1050" b="1" i="1" dirty="0" err="1"/>
+              <a:t>this</a:t>
+            </a:r>
+            <a:r>
+              <a:rPr lang="fr-BE" sz="1050" b="1" i="1" dirty="0"/>
+              <a:t> case </a:t>
+            </a:r>
+            <a:r>
+              <a:rPr lang="fr-BE" sz="1050" b="1" i="1" dirty="0" err="1"/>
+              <a:t>it’s</a:t>
+            </a:r>
+            <a:r>
+              <a:rPr lang="fr-BE" sz="1050" b="1" i="1" dirty="0"/>
+              <a:t> the</a:t>
+            </a:r>
+            <a:r>
+              <a:rPr lang="fr-BE" sz="1050" dirty="0"/>
+              <a:t> </a:t>
+            </a:r>
+            <a:r>
+              <a:rPr lang="fr-BE" sz="1050" b="1" i="1" dirty="0" err="1"/>
+              <a:t>Lkh</a:t>
+            </a:r>
+            <a:r>
+              <a:rPr lang="fr-BE" sz="1050" b="1" i="1" dirty="0"/>
+              <a:t> , </a:t>
+            </a:r>
+            <a:r>
+              <a:rPr lang="fr-BE" sz="1050" b="1" i="1" dirty="0" err="1"/>
+              <a:t>scheam</a:t>
+            </a:r>
+            <a:r>
+              <a:rPr lang="fr-BE" sz="1050" b="1" i="1" dirty="0"/>
+              <a:t> and tables </a:t>
+            </a:r>
+            <a:r>
+              <a:rPr lang="fr-BE" sz="1050" dirty="0"/>
+              <a:t> )</a:t>
+            </a:r>
+          </a:p>
+          <a:p>
+            <a:pPr marL="228600" indent="-228600">
+              <a:buAutoNum type="arabicPeriod"/>
+            </a:pPr>
+            <a:endParaRPr lang="fr-BE" sz="1050" dirty="0"/>
+          </a:p>
+          <a:p>
+            <a:pPr marL="228600" indent="-228600">
+              <a:buAutoNum type="arabicPeriod"/>
+            </a:pPr>
+            <a:endParaRPr lang="fr-BE" sz="1050" dirty="0"/>
+          </a:p>
+          <a:p>
+            <a:pPr marL="228600" indent="-228600">
+              <a:buAutoNum type="arabicPeriod"/>
+            </a:pPr>
+            <a:endParaRPr lang="fr-BE" sz="1050" dirty="0"/>
+          </a:p>
+          <a:p>
+            <a:pPr marL="228600" indent="-228600">
+              <a:buAutoNum type="arabicPeriod"/>
+            </a:pPr>
+            <a:endParaRPr lang="fr-BE" sz="1050" dirty="0"/>
+          </a:p>
+          <a:p>
+            <a:pPr marL="228600" indent="-228600">
+              <a:buAutoNum type="arabicPeriod"/>
+            </a:pPr>
+            <a:endParaRPr lang="fr-BE" sz="1050" dirty="0"/>
+          </a:p>
+          <a:p>
+            <a:pPr marL="228600" indent="-228600">
+              <a:buAutoNum type="arabicPeriod"/>
+            </a:pPr>
+            <a:endParaRPr lang="fr-BE" sz="1050" dirty="0"/>
+          </a:p>
+          <a:p>
+            <a:pPr marL="228600" indent="-228600">
+              <a:buAutoNum type="arabicPeriod"/>
+            </a:pPr>
+            <a:endParaRPr lang="fr-BE" sz="1050" dirty="0"/>
+          </a:p>
+          <a:p>
+            <a:pPr marL="228600" indent="-228600">
+              <a:buAutoNum type="arabicPeriod"/>
+            </a:pPr>
+            <a:endParaRPr lang="fr-BE" sz="1050" dirty="0"/>
+          </a:p>
+          <a:p>
+            <a:pPr marL="228600" indent="-228600">
+              <a:buAutoNum type="arabicPeriod"/>
+            </a:pPr>
+            <a:endParaRPr lang="fr-BE" sz="1050" dirty="0"/>
+          </a:p>
+          <a:p>
+            <a:pPr marL="228600" indent="-228600">
+              <a:buAutoNum type="arabicPeriod"/>
+            </a:pPr>
+            <a:endParaRPr lang="fr-BE" sz="1050" dirty="0"/>
+          </a:p>
+          <a:p>
+            <a:pPr marL="228600" indent="-228600">
+              <a:buAutoNum type="arabicPeriod"/>
+            </a:pPr>
+            <a:endParaRPr lang="fr-BE" sz="1050" dirty="0"/>
+          </a:p>
+          <a:p>
+            <a:pPr marL="228600" indent="-228600">
+              <a:buAutoNum type="arabicPeriod"/>
+            </a:pPr>
+            <a:endParaRPr lang="fr-BE" sz="1050" dirty="0"/>
+          </a:p>
+          <a:p>
+            <a:pPr marL="228600" indent="-228600">
+              <a:buAutoNum type="arabicPeriod"/>
+            </a:pPr>
+            <a:endParaRPr lang="fr-BE" sz="1050" dirty="0"/>
+          </a:p>
+          <a:p>
+            <a:pPr marL="228600" indent="-228600">
+              <a:buAutoNum type="arabicPeriod"/>
+            </a:pPr>
+            <a:endParaRPr lang="fr-BE" sz="1050" dirty="0"/>
+          </a:p>
+          <a:p>
+            <a:pPr marL="228600" indent="-228600">
+              <a:buAutoNum type="arabicPeriod"/>
+            </a:pPr>
+            <a:endParaRPr lang="fr-BE" sz="1050" dirty="0"/>
+          </a:p>
+          <a:p>
+            <a:pPr marL="228600" indent="-228600">
+              <a:buAutoNum type="arabicPeriod"/>
+            </a:pPr>
+            <a:endParaRPr lang="fr-BE" sz="1050" dirty="0"/>
+          </a:p>
+          <a:p>
+            <a:pPr marL="228600" indent="-228600">
+              <a:buAutoNum type="arabicPeriod"/>
+            </a:pPr>
+            <a:endParaRPr lang="fr-BE" sz="1050" dirty="0"/>
+          </a:p>
+          <a:p>
+            <a:pPr marL="228600" indent="-228600">
+              <a:buAutoNum type="arabicPeriod"/>
+            </a:pPr>
+            <a:endParaRPr lang="fr-BE" sz="1050" dirty="0"/>
+          </a:p>
+          <a:p>
+            <a:r>
+              <a:rPr lang="fr-BE" sz="1050" dirty="0"/>
+              <a:t>4. </a:t>
+            </a:r>
+            <a:r>
+              <a:rPr lang="fr-BE" sz="1050" dirty="0" err="1"/>
+              <a:t>Define</a:t>
+            </a:r>
+            <a:r>
+              <a:rPr lang="fr-BE" sz="1050" dirty="0"/>
+              <a:t> </a:t>
+            </a:r>
+            <a:r>
+              <a:rPr lang="fr-BE" sz="1050" b="1" dirty="0" err="1"/>
+              <a:t>dbt_Freshcart_project</a:t>
+            </a:r>
+            <a:r>
+              <a:rPr lang="fr-BE" sz="1050" b="1" dirty="0"/>
+              <a:t>\</a:t>
+            </a:r>
+            <a:r>
+              <a:rPr lang="fr-BE" sz="1050" b="1" dirty="0" err="1">
+                <a:highlight>
+                  <a:srgbClr val="FFFF00"/>
+                </a:highlight>
+              </a:rPr>
+              <a:t>dbt_project.yml</a:t>
+            </a:r>
+            <a:r>
+              <a:rPr lang="fr-BE" sz="1050" b="1" dirty="0">
+                <a:highlight>
+                  <a:srgbClr val="FFFF00"/>
+                </a:highlight>
+              </a:rPr>
+              <a:t>  </a:t>
+            </a:r>
+            <a:r>
+              <a:rPr lang="fr-BE" sz="1050" dirty="0"/>
+              <a:t>file   (for the mapping </a:t>
+            </a:r>
+            <a:r>
+              <a:rPr lang="fr-BE" sz="1050" dirty="0" err="1"/>
+              <a:t>tussen</a:t>
+            </a:r>
+            <a:r>
+              <a:rPr lang="fr-BE" sz="1050" dirty="0"/>
+              <a:t> </a:t>
+            </a:r>
+            <a:r>
+              <a:rPr lang="fr-BE" sz="1050" dirty="0" err="1"/>
+              <a:t>fabric</a:t>
+            </a:r>
+            <a:r>
+              <a:rPr lang="fr-BE" sz="1050" dirty="0"/>
+              <a:t> </a:t>
+            </a:r>
+            <a:r>
+              <a:rPr lang="fr-BE" sz="1050" dirty="0" err="1"/>
+              <a:t>Lkh</a:t>
+            </a:r>
+            <a:r>
+              <a:rPr lang="fr-BE" sz="1050" dirty="0"/>
+              <a:t> and </a:t>
+            </a:r>
+            <a:r>
+              <a:rPr lang="fr-BE" sz="1050" dirty="0" err="1"/>
+              <a:t>dwh</a:t>
+            </a:r>
+            <a:r>
+              <a:rPr lang="fr-BE" sz="1050" dirty="0"/>
+              <a:t> </a:t>
+            </a:r>
+            <a:r>
+              <a:rPr lang="fr-BE" sz="1050" dirty="0" err="1"/>
+              <a:t>with</a:t>
+            </a:r>
+            <a:r>
+              <a:rPr lang="fr-BE" sz="1050" dirty="0"/>
+              <a:t> </a:t>
+            </a:r>
+            <a:r>
+              <a:rPr lang="fr-BE" sz="1050" dirty="0" err="1"/>
+              <a:t>dbt</a:t>
+            </a:r>
+            <a:r>
+              <a:rPr lang="fr-BE" sz="1050" dirty="0"/>
+              <a:t> </a:t>
+            </a:r>
+            <a:r>
+              <a:rPr lang="fr-BE" sz="1050" dirty="0" err="1"/>
+              <a:t>objects</a:t>
+            </a:r>
+            <a:r>
+              <a:rPr lang="fr-BE" sz="1050" dirty="0"/>
+              <a:t> )</a:t>
+            </a:r>
+          </a:p>
+          <a:p>
+            <a:endParaRPr lang="fr-BE" sz="1050" dirty="0"/>
+          </a:p>
+          <a:p>
+            <a:r>
+              <a:rPr lang="fr-BE" sz="1050" dirty="0"/>
+              <a:t>In (</a:t>
+            </a:r>
+            <a:r>
+              <a:rPr lang="fr-BE" sz="1050" dirty="0" err="1"/>
+              <a:t>dbt</a:t>
+            </a:r>
+            <a:r>
+              <a:rPr lang="fr-BE" sz="1050" dirty="0"/>
+              <a:t>) </a:t>
+            </a:r>
+            <a:r>
+              <a:rPr lang="fr-BE" sz="1050" dirty="0" err="1"/>
+              <a:t>models</a:t>
+            </a:r>
+            <a:r>
+              <a:rPr lang="fr-BE" sz="1050" dirty="0"/>
+              <a:t>\</a:t>
+            </a:r>
+            <a:r>
+              <a:rPr lang="fr-BE" sz="1050" dirty="0" err="1"/>
+              <a:t>staging</a:t>
+            </a:r>
+            <a:r>
+              <a:rPr lang="fr-BE" sz="1050" dirty="0"/>
+              <a:t>\ </a:t>
+            </a:r>
+            <a:r>
+              <a:rPr lang="fr-BE" sz="1050" b="1" i="1" dirty="0" err="1"/>
+              <a:t>stg_customer</a:t>
+            </a:r>
+            <a:r>
+              <a:rPr lang="fr-BE" sz="1050" b="1" i="1" dirty="0"/>
+              <a:t>   </a:t>
+            </a:r>
+            <a:r>
+              <a:rPr lang="fr-BE" sz="1050" dirty="0" err="1"/>
+              <a:t>fabric</a:t>
+            </a:r>
+            <a:r>
+              <a:rPr lang="fr-BE" sz="1050" dirty="0"/>
+              <a:t> (bronze) </a:t>
+            </a:r>
+            <a:r>
+              <a:rPr lang="fr-BE" sz="1050" dirty="0" err="1"/>
+              <a:t>raw_customers</a:t>
+            </a:r>
+            <a:r>
+              <a:rPr lang="fr-BE" sz="1050" dirty="0"/>
+              <a:t>  </a:t>
+            </a:r>
+            <a:r>
+              <a:rPr lang="fr-BE" sz="1050" dirty="0" err="1"/>
+              <a:t>get</a:t>
+            </a:r>
+            <a:r>
+              <a:rPr lang="fr-BE" sz="1050" dirty="0"/>
+              <a:t> </a:t>
+            </a:r>
+            <a:r>
+              <a:rPr lang="fr-BE" sz="1050" dirty="0" err="1"/>
+              <a:t>transformed</a:t>
+            </a:r>
+            <a:r>
+              <a:rPr lang="fr-BE" sz="1050" dirty="0"/>
+              <a:t> </a:t>
+            </a:r>
+          </a:p>
+          <a:p>
+            <a:r>
+              <a:rPr lang="fr-BE" sz="1050" dirty="0"/>
+              <a:t>to </a:t>
+            </a:r>
+            <a:r>
+              <a:rPr lang="fr-BE" sz="1050" dirty="0" err="1"/>
+              <a:t>become</a:t>
+            </a:r>
+            <a:r>
+              <a:rPr lang="fr-BE" sz="1050" dirty="0"/>
+              <a:t>  </a:t>
+            </a:r>
+            <a:r>
+              <a:rPr lang="fr-BE" sz="1050" b="1" i="1" dirty="0" err="1"/>
+              <a:t>dbo_silver.stg_customer</a:t>
+            </a:r>
+            <a:r>
+              <a:rPr lang="fr-BE" sz="1050" b="1" i="1" dirty="0"/>
+              <a:t> </a:t>
+            </a:r>
+            <a:r>
+              <a:rPr lang="fr-BE" sz="1050" dirty="0"/>
+              <a:t>in the </a:t>
+            </a:r>
+            <a:r>
+              <a:rPr lang="fr-BE" sz="1050" dirty="0" err="1"/>
+              <a:t>dwh</a:t>
+            </a:r>
+            <a:r>
+              <a:rPr lang="fr-BE" sz="1050" dirty="0"/>
+              <a:t>. </a:t>
+            </a:r>
+            <a:endParaRPr lang="en-BE" sz="1050" dirty="0"/>
+          </a:p>
+        </p:txBody>
+      </p:sp>
+      <p:pic>
+        <p:nvPicPr>
+          <p:cNvPr id="24" name="Picture 23">
+            <a:extLst>
+              <a:ext uri="{FF2B5EF4-FFF2-40B4-BE49-F238E27FC236}">
+                <a16:creationId xmlns:a16="http://schemas.microsoft.com/office/drawing/2014/main" id="{537B1093-2672-10DE-D5EB-EBB201D4B8EA}"/>
+              </a:ext>
+            </a:extLst>
+          </p:cNvPr>
+          <p:cNvPicPr>
+            <a:picLocks noChangeAspect="1"/>
+          </p:cNvPicPr>
+          <p:nvPr/>
+        </p:nvPicPr>
+        <p:blipFill>
+          <a:blip r:embed="rId2"/>
+          <a:stretch>
+            <a:fillRect/>
+          </a:stretch>
+        </p:blipFill>
+        <p:spPr>
+          <a:xfrm>
+            <a:off x="450551" y="1083734"/>
+            <a:ext cx="3528782" cy="2679076"/>
+          </a:xfrm>
+          <a:prstGeom prst="rect">
+            <a:avLst/>
+          </a:prstGeom>
+        </p:spPr>
+      </p:pic>
+      <p:pic>
+        <p:nvPicPr>
+          <p:cNvPr id="26" name="Picture 25">
+            <a:extLst>
+              <a:ext uri="{FF2B5EF4-FFF2-40B4-BE49-F238E27FC236}">
+                <a16:creationId xmlns:a16="http://schemas.microsoft.com/office/drawing/2014/main" id="{893D9A56-4203-A0AC-151A-C00847E995FF}"/>
+              </a:ext>
+            </a:extLst>
+          </p:cNvPr>
+          <p:cNvPicPr>
+            <a:picLocks noChangeAspect="1"/>
+          </p:cNvPicPr>
+          <p:nvPr/>
+        </p:nvPicPr>
+        <p:blipFill>
+          <a:blip r:embed="rId3"/>
+          <a:stretch>
+            <a:fillRect/>
+          </a:stretch>
+        </p:blipFill>
+        <p:spPr>
+          <a:xfrm>
+            <a:off x="7935144" y="389332"/>
+            <a:ext cx="2956187" cy="3738988"/>
+          </a:xfrm>
+          <a:prstGeom prst="rect">
+            <a:avLst/>
+          </a:prstGeom>
+        </p:spPr>
+      </p:pic>
+      <p:pic>
+        <p:nvPicPr>
+          <p:cNvPr id="28" name="Picture 27">
+            <a:extLst>
+              <a:ext uri="{FF2B5EF4-FFF2-40B4-BE49-F238E27FC236}">
+                <a16:creationId xmlns:a16="http://schemas.microsoft.com/office/drawing/2014/main" id="{1FC7DB17-539C-7BD1-D740-096D3A73F55F}"/>
+              </a:ext>
+            </a:extLst>
+          </p:cNvPr>
+          <p:cNvPicPr>
+            <a:picLocks noChangeAspect="1"/>
+          </p:cNvPicPr>
+          <p:nvPr/>
+        </p:nvPicPr>
+        <p:blipFill>
+          <a:blip r:embed="rId4"/>
+          <a:stretch>
+            <a:fillRect/>
+          </a:stretch>
+        </p:blipFill>
+        <p:spPr>
+          <a:xfrm>
+            <a:off x="8043334" y="2992343"/>
+            <a:ext cx="2641599" cy="3476325"/>
+          </a:xfrm>
+          <a:prstGeom prst="rect">
+            <a:avLst/>
+          </a:prstGeom>
+        </p:spPr>
+      </p:pic>
+    </p:spTree>
+    <p:extLst>
+      <p:ext uri="{BB962C8B-B14F-4D97-AF65-F5344CB8AC3E}">
+        <p14:creationId xmlns:p14="http://schemas.microsoft.com/office/powerpoint/2010/main" val="3499990997"/>
       </p:ext>
     </p:extLst>
   </p:cSld>

--- a/dbt/dbt.pptx
+++ b/dbt/dbt.pptx
@@ -6626,6 +6626,108 @@
           </a:prstGeom>
         </p:spPr>
       </p:pic>
+      <p:sp>
+        <p:nvSpPr>
+          <p:cNvPr id="13" name="TextBox 12">
+            <a:extLst>
+              <a:ext uri="{FF2B5EF4-FFF2-40B4-BE49-F238E27FC236}">
+                <a16:creationId xmlns:a16="http://schemas.microsoft.com/office/drawing/2014/main" id="{DE006ED9-2CE1-933A-8F33-2D52929572A0}"/>
+              </a:ext>
+            </a:extLst>
+          </p:cNvPr>
+          <p:cNvSpPr txBox="1"/>
+          <p:nvPr/>
+        </p:nvSpPr>
+        <p:spPr>
+          <a:xfrm>
+            <a:off x="228600" y="5190067"/>
+            <a:ext cx="6503113" cy="461665"/>
+          </a:xfrm>
+          <a:prstGeom prst="rect">
+            <a:avLst/>
+          </a:prstGeom>
+          <a:noFill/>
+        </p:spPr>
+        <p:txBody>
+          <a:bodyPr wrap="square" rtlCol="0">
+            <a:spAutoFit/>
+          </a:bodyPr>
+          <a:lstStyle/>
+          <a:p>
+            <a:r>
+              <a:rPr lang="fr-BE" sz="1200" dirty="0" err="1"/>
+              <a:t>Now</a:t>
+            </a:r>
+            <a:r>
+              <a:rPr lang="fr-BE" sz="1200" dirty="0"/>
+              <a:t> </a:t>
+            </a:r>
+          </a:p>
+          <a:p>
+            <a:r>
+              <a:rPr lang="fr-BE" sz="1200" dirty="0"/>
+              <a:t>1. </a:t>
+            </a:r>
+            <a:r>
+              <a:rPr lang="fr-BE" sz="1200" dirty="0" err="1"/>
+              <a:t>Create</a:t>
+            </a:r>
+            <a:r>
+              <a:rPr lang="fr-BE" sz="1200" dirty="0"/>
+              <a:t> 2 folders (</a:t>
+            </a:r>
+            <a:r>
+              <a:rPr lang="fr-BE" sz="1200" b="1" i="1" dirty="0" err="1"/>
+              <a:t>staging</a:t>
+            </a:r>
+            <a:r>
+              <a:rPr lang="fr-BE" sz="1200" dirty="0"/>
+              <a:t> , </a:t>
+            </a:r>
+            <a:r>
+              <a:rPr lang="fr-BE" sz="1200" b="1" i="1" dirty="0" err="1"/>
+              <a:t>mart</a:t>
+            </a:r>
+            <a:r>
+              <a:rPr lang="fr-BE" sz="1200" dirty="0"/>
+              <a:t> ) in the </a:t>
+            </a:r>
+            <a:r>
+              <a:rPr lang="fr-BE" sz="1200" dirty="0" err="1"/>
+              <a:t>models</a:t>
+            </a:r>
+            <a:r>
+              <a:rPr lang="fr-BE" sz="1200" dirty="0"/>
+              <a:t> folder  to </a:t>
+            </a:r>
+            <a:r>
+              <a:rPr lang="fr-BE" sz="1200" dirty="0" err="1"/>
+              <a:t>macth</a:t>
+            </a:r>
+            <a:r>
+              <a:rPr lang="fr-BE" sz="1200" dirty="0"/>
+              <a:t> </a:t>
+            </a:r>
+            <a:r>
+              <a:rPr lang="fr-BE" sz="1200" dirty="0" err="1"/>
+              <a:t>with</a:t>
+            </a:r>
+            <a:r>
+              <a:rPr lang="fr-BE" sz="1200" dirty="0"/>
+              <a:t> </a:t>
+            </a:r>
+            <a:r>
+              <a:rPr lang="fr-BE" sz="1200" dirty="0" err="1"/>
+              <a:t>project.yml</a:t>
+            </a:r>
+            <a:r>
+              <a:rPr lang="fr-BE" sz="1200" dirty="0"/>
+              <a:t> file </a:t>
+            </a:r>
+            <a:endParaRPr lang="en-BE" sz="1200" dirty="0"/>
+          </a:p>
+        </p:txBody>
+      </p:sp>
     </p:spTree>
     <p:extLst>
       <p:ext uri="{BB962C8B-B14F-4D97-AF65-F5344CB8AC3E}">
@@ -7002,7 +7104,7 @@
         </p:nvSpPr>
         <p:spPr>
           <a:xfrm>
-            <a:off x="5903408" y="4870287"/>
+            <a:off x="5903408" y="4878754"/>
             <a:ext cx="5645126" cy="1569660"/>
           </a:xfrm>
           <a:prstGeom prst="rect">
@@ -7136,6 +7238,66 @@
             <a:r>
               <a:rPr lang="fr-BE" sz="1200" dirty="0"/>
               <a:t>.</a:t>
+            </a:r>
+            <a:endParaRPr lang="en-BE" sz="1200" dirty="0"/>
+          </a:p>
+        </p:txBody>
+      </p:sp>
+      <p:sp>
+        <p:nvSpPr>
+          <p:cNvPr id="13" name="TextBox 12">
+            <a:extLst>
+              <a:ext uri="{FF2B5EF4-FFF2-40B4-BE49-F238E27FC236}">
+                <a16:creationId xmlns:a16="http://schemas.microsoft.com/office/drawing/2014/main" id="{F8289943-47CA-35DA-6DF4-1563BCAA67C0}"/>
+              </a:ext>
+            </a:extLst>
+          </p:cNvPr>
+          <p:cNvSpPr txBox="1"/>
+          <p:nvPr/>
+        </p:nvSpPr>
+        <p:spPr>
+          <a:xfrm>
+            <a:off x="7052733" y="745067"/>
+            <a:ext cx="3996267" cy="276999"/>
+          </a:xfrm>
+          <a:prstGeom prst="rect">
+            <a:avLst/>
+          </a:prstGeom>
+          <a:noFill/>
+        </p:spPr>
+        <p:txBody>
+          <a:bodyPr wrap="square" rtlCol="0">
+            <a:spAutoFit/>
+          </a:bodyPr>
+          <a:lstStyle/>
+          <a:p>
+            <a:r>
+              <a:rPr lang="fr-BE" sz="1200" dirty="0"/>
+              <a:t>0. </a:t>
+            </a:r>
+            <a:r>
+              <a:rPr lang="fr-BE" sz="1200" dirty="0" err="1"/>
+              <a:t>Create</a:t>
+            </a:r>
+            <a:r>
+              <a:rPr lang="fr-BE" sz="1200" dirty="0"/>
+              <a:t> a </a:t>
+            </a:r>
+            <a:r>
+              <a:rPr lang="fr-BE" sz="1200" b="1" i="1" dirty="0" err="1"/>
+              <a:t>source.yml</a:t>
+            </a:r>
+            <a:r>
+              <a:rPr lang="fr-BE" sz="1200" b="1" i="1" dirty="0"/>
+              <a:t> </a:t>
+            </a:r>
+            <a:r>
+              <a:rPr lang="fr-BE" sz="1200" dirty="0"/>
+              <a:t>file in the </a:t>
+            </a:r>
+            <a:r>
+              <a:rPr lang="fr-BE" sz="1200" dirty="0" err="1"/>
+              <a:t>staging</a:t>
             </a:r>
             <a:endParaRPr lang="en-BE" sz="1200" dirty="0"/>
           </a:p>
